--- a/proposals/機種分析/モンキーターンV/monkeyturn_guide_v2.pptx
+++ b/proposals/機種分析/モンキーターンV/monkeyturn_guide_v2.pptx
@@ -6137,11 +6137,11 @@
             <a:avLst/>
           </a:prstGeom>
           <a:solidFill>
-            <a:srgbClr val="040E22"/>
+            <a:srgbClr val="061022"/>
           </a:solidFill>
           <a:ln w="22860">
             <a:solidFill>
-              <a:srgbClr val="00C0C8"/>
+              <a:srgbClr val="40609A"/>
             </a:solidFill>
           </a:ln>
         </p:spPr>
@@ -6371,11 +6371,11 @@
             <a:avLst/>
           </a:prstGeom>
           <a:solidFill>
-            <a:srgbClr val="041622"/>
+            <a:srgbClr val="041808"/>
           </a:solidFill>
           <a:ln w="22860">
             <a:solidFill>
-              <a:srgbClr val="14887C"/>
+              <a:srgbClr val="22AA44"/>
             </a:solidFill>
           </a:ln>
         </p:spPr>
@@ -6427,7 +6427,7 @@
             <a:r>
               <a:rPr sz="950" b="1">
                 <a:solidFill>
-                  <a:srgbClr val="14887C"/>
+                  <a:srgbClr val="22AA44"/>
                 </a:solidFill>
                 <a:latin typeface="游明朝"/>
               </a:rPr>
@@ -6648,7 +6648,7 @@
             <a:avLst/>
           </a:prstGeom>
           <a:solidFill>
-            <a:srgbClr val="14887C"/>
+            <a:srgbClr val="22AA44"/>
           </a:solidFill>
           <a:ln>
             <a:noFill/>
@@ -7093,11 +7093,11 @@
             <a:avLst/>
           </a:prstGeom>
           <a:solidFill>
-            <a:srgbClr val="0C1604"/>
+            <a:srgbClr val="200800"/>
           </a:solidFill>
           <a:ln w="22860">
             <a:solidFill>
-              <a:srgbClr val="FFA020"/>
+              <a:srgbClr val="FF4400"/>
             </a:solidFill>
           </a:ln>
         </p:spPr>
@@ -7209,11 +7209,11 @@
             <a:avLst/>
           </a:prstGeom>
           <a:solidFill>
-            <a:srgbClr val="001226"/>
+            <a:srgbClr val="000A22"/>
           </a:solidFill>
           <a:ln w="22860">
             <a:solidFill>
-              <a:srgbClr val="00C0C8"/>
+              <a:srgbClr val="007AFF"/>
             </a:solidFill>
           </a:ln>
         </p:spPr>
@@ -7325,7 +7325,7 @@
             <a:avLst/>
           </a:prstGeom>
           <a:solidFill>
-            <a:srgbClr val="FFA020"/>
+            <a:srgbClr val="FF4400"/>
           </a:solidFill>
           <a:ln>
             <a:noFill/>
@@ -7368,7 +7368,7 @@
             <a:avLst/>
           </a:prstGeom>
           <a:solidFill>
-            <a:srgbClr val="FFA020"/>
+            <a:srgbClr val="FF4400"/>
           </a:solidFill>
           <a:ln>
             <a:noFill/>
@@ -9589,7 +9589,7 @@
           </a:solidFill>
           <a:ln w="19050">
             <a:solidFill>
-              <a:srgbClr val="14887C"/>
+              <a:srgbClr val="22AA44"/>
             </a:solidFill>
           </a:ln>
         </p:spPr>
@@ -9641,7 +9641,7 @@
             <a:r>
               <a:rPr sz="1100" b="1">
                 <a:solidFill>
-                  <a:srgbClr val="14887C"/>
+                  <a:srgbClr val="22AA44"/>
                 </a:solidFill>
                 <a:latin typeface="游明朝"/>
               </a:rPr>
@@ -9719,7 +9719,7 @@
             <a:r>
               <a:rPr sz="850" b="1">
                 <a:solidFill>
-                  <a:srgbClr val="14887C"/>
+                  <a:srgbClr val="22AA44"/>
                 </a:solidFill>
                 <a:latin typeface="メイリオ"/>
               </a:rPr>
@@ -9832,7 +9832,7 @@
             <a:r>
               <a:rPr sz="850" b="1">
                 <a:solidFill>
-                  <a:srgbClr val="14887C"/>
+                  <a:srgbClr val="22AA44"/>
                 </a:solidFill>
                 <a:latin typeface="メイリオ"/>
               </a:rPr>
@@ -9945,7 +9945,7 @@
             <a:r>
               <a:rPr sz="850" b="1">
                 <a:solidFill>
-                  <a:srgbClr val="14887C"/>
+                  <a:srgbClr val="22AA44"/>
                 </a:solidFill>
                 <a:latin typeface="メイリオ"/>
               </a:rPr>
@@ -10058,7 +10058,7 @@
             <a:r>
               <a:rPr sz="850" b="1">
                 <a:solidFill>
-                  <a:srgbClr val="14887C"/>
+                  <a:srgbClr val="22AA44"/>
                 </a:solidFill>
                 <a:latin typeface="メイリオ"/>
               </a:rPr>
@@ -10171,7 +10171,7 @@
             <a:r>
               <a:rPr sz="850" b="1">
                 <a:solidFill>
-                  <a:srgbClr val="14887C"/>
+                  <a:srgbClr val="22AA44"/>
                 </a:solidFill>
                 <a:latin typeface="メイリオ"/>
               </a:rPr>
@@ -10230,11 +10230,11 @@
             <a:avLst/>
           </a:prstGeom>
           <a:solidFill>
-            <a:srgbClr val="041222"/>
+            <a:srgbClr val="041808"/>
           </a:solidFill>
           <a:ln w="25400">
             <a:solidFill>
-              <a:srgbClr val="14887C"/>
+              <a:srgbClr val="22AA44"/>
             </a:solidFill>
           </a:ln>
         </p:spPr>
@@ -10286,7 +10286,7 @@
             <a:r>
               <a:rPr sz="1000" b="1">
                 <a:solidFill>
-                  <a:srgbClr val="14887C"/>
+                  <a:srgbClr val="22AA44"/>
                 </a:solidFill>
                 <a:latin typeface="游明朝"/>
               </a:rPr>
@@ -14858,7 +14858,7 @@
           </a:solidFill>
           <a:ln w="19050">
             <a:solidFill>
-              <a:srgbClr val="00C0C8"/>
+              <a:srgbClr val="007AFF"/>
             </a:solidFill>
           </a:ln>
         </p:spPr>
@@ -14910,7 +14910,7 @@
             <a:r>
               <a:rPr sz="1100" b="1">
                 <a:solidFill>
-                  <a:srgbClr val="00C0C8"/>
+                  <a:srgbClr val="007AFF"/>
                 </a:solidFill>
                 <a:latin typeface="游明朝"/>
               </a:rPr>
@@ -15136,7 +15136,7 @@
             <a:r>
               <a:rPr sz="850" b="0">
                 <a:solidFill>
-                  <a:srgbClr val="00C0C8"/>
+                  <a:srgbClr val="007AFF"/>
                 </a:solidFill>
                 <a:latin typeface="メイリオ"/>
               </a:rPr>
@@ -15697,11 +15697,11 @@
             <a:avLst/>
           </a:prstGeom>
           <a:solidFill>
-            <a:srgbClr val="001228"/>
+            <a:srgbClr val="000A22"/>
           </a:solidFill>
           <a:ln w="12700">
             <a:solidFill>
-              <a:srgbClr val="00C0C8"/>
+              <a:srgbClr val="007AFF"/>
             </a:solidFill>
           </a:ln>
         </p:spPr>
@@ -15753,7 +15753,7 @@
             <a:r>
               <a:rPr sz="1000" b="1">
                 <a:solidFill>
-                  <a:srgbClr val="00C0C8"/>
+                  <a:srgbClr val="007AFF"/>
                 </a:solidFill>
                 <a:latin typeface="メイリオ"/>
               </a:rPr>
@@ -15860,7 +15860,7 @@
             <a:avLst/>
           </a:prstGeom>
           <a:solidFill>
-            <a:srgbClr val="00C0C8"/>
+            <a:srgbClr val="007AFF"/>
           </a:solidFill>
           <a:ln>
             <a:noFill/>
@@ -15914,7 +15914,7 @@
             <a:r>
               <a:rPr sz="950" b="1">
                 <a:solidFill>
-                  <a:srgbClr val="00C0C8"/>
+                  <a:srgbClr val="007AFF"/>
                 </a:solidFill>
                 <a:latin typeface="メイリオ"/>
               </a:rPr>
@@ -17335,11 +17335,11 @@
             <a:avLst/>
           </a:prstGeom>
           <a:solidFill>
-            <a:srgbClr val="001428"/>
+            <a:srgbClr val="000A22"/>
           </a:solidFill>
           <a:ln w="19050">
             <a:solidFill>
-              <a:srgbClr val="00C0C8"/>
+              <a:srgbClr val="007AFF"/>
             </a:solidFill>
           </a:ln>
         </p:spPr>
@@ -17391,7 +17391,7 @@
             <a:r>
               <a:rPr sz="950" b="1">
                 <a:solidFill>
-                  <a:srgbClr val="00C0C8"/>
+                  <a:srgbClr val="007AFF"/>
                 </a:solidFill>
                 <a:latin typeface="游明朝"/>
               </a:rPr>

--- a/proposals/機種分析/モンキーターンV/monkeyturn_guide_v2.pptx
+++ b/proposals/機種分析/モンキーターンV/monkeyturn_guide_v2.pptx
@@ -4232,7 +4232,7 @@
         <p:spPr>
           <a:xfrm>
             <a:off x="212880" y="832104"/>
-            <a:ext cx="920000" cy="285000"/>
+            <a:ext cx="976000" cy="285000"/>
           </a:xfrm>
           <a:prstGeom prst="rect">
             <a:avLst/>
@@ -4266,8 +4266,8 @@
         </p:nvSpPr>
         <p:spPr>
           <a:xfrm>
-            <a:off x="1162880" y="832104"/>
-            <a:ext cx="890000" cy="285000"/>
+            <a:off x="1218880" y="832104"/>
+            <a:ext cx="1894000" cy="285000"/>
           </a:xfrm>
           <a:prstGeom prst="rect">
             <a:avLst/>
@@ -4301,8 +4301,8 @@
         </p:nvSpPr>
         <p:spPr>
           <a:xfrm>
-            <a:off x="2082880" y="832104"/>
-            <a:ext cx="890000" cy="285000"/>
+            <a:off x="3142880" y="832104"/>
+            <a:ext cx="1894000" cy="285000"/>
           </a:xfrm>
           <a:prstGeom prst="rect">
             <a:avLst/>
@@ -4336,8 +4336,8 @@
         </p:nvSpPr>
         <p:spPr>
           <a:xfrm>
-            <a:off x="3002880" y="832104"/>
-            <a:ext cx="890000" cy="285000"/>
+            <a:off x="5066880" y="832104"/>
+            <a:ext cx="1894000" cy="285000"/>
           </a:xfrm>
           <a:prstGeom prst="rect">
             <a:avLst/>
@@ -4371,8 +4371,8 @@
         </p:nvSpPr>
         <p:spPr>
           <a:xfrm>
-            <a:off x="3922880" y="832104"/>
-            <a:ext cx="1020000" cy="285000"/>
+            <a:off x="6990880" y="832104"/>
+            <a:ext cx="1894000" cy="285000"/>
           </a:xfrm>
           <a:prstGeom prst="rect">
             <a:avLst/>
@@ -4450,7 +4450,7 @@
         <p:spPr>
           <a:xfrm>
             <a:off x="212880" y="1195432"/>
-            <a:ext cx="920000" cy="275000"/>
+            <a:ext cx="976000" cy="275000"/>
           </a:xfrm>
           <a:prstGeom prst="rect">
             <a:avLst/>
@@ -4484,8 +4484,8 @@
         </p:nvSpPr>
         <p:spPr>
           <a:xfrm>
-            <a:off x="1162880" y="1195432"/>
-            <a:ext cx="890000" cy="275000"/>
+            <a:off x="1218880" y="1195432"/>
+            <a:ext cx="1894000" cy="275000"/>
           </a:xfrm>
           <a:prstGeom prst="rect">
             <a:avLst/>
@@ -4519,8 +4519,8 @@
         </p:nvSpPr>
         <p:spPr>
           <a:xfrm>
-            <a:off x="2082880" y="1195432"/>
-            <a:ext cx="890000" cy="275000"/>
+            <a:off x="3142880" y="1195432"/>
+            <a:ext cx="1894000" cy="275000"/>
           </a:xfrm>
           <a:prstGeom prst="rect">
             <a:avLst/>
@@ -4554,8 +4554,8 @@
         </p:nvSpPr>
         <p:spPr>
           <a:xfrm>
-            <a:off x="3002880" y="1195432"/>
-            <a:ext cx="890000" cy="275000"/>
+            <a:off x="5066880" y="1195432"/>
+            <a:ext cx="1894000" cy="275000"/>
           </a:xfrm>
           <a:prstGeom prst="rect">
             <a:avLst/>
@@ -4589,8 +4589,8 @@
         </p:nvSpPr>
         <p:spPr>
           <a:xfrm>
-            <a:off x="3922880" y="1195432"/>
-            <a:ext cx="1020000" cy="275000"/>
+            <a:off x="6990880" y="1195432"/>
+            <a:ext cx="1894000" cy="275000"/>
           </a:xfrm>
           <a:prstGeom prst="rect">
             <a:avLst/>
@@ -4668,7 +4668,7 @@
         <p:spPr>
           <a:xfrm>
             <a:off x="212880" y="1525432"/>
-            <a:ext cx="920000" cy="275000"/>
+            <a:ext cx="976000" cy="275000"/>
           </a:xfrm>
           <a:prstGeom prst="rect">
             <a:avLst/>
@@ -4702,8 +4702,8 @@
         </p:nvSpPr>
         <p:spPr>
           <a:xfrm>
-            <a:off x="1162880" y="1525432"/>
-            <a:ext cx="890000" cy="275000"/>
+            <a:off x="1218880" y="1525432"/>
+            <a:ext cx="1894000" cy="275000"/>
           </a:xfrm>
           <a:prstGeom prst="rect">
             <a:avLst/>
@@ -4737,8 +4737,8 @@
         </p:nvSpPr>
         <p:spPr>
           <a:xfrm>
-            <a:off x="2082880" y="1525432"/>
-            <a:ext cx="890000" cy="275000"/>
+            <a:off x="3142880" y="1525432"/>
+            <a:ext cx="1894000" cy="275000"/>
           </a:xfrm>
           <a:prstGeom prst="rect">
             <a:avLst/>
@@ -4772,8 +4772,8 @@
         </p:nvSpPr>
         <p:spPr>
           <a:xfrm>
-            <a:off x="3002880" y="1525432"/>
-            <a:ext cx="890000" cy="275000"/>
+            <a:off x="5066880" y="1525432"/>
+            <a:ext cx="1894000" cy="275000"/>
           </a:xfrm>
           <a:prstGeom prst="rect">
             <a:avLst/>
@@ -4807,8 +4807,8 @@
         </p:nvSpPr>
         <p:spPr>
           <a:xfrm>
-            <a:off x="3922880" y="1525432"/>
-            <a:ext cx="1020000" cy="275000"/>
+            <a:off x="6990880" y="1525432"/>
+            <a:ext cx="1894000" cy="275000"/>
           </a:xfrm>
           <a:prstGeom prst="rect">
             <a:avLst/>
@@ -4886,7 +4886,7 @@
         <p:spPr>
           <a:xfrm>
             <a:off x="212880" y="1855432"/>
-            <a:ext cx="920000" cy="275000"/>
+            <a:ext cx="976000" cy="275000"/>
           </a:xfrm>
           <a:prstGeom prst="rect">
             <a:avLst/>
@@ -4920,8 +4920,8 @@
         </p:nvSpPr>
         <p:spPr>
           <a:xfrm>
-            <a:off x="1162880" y="1855432"/>
-            <a:ext cx="890000" cy="275000"/>
+            <a:off x="1218880" y="1855432"/>
+            <a:ext cx="1894000" cy="275000"/>
           </a:xfrm>
           <a:prstGeom prst="rect">
             <a:avLst/>
@@ -4955,8 +4955,8 @@
         </p:nvSpPr>
         <p:spPr>
           <a:xfrm>
-            <a:off x="2082880" y="1855432"/>
-            <a:ext cx="890000" cy="275000"/>
+            <a:off x="3142880" y="1855432"/>
+            <a:ext cx="1894000" cy="275000"/>
           </a:xfrm>
           <a:prstGeom prst="rect">
             <a:avLst/>
@@ -4990,8 +4990,8 @@
         </p:nvSpPr>
         <p:spPr>
           <a:xfrm>
-            <a:off x="3002880" y="1855432"/>
-            <a:ext cx="890000" cy="275000"/>
+            <a:off x="5066880" y="1855432"/>
+            <a:ext cx="1894000" cy="275000"/>
           </a:xfrm>
           <a:prstGeom prst="rect">
             <a:avLst/>
@@ -5025,8 +5025,8 @@
         </p:nvSpPr>
         <p:spPr>
           <a:xfrm>
-            <a:off x="3922880" y="1855432"/>
-            <a:ext cx="1020000" cy="275000"/>
+            <a:off x="6990880" y="1855432"/>
+            <a:ext cx="1894000" cy="275000"/>
           </a:xfrm>
           <a:prstGeom prst="rect">
             <a:avLst/>
@@ -5104,7 +5104,7 @@
         <p:spPr>
           <a:xfrm>
             <a:off x="212880" y="2185432"/>
-            <a:ext cx="920000" cy="275000"/>
+            <a:ext cx="976000" cy="275000"/>
           </a:xfrm>
           <a:prstGeom prst="rect">
             <a:avLst/>
@@ -5138,8 +5138,8 @@
         </p:nvSpPr>
         <p:spPr>
           <a:xfrm>
-            <a:off x="1162880" y="2185432"/>
-            <a:ext cx="890000" cy="275000"/>
+            <a:off x="1218880" y="2185432"/>
+            <a:ext cx="1894000" cy="275000"/>
           </a:xfrm>
           <a:prstGeom prst="rect">
             <a:avLst/>
@@ -5173,8 +5173,8 @@
         </p:nvSpPr>
         <p:spPr>
           <a:xfrm>
-            <a:off x="2082880" y="2185432"/>
-            <a:ext cx="890000" cy="275000"/>
+            <a:off x="3142880" y="2185432"/>
+            <a:ext cx="1894000" cy="275000"/>
           </a:xfrm>
           <a:prstGeom prst="rect">
             <a:avLst/>
@@ -5208,8 +5208,8 @@
         </p:nvSpPr>
         <p:spPr>
           <a:xfrm>
-            <a:off x="3002880" y="2185432"/>
-            <a:ext cx="890000" cy="275000"/>
+            <a:off x="5066880" y="2185432"/>
+            <a:ext cx="1894000" cy="275000"/>
           </a:xfrm>
           <a:prstGeom prst="rect">
             <a:avLst/>
@@ -5243,8 +5243,8 @@
         </p:nvSpPr>
         <p:spPr>
           <a:xfrm>
-            <a:off x="3922880" y="2185432"/>
-            <a:ext cx="1020000" cy="275000"/>
+            <a:off x="6990880" y="2185432"/>
+            <a:ext cx="1894000" cy="275000"/>
           </a:xfrm>
           <a:prstGeom prst="rect">
             <a:avLst/>
@@ -5322,7 +5322,7 @@
         <p:spPr>
           <a:xfrm>
             <a:off x="212880" y="2515432"/>
-            <a:ext cx="920000" cy="275000"/>
+            <a:ext cx="976000" cy="275000"/>
           </a:xfrm>
           <a:prstGeom prst="rect">
             <a:avLst/>
@@ -5356,8 +5356,8 @@
         </p:nvSpPr>
         <p:spPr>
           <a:xfrm>
-            <a:off x="1162880" y="2515432"/>
-            <a:ext cx="890000" cy="275000"/>
+            <a:off x="1218880" y="2515432"/>
+            <a:ext cx="1894000" cy="275000"/>
           </a:xfrm>
           <a:prstGeom prst="rect">
             <a:avLst/>
@@ -5391,8 +5391,8 @@
         </p:nvSpPr>
         <p:spPr>
           <a:xfrm>
-            <a:off x="2082880" y="2515432"/>
-            <a:ext cx="890000" cy="275000"/>
+            <a:off x="3142880" y="2515432"/>
+            <a:ext cx="1894000" cy="275000"/>
           </a:xfrm>
           <a:prstGeom prst="rect">
             <a:avLst/>
@@ -5426,8 +5426,8 @@
         </p:nvSpPr>
         <p:spPr>
           <a:xfrm>
-            <a:off x="3002880" y="2515432"/>
-            <a:ext cx="890000" cy="275000"/>
+            <a:off x="5066880" y="2515432"/>
+            <a:ext cx="1894000" cy="275000"/>
           </a:xfrm>
           <a:prstGeom prst="rect">
             <a:avLst/>
@@ -5461,8 +5461,8 @@
         </p:nvSpPr>
         <p:spPr>
           <a:xfrm>
-            <a:off x="3922880" y="2515432"/>
-            <a:ext cx="1020000" cy="275000"/>
+            <a:off x="6990880" y="2515432"/>
+            <a:ext cx="1894000" cy="275000"/>
           </a:xfrm>
           <a:prstGeom prst="rect">
             <a:avLst/>
@@ -12327,7 +12327,7 @@
                 </a:solidFill>
                 <a:latin typeface="メイリオ"/>
               </a:rPr>
-              <a:t>艇王（グランドスラム濃厚）</a:t>
+              <a:t>艇王（GS濃厚）</a:t>
             </a:r>
           </a:p>
         </p:txBody>
@@ -12362,7 +12362,7 @@
                 </a:solidFill>
                 <a:latin typeface="メイリオ"/>
               </a:rPr>
-              <a:t>8セット完走ほぼ確定</a:t>
+              <a:t>8完走ほぼ確定</a:t>
             </a:r>
           </a:p>
         </p:txBody>
@@ -13299,7 +13299,7 @@
                 </a:solidFill>
                 <a:latin typeface="メイリオ"/>
               </a:rPr>
-              <a:t>虹  ──  継続率：最高（艇王濃厚）</a:t>
+              <a:t>虹  ──  最高（艇王濃厚）</a:t>
             </a:r>
           </a:p>
         </p:txBody>
@@ -13479,7 +13479,7 @@
           <a:noFill/>
         </p:spPr>
         <p:txBody>
-          <a:bodyPr wrap="none">
+          <a:bodyPr wrap="square">
             <a:spAutoFit/>
           </a:bodyPr>
           <a:lstStyle/>
@@ -13592,7 +13592,7 @@
           <a:noFill/>
         </p:spPr>
         <p:txBody>
-          <a:bodyPr wrap="none">
+          <a:bodyPr wrap="square">
             <a:spAutoFit/>
           </a:bodyPr>
           <a:lstStyle/>
@@ -13705,7 +13705,7 @@
           <a:noFill/>
         </p:spPr>
         <p:txBody>
-          <a:bodyPr wrap="none">
+          <a:bodyPr wrap="square">
             <a:spAutoFit/>
           </a:bodyPr>
           <a:lstStyle/>
@@ -13818,7 +13818,7 @@
           <a:noFill/>
         </p:spPr>
         <p:txBody>
-          <a:bodyPr wrap="none">
+          <a:bodyPr wrap="square">
             <a:spAutoFit/>
           </a:bodyPr>
           <a:lstStyle/>
@@ -13931,7 +13931,7 @@
           <a:noFill/>
         </p:spPr>
         <p:txBody>
-          <a:bodyPr wrap="none">
+          <a:bodyPr wrap="square">
             <a:spAutoFit/>
           </a:bodyPr>
           <a:lstStyle/>
@@ -15380,7 +15380,7 @@
         <p:spPr>
           <a:xfrm>
             <a:off x="256032" y="2621872"/>
-            <a:ext cx="3950208" cy="450000"/>
+            <a:ext cx="3950208" cy="620000"/>
           </a:xfrm>
           <a:prstGeom prst="rect">
             <a:avLst/>
@@ -15691,7 +15691,7 @@
         <p:spPr>
           <a:xfrm>
             <a:off x="4645152" y="2176272"/>
-            <a:ext cx="4242816" cy="1250000"/>
+            <a:ext cx="4242816" cy="1700000"/>
           </a:xfrm>
           <a:prstGeom prst="rect">
             <a:avLst/>
@@ -15771,7 +15771,7 @@
         <p:spPr>
           <a:xfrm>
             <a:off x="4754880" y="2542032"/>
-            <a:ext cx="3931920" cy="820000"/>
+            <a:ext cx="3931920" cy="1300000"/>
           </a:xfrm>
           <a:prstGeom prst="rect">
             <a:avLst/>
@@ -16795,13 +16795,13 @@
           <a:p>
             <a:pPr algn="l"/>
             <a:r>
-              <a:rPr sz="800" b="1">
+              <a:rPr sz="900" b="1">
                 <a:solidFill>
                   <a:srgbClr val="BBBBBB"/>
                 </a:solidFill>
                 <a:latin typeface="メイリオ"/>
               </a:rPr>
-              <a:t>パターンA</a:t>
+              <a:t>型A</a:t>
             </a:r>
           </a:p>
         </p:txBody>
@@ -16815,7 +16815,7 @@
         <p:spPr>
           <a:xfrm>
             <a:off x="5349240" y="1566192"/>
-            <a:ext cx="650000" cy="300000"/>
+            <a:ext cx="820000" cy="300000"/>
           </a:xfrm>
           <a:prstGeom prst="rect">
             <a:avLst/>
@@ -16849,8 +16849,8 @@
         </p:nvSpPr>
         <p:spPr>
           <a:xfrm>
-            <a:off x="6217920" y="1566192"/>
-            <a:ext cx="2468880" cy="300000"/>
+            <a:off x="6446520" y="1566192"/>
+            <a:ext cx="2240280" cy="300000"/>
           </a:xfrm>
           <a:prstGeom prst="rect">
             <a:avLst/>
@@ -16943,13 +16943,13 @@
           <a:p>
             <a:pPr algn="l"/>
             <a:r>
-              <a:rPr sz="800" b="1">
+              <a:rPr sz="900" b="1">
                 <a:solidFill>
                   <a:srgbClr val="FFA020"/>
                 </a:solidFill>
                 <a:latin typeface="メイリオ"/>
               </a:rPr>
-              <a:t>パターンB</a:t>
+              <a:t>型B</a:t>
             </a:r>
           </a:p>
         </p:txBody>
@@ -16963,7 +16963,7 @@
         <p:spPr>
           <a:xfrm>
             <a:off x="5349240" y="1941192"/>
-            <a:ext cx="650000" cy="300000"/>
+            <a:ext cx="820000" cy="300000"/>
           </a:xfrm>
           <a:prstGeom prst="rect">
             <a:avLst/>
@@ -16997,8 +16997,8 @@
         </p:nvSpPr>
         <p:spPr>
           <a:xfrm>
-            <a:off x="6217920" y="1941192"/>
-            <a:ext cx="2468880" cy="300000"/>
+            <a:off x="6446520" y="1941192"/>
+            <a:ext cx="2240280" cy="300000"/>
           </a:xfrm>
           <a:prstGeom prst="rect">
             <a:avLst/>
@@ -17091,13 +17091,13 @@
           <a:p>
             <a:pPr algn="l"/>
             <a:r>
-              <a:rPr sz="800" b="1">
+              <a:rPr sz="900" b="1">
                 <a:solidFill>
                   <a:srgbClr val="00C0C8"/>
                 </a:solidFill>
                 <a:latin typeface="メイリオ"/>
               </a:rPr>
-              <a:t>パターンC</a:t>
+              <a:t>型C</a:t>
             </a:r>
           </a:p>
         </p:txBody>
@@ -17111,7 +17111,7 @@
         <p:spPr>
           <a:xfrm>
             <a:off x="5349240" y="2316192"/>
-            <a:ext cx="650000" cy="300000"/>
+            <a:ext cx="820000" cy="300000"/>
           </a:xfrm>
           <a:prstGeom prst="rect">
             <a:avLst/>
@@ -17145,8 +17145,8 @@
         </p:nvSpPr>
         <p:spPr>
           <a:xfrm>
-            <a:off x="6217920" y="2316192"/>
-            <a:ext cx="2468880" cy="300000"/>
+            <a:off x="6446520" y="2316192"/>
+            <a:ext cx="2240280" cy="300000"/>
           </a:xfrm>
           <a:prstGeom prst="rect">
             <a:avLst/>
@@ -17239,13 +17239,13 @@
           <a:p>
             <a:pPr algn="l"/>
             <a:r>
-              <a:rPr sz="800" b="1">
+              <a:rPr sz="900" b="1">
                 <a:solidFill>
                   <a:srgbClr val="FFD700"/>
                 </a:solidFill>
                 <a:latin typeface="メイリオ"/>
               </a:rPr>
-              <a:t>パターンD</a:t>
+              <a:t>型D</a:t>
             </a:r>
           </a:p>
         </p:txBody>
@@ -17259,7 +17259,7 @@
         <p:spPr>
           <a:xfrm>
             <a:off x="5349240" y="2691192"/>
-            <a:ext cx="650000" cy="300000"/>
+            <a:ext cx="820000" cy="300000"/>
           </a:xfrm>
           <a:prstGeom prst="rect">
             <a:avLst/>
@@ -17293,8 +17293,8 @@
         </p:nvSpPr>
         <p:spPr>
           <a:xfrm>
-            <a:off x="6217920" y="2691192"/>
-            <a:ext cx="2468880" cy="300000"/>
+            <a:off x="6446520" y="2691192"/>
+            <a:ext cx="2240280" cy="300000"/>
           </a:xfrm>
           <a:prstGeom prst="rect">
             <a:avLst/>
@@ -17328,7 +17328,7 @@
         </p:nvSpPr>
         <p:spPr>
           <a:xfrm>
-            <a:off x="4663440" y="2999232"/>
+            <a:off x="4663440" y="3127248"/>
             <a:ext cx="4160520" cy="820000"/>
           </a:xfrm>
           <a:prstGeom prst="rect">
@@ -17373,7 +17373,7 @@
         </p:nvSpPr>
         <p:spPr>
           <a:xfrm>
-            <a:off x="4773168" y="3054096"/>
+            <a:off x="4773168" y="3182112"/>
             <a:ext cx="3840480" cy="280000"/>
           </a:xfrm>
           <a:prstGeom prst="rect">
@@ -17408,7 +17408,7 @@
         </p:nvSpPr>
         <p:spPr>
           <a:xfrm>
-            <a:off x="4773168" y="3364992"/>
+            <a:off x="4773168" y="3493008"/>
             <a:ext cx="3840480" cy="420000"/>
           </a:xfrm>
           <a:prstGeom prst="rect">

--- a/proposals/機種分析/モンキーターンV/monkeyturn_guide_v2.pptx
+++ b/proposals/機種分析/モンキーターンV/monkeyturn_guide_v2.pptx
@@ -15,6 +15,7 @@
     <p:sldId id="263" r:id="rId14"/>
     <p:sldId id="264" r:id="rId15"/>
     <p:sldId id="265" r:id="rId16"/>
+    <p:sldId id="266" r:id="rId17"/>
   </p:sldIdLst>
   <p:sldSz cx="9144000" cy="5143500" type="screen4x3"/>
   <p:notesSz cx="6858000" cy="9144000"/>
@@ -4175,6 +4176,688 @@
                 </a:solidFill>
                 <a:latin typeface="游明朝"/>
               </a:rPr>
+              <a:t>設計哲学  ──  なぜモンキーターンVは面白いのか</a:t>
+            </a:r>
+          </a:p>
+        </p:txBody>
+      </p:sp>
+      <p:sp>
+        <p:nvSpPr>
+          <p:cNvPr id="6" name="Rectangle 5"/>
+          <p:cNvSpPr/>
+          <p:nvPr/>
+        </p:nvSpPr>
+        <p:spPr>
+          <a:xfrm>
+            <a:off x="182880" y="777240"/>
+            <a:ext cx="2743200" cy="3154680"/>
+          </a:xfrm>
+          <a:prstGeom prst="rect">
+            <a:avLst/>
+          </a:prstGeom>
+          <a:solidFill>
+            <a:srgbClr val="041420"/>
+          </a:solidFill>
+          <a:ln w="25400">
+            <a:solidFill>
+              <a:srgbClr val="14887C"/>
+            </a:solidFill>
+          </a:ln>
+        </p:spPr>
+        <p:style>
+          <a:lnRef idx="1">
+            <a:schemeClr val="accent1"/>
+          </a:lnRef>
+          <a:fillRef idx="3">
+            <a:schemeClr val="accent1"/>
+          </a:fillRef>
+          <a:effectRef idx="2">
+            <a:schemeClr val="accent1"/>
+          </a:effectRef>
+          <a:fontRef idx="minor">
+            <a:schemeClr val="lt1"/>
+          </a:fontRef>
+        </p:style>
+        <p:txBody>
+          <a:bodyPr rtlCol="0" anchor="ctr"/>
+          <a:lstStyle/>
+          <a:p>
+            <a:pPr algn="ctr"/>
+          </a:p>
+        </p:txBody>
+      </p:sp>
+      <p:sp>
+        <p:nvSpPr>
+          <p:cNvPr id="7" name="TextBox 6"/>
+          <p:cNvSpPr txBox="1"/>
+          <p:nvPr/>
+        </p:nvSpPr>
+        <p:spPr>
+          <a:xfrm>
+            <a:off x="262880" y="841248"/>
+            <a:ext cx="2560320" cy="340000"/>
+          </a:xfrm>
+          <a:prstGeom prst="rect">
+            <a:avLst/>
+          </a:prstGeom>
+          <a:noFill/>
+        </p:spPr>
+        <p:txBody>
+          <a:bodyPr wrap="square">
+            <a:spAutoFit/>
+          </a:bodyPr>
+          <a:lstStyle/>
+          <a:p>
+            <a:pPr algn="l"/>
+            <a:r>
+              <a:rPr sz="1000" b="1">
+                <a:solidFill>
+                  <a:srgbClr val="14887C"/>
+                </a:solidFill>
+                <a:latin typeface="游明朝"/>
+              </a:rPr>
+              <a:t>複層的な目標設計</a:t>
+            </a:r>
+          </a:p>
+        </p:txBody>
+      </p:sp>
+      <p:sp>
+        <p:nvSpPr>
+          <p:cNvPr id="8" name="TextBox 7"/>
+          <p:cNvSpPr txBox="1"/>
+          <p:nvPr/>
+        </p:nvSpPr>
+        <p:spPr>
+          <a:xfrm>
+            <a:off x="262880" y="1280160"/>
+            <a:ext cx="2560320" cy="2377440"/>
+          </a:xfrm>
+          <a:prstGeom prst="rect">
+            <a:avLst/>
+          </a:prstGeom>
+          <a:noFill/>
+        </p:spPr>
+        <p:txBody>
+          <a:bodyPr wrap="square">
+            <a:spAutoFit/>
+          </a:bodyPr>
+          <a:lstStyle/>
+          <a:p>
+            <a:pPr algn="l"/>
+            <a:r>
+              <a:rPr sz="900" b="0">
+                <a:solidFill>
+                  <a:srgbClr val="E0E8F0"/>
+                </a:solidFill>
+                <a:latin typeface="メイリオ"/>
+              </a:rPr>
+              <a:t>1G先：次の激走ポイント加算
+1AT先：次のセット継続
+1日先：グランドスラム達成
+将来：上位AT青島SG体験
+「今ここ」と「将来」を
+同時に意識させる設計</a:t>
+            </a:r>
+          </a:p>
+        </p:txBody>
+      </p:sp>
+      <p:sp>
+        <p:nvSpPr>
+          <p:cNvPr id="9" name="Rectangle 8"/>
+          <p:cNvSpPr/>
+          <p:nvPr/>
+        </p:nvSpPr>
+        <p:spPr>
+          <a:xfrm>
+            <a:off x="3246120" y="777240"/>
+            <a:ext cx="2743200" cy="3154680"/>
+          </a:xfrm>
+          <a:prstGeom prst="rect">
+            <a:avLst/>
+          </a:prstGeom>
+          <a:solidFill>
+            <a:srgbClr val="181000"/>
+          </a:solidFill>
+          <a:ln w="25400">
+            <a:solidFill>
+              <a:srgbClr val="FFA020"/>
+            </a:solidFill>
+          </a:ln>
+        </p:spPr>
+        <p:style>
+          <a:lnRef idx="1">
+            <a:schemeClr val="accent1"/>
+          </a:lnRef>
+          <a:fillRef idx="3">
+            <a:schemeClr val="accent1"/>
+          </a:fillRef>
+          <a:effectRef idx="2">
+            <a:schemeClr val="accent1"/>
+          </a:effectRef>
+          <a:fontRef idx="minor">
+            <a:schemeClr val="lt1"/>
+          </a:fontRef>
+        </p:style>
+        <p:txBody>
+          <a:bodyPr rtlCol="0" anchor="ctr"/>
+          <a:lstStyle/>
+          <a:p>
+            <a:pPr algn="ctr"/>
+          </a:p>
+        </p:txBody>
+      </p:sp>
+      <p:sp>
+        <p:nvSpPr>
+          <p:cNvPr id="10" name="TextBox 9"/>
+          <p:cNvSpPr txBox="1"/>
+          <p:nvPr/>
+        </p:nvSpPr>
+        <p:spPr>
+          <a:xfrm>
+            <a:off x="3326120" y="841248"/>
+            <a:ext cx="2560320" cy="340000"/>
+          </a:xfrm>
+          <a:prstGeom prst="rect">
+            <a:avLst/>
+          </a:prstGeom>
+          <a:noFill/>
+        </p:spPr>
+        <p:txBody>
+          <a:bodyPr wrap="square">
+            <a:spAutoFit/>
+          </a:bodyPr>
+          <a:lstStyle/>
+          <a:p>
+            <a:pPr algn="l"/>
+            <a:r>
+              <a:rPr sz="1000" b="1">
+                <a:solidFill>
+                  <a:srgbClr val="FFA020"/>
+                </a:solidFill>
+                <a:latin typeface="游明朝"/>
+              </a:rPr>
+              <a:t>失敗を無駄にしない</a:t>
+            </a:r>
+          </a:p>
+        </p:txBody>
+      </p:sp>
+      <p:sp>
+        <p:nvSpPr>
+          <p:cNvPr id="11" name="TextBox 10"/>
+          <p:cNvSpPr txBox="1"/>
+          <p:nvPr/>
+        </p:nvSpPr>
+        <p:spPr>
+          <a:xfrm>
+            <a:off x="3326120" y="1280160"/>
+            <a:ext cx="2560320" cy="2377440"/>
+          </a:xfrm>
+          <a:prstGeom prst="rect">
+            <a:avLst/>
+          </a:prstGeom>
+          <a:noFill/>
+        </p:spPr>
+        <p:txBody>
+          <a:bodyPr wrap="square">
+            <a:spAutoFit/>
+          </a:bodyPr>
+          <a:lstStyle/>
+          <a:p>
+            <a:pPr algn="l"/>
+            <a:r>
+              <a:rPr sz="900" b="0">
+                <a:solidFill>
+                  <a:srgbClr val="E0E8F0"/>
+                </a:solidFill>
+                <a:latin typeface="メイリオ"/>
+              </a:rPr>
+              <a:t>CZ失敗
+→ グランドスラムCH（救済）
+エキシビション漏れ
+→ 青島SG入口
+激走チャージ天井
+→ CZ確定
+どの失敗にも
+「次の期待」が残る</a:t>
+            </a:r>
+          </a:p>
+        </p:txBody>
+      </p:sp>
+      <p:sp>
+        <p:nvSpPr>
+          <p:cNvPr id="12" name="Rectangle 11"/>
+          <p:cNvSpPr/>
+          <p:nvPr/>
+        </p:nvSpPr>
+        <p:spPr>
+          <a:xfrm>
+            <a:off x="6309360" y="777240"/>
+            <a:ext cx="2743200" cy="3154680"/>
+          </a:xfrm>
+          <a:prstGeom prst="rect">
+            <a:avLst/>
+          </a:prstGeom>
+          <a:solidFill>
+            <a:srgbClr val="001020"/>
+          </a:solidFill>
+          <a:ln w="25400">
+            <a:solidFill>
+              <a:srgbClr val="00C0C8"/>
+            </a:solidFill>
+          </a:ln>
+        </p:spPr>
+        <p:style>
+          <a:lnRef idx="1">
+            <a:schemeClr val="accent1"/>
+          </a:lnRef>
+          <a:fillRef idx="3">
+            <a:schemeClr val="accent1"/>
+          </a:fillRef>
+          <a:effectRef idx="2">
+            <a:schemeClr val="accent1"/>
+          </a:effectRef>
+          <a:fontRef idx="minor">
+            <a:schemeClr val="lt1"/>
+          </a:fontRef>
+        </p:style>
+        <p:txBody>
+          <a:bodyPr rtlCol="0" anchor="ctr"/>
+          <a:lstStyle/>
+          <a:p>
+            <a:pPr algn="ctr"/>
+          </a:p>
+        </p:txBody>
+      </p:sp>
+      <p:sp>
+        <p:nvSpPr>
+          <p:cNvPr id="13" name="TextBox 12"/>
+          <p:cNvSpPr txBox="1"/>
+          <p:nvPr/>
+        </p:nvSpPr>
+        <p:spPr>
+          <a:xfrm>
+            <a:off x="6389360" y="841248"/>
+            <a:ext cx="2560320" cy="340000"/>
+          </a:xfrm>
+          <a:prstGeom prst="rect">
+            <a:avLst/>
+          </a:prstGeom>
+          <a:noFill/>
+        </p:spPr>
+        <p:txBody>
+          <a:bodyPr wrap="square">
+            <a:spAutoFit/>
+          </a:bodyPr>
+          <a:lstStyle/>
+          <a:p>
+            <a:pPr algn="l"/>
+            <a:r>
+              <a:rPr sz="1000" b="1">
+                <a:solidFill>
+                  <a:srgbClr val="00C0C8"/>
+                </a:solidFill>
+                <a:latin typeface="游明朝"/>
+              </a:rPr>
+              <a:t>「読める」楽しさ</a:t>
+            </a:r>
+          </a:p>
+        </p:txBody>
+      </p:sp>
+      <p:sp>
+        <p:nvSpPr>
+          <p:cNvPr id="14" name="TextBox 13"/>
+          <p:cNvSpPr txBox="1"/>
+          <p:nvPr/>
+        </p:nvSpPr>
+        <p:spPr>
+          <a:xfrm>
+            <a:off x="6389360" y="1280160"/>
+            <a:ext cx="2560320" cy="2377440"/>
+          </a:xfrm>
+          <a:prstGeom prst="rect">
+            <a:avLst/>
+          </a:prstGeom>
+          <a:noFill/>
+        </p:spPr>
+        <p:txBody>
+          <a:bodyPr wrap="square">
+            <a:spAutoFit/>
+          </a:bodyPr>
+          <a:lstStyle/>
+          <a:p>
+            <a:pPr algn="l"/>
+            <a:r>
+              <a:rPr sz="900" b="0">
+                <a:solidFill>
+                  <a:srgbClr val="E0E8F0"/>
+                </a:solidFill>
+                <a:latin typeface="メイリオ"/>
+              </a:rPr>
+              <a:t>シナリオはランプで示唆
+周期はモードで予測可能
+ライバルモードは滞在確定
+「完全にわかる」ではなく
+「ある程度読める」バランス
+推測が当たる快感が
+遊技を豊かにする</a:t>
+            </a:r>
+          </a:p>
+        </p:txBody>
+      </p:sp>
+      <p:sp>
+        <p:nvSpPr>
+          <p:cNvPr id="15" name="Rectangle 14"/>
+          <p:cNvSpPr/>
+          <p:nvPr/>
+        </p:nvSpPr>
+        <p:spPr>
+          <a:xfrm>
+            <a:off x="182880" y="4023360"/>
+            <a:ext cx="8778240" cy="40000"/>
+          </a:xfrm>
+          <a:prstGeom prst="rect">
+            <a:avLst/>
+          </a:prstGeom>
+          <a:solidFill>
+            <a:srgbClr val="14887C"/>
+          </a:solidFill>
+          <a:ln>
+            <a:noFill/>
+          </a:ln>
+        </p:spPr>
+        <p:style>
+          <a:lnRef idx="1">
+            <a:schemeClr val="accent1"/>
+          </a:lnRef>
+          <a:fillRef idx="3">
+            <a:schemeClr val="accent1"/>
+          </a:fillRef>
+          <a:effectRef idx="2">
+            <a:schemeClr val="accent1"/>
+          </a:effectRef>
+          <a:fontRef idx="minor">
+            <a:schemeClr val="lt1"/>
+          </a:fontRef>
+        </p:style>
+        <p:txBody>
+          <a:bodyPr rtlCol="0" anchor="ctr"/>
+          <a:lstStyle/>
+          <a:p>
+            <a:pPr algn="ctr"/>
+          </a:p>
+        </p:txBody>
+      </p:sp>
+      <p:sp>
+        <p:nvSpPr>
+          <p:cNvPr id="16" name="Rectangle 15"/>
+          <p:cNvSpPr/>
+          <p:nvPr/>
+        </p:nvSpPr>
+        <p:spPr>
+          <a:xfrm>
+            <a:off x="182880" y="4096512"/>
+            <a:ext cx="8778240" cy="640000"/>
+          </a:xfrm>
+          <a:prstGeom prst="rect">
+            <a:avLst/>
+          </a:prstGeom>
+          <a:solidFill>
+            <a:srgbClr val="061220"/>
+          </a:solidFill>
+          <a:ln>
+            <a:noFill/>
+          </a:ln>
+        </p:spPr>
+        <p:style>
+          <a:lnRef idx="1">
+            <a:schemeClr val="accent1"/>
+          </a:lnRef>
+          <a:fillRef idx="3">
+            <a:schemeClr val="accent1"/>
+          </a:fillRef>
+          <a:effectRef idx="2">
+            <a:schemeClr val="accent1"/>
+          </a:effectRef>
+          <a:fontRef idx="minor">
+            <a:schemeClr val="lt1"/>
+          </a:fontRef>
+        </p:style>
+        <p:txBody>
+          <a:bodyPr rtlCol="0" anchor="ctr"/>
+          <a:lstStyle/>
+          <a:p>
+            <a:pPr algn="ctr"/>
+          </a:p>
+        </p:txBody>
+      </p:sp>
+      <p:sp>
+        <p:nvSpPr>
+          <p:cNvPr id="17" name="TextBox 16"/>
+          <p:cNvSpPr txBox="1"/>
+          <p:nvPr/>
+        </p:nvSpPr>
+        <p:spPr>
+          <a:xfrm>
+            <a:off x="320040" y="4142232"/>
+            <a:ext cx="8412480" cy="270000"/>
+          </a:xfrm>
+          <a:prstGeom prst="rect">
+            <a:avLst/>
+          </a:prstGeom>
+          <a:noFill/>
+        </p:spPr>
+        <p:txBody>
+          <a:bodyPr wrap="square">
+            <a:spAutoFit/>
+          </a:bodyPr>
+          <a:lstStyle/>
+          <a:p>
+            <a:pPr algn="l"/>
+            <a:r>
+              <a:rPr sz="950" b="1">
+                <a:solidFill>
+                  <a:srgbClr val="C8A840"/>
+                </a:solidFill>
+                <a:latin typeface="メイリオ"/>
+              </a:rPr>
+              <a:t>総評：「遊びやすさ × パンチ × 深み」が高水準で共存している数少ない台</a:t>
+            </a:r>
+          </a:p>
+        </p:txBody>
+      </p:sp>
+      <p:sp>
+        <p:nvSpPr>
+          <p:cNvPr id="18" name="TextBox 17"/>
+          <p:cNvSpPr txBox="1"/>
+          <p:nvPr/>
+        </p:nvSpPr>
+        <p:spPr>
+          <a:xfrm>
+            <a:off x="320040" y="4434840"/>
+            <a:ext cx="8412480" cy="260000"/>
+          </a:xfrm>
+          <a:prstGeom prst="rect">
+            <a:avLst/>
+          </a:prstGeom>
+          <a:noFill/>
+        </p:spPr>
+        <p:txBody>
+          <a:bodyPr wrap="square">
+            <a:spAutoFit/>
+          </a:bodyPr>
+          <a:lstStyle/>
+          <a:p>
+            <a:pPr algn="l"/>
+            <a:r>
+              <a:rPr sz="850" b="0">
+                <a:solidFill>
+                  <a:srgbClr val="E0E8F0"/>
+                </a:solidFill>
+                <a:latin typeface="メイリオ"/>
+              </a:rPr>
+              <a:t>機械割設定6で114.9%・シナリオ14種・上位AT純増4.0枚。スペック・ゲーム性・演出のどこを切っても水準以上。</a:t>
+            </a:r>
+          </a:p>
+        </p:txBody>
+      </p:sp>
+    </p:spTree>
+  </p:cSld>
+  <p:clrMapOvr>
+    <a:masterClrMapping/>
+  </p:clrMapOvr>
+</p:sld>
+</file>
+
+<file path=ppt/slides/slide11.xml><?xml version="1.0" encoding="utf-8"?>
+<p:sld xmlns:a="http://schemas.openxmlformats.org/drawingml/2006/main" xmlns:p="http://schemas.openxmlformats.org/presentationml/2006/main" xmlns:r="http://schemas.openxmlformats.org/officeDocument/2006/relationships">
+  <p:cSld>
+    <p:spTree>
+      <p:nvGrpSpPr>
+        <p:cNvPr id="1" name=""/>
+        <p:cNvGrpSpPr/>
+        <p:nvPr/>
+      </p:nvGrpSpPr>
+      <p:grpSpPr/>
+      <p:pic>
+        <p:nvPicPr>
+          <p:cNvPr id="2" name="Picture 1" descr="image.png"/>
+          <p:cNvPicPr>
+            <a:picLocks noChangeAspect="1"/>
+          </p:cNvPicPr>
+          <p:nvPr/>
+        </p:nvPicPr>
+        <p:blipFill>
+          <a:blip r:embed="rId2"/>
+          <a:stretch>
+            <a:fillRect/>
+          </a:stretch>
+        </p:blipFill>
+        <p:spPr>
+          <a:xfrm>
+            <a:off x="0" y="0"/>
+            <a:ext cx="9144000" cy="5143500"/>
+          </a:xfrm>
+          <a:prstGeom prst="rect">
+            <a:avLst/>
+          </a:prstGeom>
+        </p:spPr>
+      </p:pic>
+      <p:sp>
+        <p:nvSpPr>
+          <p:cNvPr id="3" name="Rectangle 2"/>
+          <p:cNvSpPr/>
+          <p:nvPr/>
+        </p:nvSpPr>
+        <p:spPr>
+          <a:xfrm>
+            <a:off x="137160" y="73152"/>
+            <a:ext cx="8869680" cy="420000"/>
+          </a:xfrm>
+          <a:prstGeom prst="rect">
+            <a:avLst/>
+          </a:prstGeom>
+          <a:solidFill>
+            <a:srgbClr val="041028"/>
+          </a:solidFill>
+          <a:ln>
+            <a:noFill/>
+          </a:ln>
+        </p:spPr>
+        <p:style>
+          <a:lnRef idx="1">
+            <a:schemeClr val="accent1"/>
+          </a:lnRef>
+          <a:fillRef idx="3">
+            <a:schemeClr val="accent1"/>
+          </a:fillRef>
+          <a:effectRef idx="2">
+            <a:schemeClr val="accent1"/>
+          </a:effectRef>
+          <a:fontRef idx="minor">
+            <a:schemeClr val="lt1"/>
+          </a:fontRef>
+        </p:style>
+        <p:txBody>
+          <a:bodyPr rtlCol="0" anchor="ctr"/>
+          <a:lstStyle/>
+          <a:p>
+            <a:pPr algn="ctr"/>
+          </a:p>
+        </p:txBody>
+      </p:sp>
+      <p:sp>
+        <p:nvSpPr>
+          <p:cNvPr id="4" name="Rectangle 3"/>
+          <p:cNvSpPr/>
+          <p:nvPr/>
+        </p:nvSpPr>
+        <p:spPr>
+          <a:xfrm>
+            <a:off x="137160" y="73152"/>
+            <a:ext cx="60000" cy="420000"/>
+          </a:xfrm>
+          <a:prstGeom prst="rect">
+            <a:avLst/>
+          </a:prstGeom>
+          <a:solidFill>
+            <a:srgbClr val="14887C"/>
+          </a:solidFill>
+          <a:ln>
+            <a:noFill/>
+          </a:ln>
+        </p:spPr>
+        <p:style>
+          <a:lnRef idx="1">
+            <a:schemeClr val="accent1"/>
+          </a:lnRef>
+          <a:fillRef idx="3">
+            <a:schemeClr val="accent1"/>
+          </a:fillRef>
+          <a:effectRef idx="2">
+            <a:schemeClr val="accent1"/>
+          </a:effectRef>
+          <a:fontRef idx="minor">
+            <a:schemeClr val="lt1"/>
+          </a:fontRef>
+        </p:style>
+        <p:txBody>
+          <a:bodyPr rtlCol="0" anchor="ctr"/>
+          <a:lstStyle/>
+          <a:p>
+            <a:pPr algn="ctr"/>
+          </a:p>
+        </p:txBody>
+      </p:sp>
+      <p:sp>
+        <p:nvSpPr>
+          <p:cNvPr id="5" name="TextBox 4"/>
+          <p:cNvSpPr txBox="1"/>
+          <p:nvPr/>
+        </p:nvSpPr>
+        <p:spPr>
+          <a:xfrm>
+            <a:off x="365760" y="91440"/>
+            <a:ext cx="8412480" cy="380000"/>
+          </a:xfrm>
+          <a:prstGeom prst="rect">
+            <a:avLst/>
+          </a:prstGeom>
+          <a:noFill/>
+        </p:spPr>
+        <p:txBody>
+          <a:bodyPr wrap="square">
+            <a:spAutoFit/>
+          </a:bodyPr>
+          <a:lstStyle/>
+          <a:p>
+            <a:pPr algn="l"/>
+            <a:r>
+              <a:rPr sz="1200" b="1">
+                <a:solidFill>
+                  <a:srgbClr val="C8A840"/>
+                </a:solidFill>
+                <a:latin typeface="游明朝"/>
+              </a:rPr>
               <a:t>まとめ  ──  設計から学べること</a:t>
             </a:r>
           </a:p>
@@ -6466,7 +7149,8 @@
                 </a:solidFill>
                 <a:latin typeface="メイリオ"/>
               </a:rPr>
-              <a:t>レア役直撃 / 10G自力突破 / 成功率約50%</a:t>
+              <a:t>ベル/リプ/レア役カウントアップ
+9カウントで強制成功</a:t>
             </a:r>
           </a:p>
         </p:txBody>
@@ -9871,7 +10555,7 @@
                 </a:solidFill>
                 <a:latin typeface="メイリオ"/>
               </a:rPr>
-              <a:t>10G（毎G成功抽選）</a:t>
+              <a:t>10G（毎G成功抽選が並行）</a:t>
             </a:r>
           </a:p>
         </p:txBody>
@@ -10062,7 +10746,7 @@
                 </a:solidFill>
                 <a:latin typeface="メイリオ"/>
               </a:rPr>
-              <a:t>成功確定</a:t>
+              <a:t>9カウント</a:t>
             </a:r>
           </a:p>
         </p:txBody>
@@ -10097,7 +10781,7 @@
                 </a:solidFill>
                 <a:latin typeface="メイリオ"/>
               </a:rPr>
-              <a:t>CZ中にペラ9成立で確定</a:t>
+              <a:t>ベル/リプ/レア役の合計9個→強制成功</a:t>
             </a:r>
           </a:p>
         </p:txBody>
@@ -10290,7 +10974,7 @@
                 </a:solidFill>
                 <a:latin typeface="游明朝"/>
               </a:rPr>
-              <a:t>超抜チャレンジ（10G）  ──  3通りの結末</a:t>
+              <a:t>超抜チャレンジ（10G）  ──  ベル9カウント or 毎G抽選で突破</a:t>
             </a:r>
           </a:p>
         </p:txBody>
@@ -11233,8 +11917,8 @@
                 </a:solidFill>
                 <a:latin typeface="メイリオ"/>
               </a:rPr>
-              <a:t>上乗せ・特化ゾーン「バカンスモード」（30G）抽選
-V揃いカットイン / 強役で50G以上上乗せ</a:t>
+              <a:t>チェリー → ぶっちぎりバトルのメイン契機
+バトル高確中は全役で突入抽選</a:t>
             </a:r>
           </a:p>
         </p:txBody>
@@ -12751,7 +13435,7 @@
                 </a:solidFill>
                 <a:latin typeface="游明朝"/>
               </a:rPr>
-              <a:t>シナリオ × 示唆システム  ──  読み解く楽しさが遊技の深みになる</a:t>
+              <a:t>ぶっちぎりバトル × 連戦  ──  SGバトルを超える「横道」の自力感</a:t>
             </a:r>
           </a:p>
         </p:txBody>
@@ -12765,555 +13449,7 @@
         <p:spPr>
           <a:xfrm>
             <a:off x="182880" y="777240"/>
-            <a:ext cx="2743200" cy="3200400"/>
-          </a:xfrm>
-          <a:prstGeom prst="rect">
-            <a:avLst/>
-          </a:prstGeom>
-          <a:solidFill>
-            <a:srgbClr val="0C142C"/>
-          </a:solidFill>
-          <a:ln w="19050">
-            <a:solidFill>
-              <a:srgbClr val="00C0C8"/>
-            </a:solidFill>
-          </a:ln>
-        </p:spPr>
-        <p:style>
-          <a:lnRef idx="1">
-            <a:schemeClr val="accent1"/>
-          </a:lnRef>
-          <a:fillRef idx="3">
-            <a:schemeClr val="accent1"/>
-          </a:fillRef>
-          <a:effectRef idx="2">
-            <a:schemeClr val="accent1"/>
-          </a:effectRef>
-          <a:fontRef idx="minor">
-            <a:schemeClr val="lt1"/>
-          </a:fontRef>
-        </p:style>
-        <p:txBody>
-          <a:bodyPr rtlCol="0" anchor="ctr"/>
-          <a:lstStyle/>
-          <a:p>
-            <a:pPr algn="ctr"/>
-          </a:p>
-        </p:txBody>
-      </p:sp>
-      <p:sp>
-        <p:nvSpPr>
-          <p:cNvPr id="7" name="TextBox 6"/>
-          <p:cNvSpPr txBox="1"/>
-          <p:nvPr/>
-        </p:nvSpPr>
-        <p:spPr>
-          <a:xfrm>
-            <a:off x="292608" y="841248"/>
-            <a:ext cx="2514600" cy="320000"/>
-          </a:xfrm>
-          <a:prstGeom prst="rect">
-            <a:avLst/>
-          </a:prstGeom>
-          <a:noFill/>
-        </p:spPr>
-        <p:txBody>
-          <a:bodyPr wrap="square">
-            <a:spAutoFit/>
-          </a:bodyPr>
-          <a:lstStyle/>
-          <a:p>
-            <a:pPr algn="l"/>
-            <a:r>
-              <a:rPr sz="1000" b="1">
-                <a:solidFill>
-                  <a:srgbClr val="00C0C8"/>
-                </a:solidFill>
-                <a:latin typeface="游明朝"/>
-              </a:rPr>
-              <a:t>フレームランプ示唆（6色）</a:t>
-            </a:r>
-          </a:p>
-        </p:txBody>
-      </p:sp>
-      <p:sp>
-        <p:nvSpPr>
-          <p:cNvPr id="8" name="Rectangle 7"/>
-          <p:cNvSpPr/>
-          <p:nvPr/>
-        </p:nvSpPr>
-        <p:spPr>
-          <a:xfrm>
-            <a:off x="320040" y="1280160"/>
-            <a:ext cx="340000" cy="290000"/>
-          </a:xfrm>
-          <a:prstGeom prst="rect">
-            <a:avLst/>
-          </a:prstGeom>
-          <a:solidFill>
-            <a:srgbClr val="FFFFFF"/>
-          </a:solidFill>
-          <a:ln>
-            <a:noFill/>
-          </a:ln>
-        </p:spPr>
-        <p:style>
-          <a:lnRef idx="1">
-            <a:schemeClr val="accent1"/>
-          </a:lnRef>
-          <a:fillRef idx="3">
-            <a:schemeClr val="accent1"/>
-          </a:fillRef>
-          <a:effectRef idx="2">
-            <a:schemeClr val="accent1"/>
-          </a:effectRef>
-          <a:fontRef idx="minor">
-            <a:schemeClr val="lt1"/>
-          </a:fontRef>
-        </p:style>
-        <p:txBody>
-          <a:bodyPr rtlCol="0" anchor="ctr"/>
-          <a:lstStyle/>
-          <a:p>
-            <a:pPr algn="ctr"/>
-          </a:p>
-        </p:txBody>
-      </p:sp>
-      <p:sp>
-        <p:nvSpPr>
-          <p:cNvPr id="9" name="TextBox 8"/>
-          <p:cNvSpPr txBox="1"/>
-          <p:nvPr/>
-        </p:nvSpPr>
-        <p:spPr>
-          <a:xfrm>
-            <a:off x="777240" y="1310160"/>
-            <a:ext cx="1783080" cy="240000"/>
-          </a:xfrm>
-          <a:prstGeom prst="rect">
-            <a:avLst/>
-          </a:prstGeom>
-          <a:noFill/>
-        </p:spPr>
-        <p:txBody>
-          <a:bodyPr wrap="square">
-            <a:spAutoFit/>
-          </a:bodyPr>
-          <a:lstStyle/>
-          <a:p>
-            <a:pPr algn="l"/>
-            <a:r>
-              <a:rPr sz="850" b="0">
-                <a:solidFill>
-                  <a:srgbClr val="E0E8F0"/>
-                </a:solidFill>
-                <a:latin typeface="メイリオ"/>
-              </a:rPr>
-              <a:t>白  ──  継続率：低</a:t>
-            </a:r>
-          </a:p>
-        </p:txBody>
-      </p:sp>
-      <p:sp>
-        <p:nvSpPr>
-          <p:cNvPr id="10" name="Rectangle 9"/>
-          <p:cNvSpPr/>
-          <p:nvPr/>
-        </p:nvSpPr>
-        <p:spPr>
-          <a:xfrm>
-            <a:off x="320040" y="1600160"/>
-            <a:ext cx="340000" cy="290000"/>
-          </a:xfrm>
-          <a:prstGeom prst="rect">
-            <a:avLst/>
-          </a:prstGeom>
-          <a:solidFill>
-            <a:srgbClr val="4488FF"/>
-          </a:solidFill>
-          <a:ln>
-            <a:noFill/>
-          </a:ln>
-        </p:spPr>
-        <p:style>
-          <a:lnRef idx="1">
-            <a:schemeClr val="accent1"/>
-          </a:lnRef>
-          <a:fillRef idx="3">
-            <a:schemeClr val="accent1"/>
-          </a:fillRef>
-          <a:effectRef idx="2">
-            <a:schemeClr val="accent1"/>
-          </a:effectRef>
-          <a:fontRef idx="minor">
-            <a:schemeClr val="lt1"/>
-          </a:fontRef>
-        </p:style>
-        <p:txBody>
-          <a:bodyPr rtlCol="0" anchor="ctr"/>
-          <a:lstStyle/>
-          <a:p>
-            <a:pPr algn="ctr"/>
-          </a:p>
-        </p:txBody>
-      </p:sp>
-      <p:sp>
-        <p:nvSpPr>
-          <p:cNvPr id="11" name="TextBox 10"/>
-          <p:cNvSpPr txBox="1"/>
-          <p:nvPr/>
-        </p:nvSpPr>
-        <p:spPr>
-          <a:xfrm>
-            <a:off x="777240" y="1630160"/>
-            <a:ext cx="1783080" cy="240000"/>
-          </a:xfrm>
-          <a:prstGeom prst="rect">
-            <a:avLst/>
-          </a:prstGeom>
-          <a:noFill/>
-        </p:spPr>
-        <p:txBody>
-          <a:bodyPr wrap="square">
-            <a:spAutoFit/>
-          </a:bodyPr>
-          <a:lstStyle/>
-          <a:p>
-            <a:pPr algn="l"/>
-            <a:r>
-              <a:rPr sz="850" b="0">
-                <a:solidFill>
-                  <a:srgbClr val="E0E8F0"/>
-                </a:solidFill>
-                <a:latin typeface="メイリオ"/>
-              </a:rPr>
-              <a:t>青  ──  継続率：やや低</a:t>
-            </a:r>
-          </a:p>
-        </p:txBody>
-      </p:sp>
-      <p:sp>
-        <p:nvSpPr>
-          <p:cNvPr id="12" name="Rectangle 11"/>
-          <p:cNvSpPr/>
-          <p:nvPr/>
-        </p:nvSpPr>
-        <p:spPr>
-          <a:xfrm>
-            <a:off x="320040" y="1920160"/>
-            <a:ext cx="340000" cy="290000"/>
-          </a:xfrm>
-          <a:prstGeom prst="rect">
-            <a:avLst/>
-          </a:prstGeom>
-          <a:solidFill>
-            <a:srgbClr val="FFEE00"/>
-          </a:solidFill>
-          <a:ln>
-            <a:noFill/>
-          </a:ln>
-        </p:spPr>
-        <p:style>
-          <a:lnRef idx="1">
-            <a:schemeClr val="accent1"/>
-          </a:lnRef>
-          <a:fillRef idx="3">
-            <a:schemeClr val="accent1"/>
-          </a:fillRef>
-          <a:effectRef idx="2">
-            <a:schemeClr val="accent1"/>
-          </a:effectRef>
-          <a:fontRef idx="minor">
-            <a:schemeClr val="lt1"/>
-          </a:fontRef>
-        </p:style>
-        <p:txBody>
-          <a:bodyPr rtlCol="0" anchor="ctr"/>
-          <a:lstStyle/>
-          <a:p>
-            <a:pPr algn="ctr"/>
-          </a:p>
-        </p:txBody>
-      </p:sp>
-      <p:sp>
-        <p:nvSpPr>
-          <p:cNvPr id="13" name="TextBox 12"/>
-          <p:cNvSpPr txBox="1"/>
-          <p:nvPr/>
-        </p:nvSpPr>
-        <p:spPr>
-          <a:xfrm>
-            <a:off x="777240" y="1950160"/>
-            <a:ext cx="1783080" cy="240000"/>
-          </a:xfrm>
-          <a:prstGeom prst="rect">
-            <a:avLst/>
-          </a:prstGeom>
-          <a:noFill/>
-        </p:spPr>
-        <p:txBody>
-          <a:bodyPr wrap="square">
-            <a:spAutoFit/>
-          </a:bodyPr>
-          <a:lstStyle/>
-          <a:p>
-            <a:pPr algn="l"/>
-            <a:r>
-              <a:rPr sz="850" b="0">
-                <a:solidFill>
-                  <a:srgbClr val="E0E8F0"/>
-                </a:solidFill>
-                <a:latin typeface="メイリオ"/>
-              </a:rPr>
-              <a:t>黄  ──  継続率：中</a:t>
-            </a:r>
-          </a:p>
-        </p:txBody>
-      </p:sp>
-      <p:sp>
-        <p:nvSpPr>
-          <p:cNvPr id="14" name="Rectangle 13"/>
-          <p:cNvSpPr/>
-          <p:nvPr/>
-        </p:nvSpPr>
-        <p:spPr>
-          <a:xfrm>
-            <a:off x="320040" y="2240160"/>
-            <a:ext cx="340000" cy="290000"/>
-          </a:xfrm>
-          <a:prstGeom prst="rect">
-            <a:avLst/>
-          </a:prstGeom>
-          <a:solidFill>
-            <a:srgbClr val="22CC44"/>
-          </a:solidFill>
-          <a:ln>
-            <a:noFill/>
-          </a:ln>
-        </p:spPr>
-        <p:style>
-          <a:lnRef idx="1">
-            <a:schemeClr val="accent1"/>
-          </a:lnRef>
-          <a:fillRef idx="3">
-            <a:schemeClr val="accent1"/>
-          </a:fillRef>
-          <a:effectRef idx="2">
-            <a:schemeClr val="accent1"/>
-          </a:effectRef>
-          <a:fontRef idx="minor">
-            <a:schemeClr val="lt1"/>
-          </a:fontRef>
-        </p:style>
-        <p:txBody>
-          <a:bodyPr rtlCol="0" anchor="ctr"/>
-          <a:lstStyle/>
-          <a:p>
-            <a:pPr algn="ctr"/>
-          </a:p>
-        </p:txBody>
-      </p:sp>
-      <p:sp>
-        <p:nvSpPr>
-          <p:cNvPr id="15" name="TextBox 14"/>
-          <p:cNvSpPr txBox="1"/>
-          <p:nvPr/>
-        </p:nvSpPr>
-        <p:spPr>
-          <a:xfrm>
-            <a:off x="777240" y="2270160"/>
-            <a:ext cx="1783080" cy="240000"/>
-          </a:xfrm>
-          <a:prstGeom prst="rect">
-            <a:avLst/>
-          </a:prstGeom>
-          <a:noFill/>
-        </p:spPr>
-        <p:txBody>
-          <a:bodyPr wrap="square">
-            <a:spAutoFit/>
-          </a:bodyPr>
-          <a:lstStyle/>
-          <a:p>
-            <a:pPr algn="l"/>
-            <a:r>
-              <a:rPr sz="850" b="0">
-                <a:solidFill>
-                  <a:srgbClr val="E0E8F0"/>
-                </a:solidFill>
-                <a:latin typeface="メイリオ"/>
-              </a:rPr>
-              <a:t>緑  ──  継続率：やや高</a:t>
-            </a:r>
-          </a:p>
-        </p:txBody>
-      </p:sp>
-      <p:sp>
-        <p:nvSpPr>
-          <p:cNvPr id="16" name="Rectangle 15"/>
-          <p:cNvSpPr/>
-          <p:nvPr/>
-        </p:nvSpPr>
-        <p:spPr>
-          <a:xfrm>
-            <a:off x="320040" y="2560160"/>
-            <a:ext cx="340000" cy="290000"/>
-          </a:xfrm>
-          <a:prstGeom prst="rect">
-            <a:avLst/>
-          </a:prstGeom>
-          <a:solidFill>
-            <a:srgbClr val="CC2222"/>
-          </a:solidFill>
-          <a:ln>
-            <a:noFill/>
-          </a:ln>
-        </p:spPr>
-        <p:style>
-          <a:lnRef idx="1">
-            <a:schemeClr val="accent1"/>
-          </a:lnRef>
-          <a:fillRef idx="3">
-            <a:schemeClr val="accent1"/>
-          </a:fillRef>
-          <a:effectRef idx="2">
-            <a:schemeClr val="accent1"/>
-          </a:effectRef>
-          <a:fontRef idx="minor">
-            <a:schemeClr val="lt1"/>
-          </a:fontRef>
-        </p:style>
-        <p:txBody>
-          <a:bodyPr rtlCol="0" anchor="ctr"/>
-          <a:lstStyle/>
-          <a:p>
-            <a:pPr algn="ctr"/>
-          </a:p>
-        </p:txBody>
-      </p:sp>
-      <p:sp>
-        <p:nvSpPr>
-          <p:cNvPr id="17" name="TextBox 16"/>
-          <p:cNvSpPr txBox="1"/>
-          <p:nvPr/>
-        </p:nvSpPr>
-        <p:spPr>
-          <a:xfrm>
-            <a:off x="777240" y="2590160"/>
-            <a:ext cx="1783080" cy="240000"/>
-          </a:xfrm>
-          <a:prstGeom prst="rect">
-            <a:avLst/>
-          </a:prstGeom>
-          <a:noFill/>
-        </p:spPr>
-        <p:txBody>
-          <a:bodyPr wrap="square">
-            <a:spAutoFit/>
-          </a:bodyPr>
-          <a:lstStyle/>
-          <a:p>
-            <a:pPr algn="l"/>
-            <a:r>
-              <a:rPr sz="850" b="0">
-                <a:solidFill>
-                  <a:srgbClr val="E0E8F0"/>
-                </a:solidFill>
-                <a:latin typeface="メイリオ"/>
-              </a:rPr>
-              <a:t>赤  ──  継続率：高</a:t>
-            </a:r>
-          </a:p>
-        </p:txBody>
-      </p:sp>
-      <p:sp>
-        <p:nvSpPr>
-          <p:cNvPr id="18" name="Rectangle 17"/>
-          <p:cNvSpPr/>
-          <p:nvPr/>
-        </p:nvSpPr>
-        <p:spPr>
-          <a:xfrm>
-            <a:off x="320040" y="2880160"/>
-            <a:ext cx="340000" cy="290000"/>
-          </a:xfrm>
-          <a:prstGeom prst="rect">
-            <a:avLst/>
-          </a:prstGeom>
-          <a:solidFill>
-            <a:srgbClr val="FF80FF"/>
-          </a:solidFill>
-          <a:ln>
-            <a:noFill/>
-          </a:ln>
-        </p:spPr>
-        <p:style>
-          <a:lnRef idx="1">
-            <a:schemeClr val="accent1"/>
-          </a:lnRef>
-          <a:fillRef idx="3">
-            <a:schemeClr val="accent1"/>
-          </a:fillRef>
-          <a:effectRef idx="2">
-            <a:schemeClr val="accent1"/>
-          </a:effectRef>
-          <a:fontRef idx="minor">
-            <a:schemeClr val="lt1"/>
-          </a:fontRef>
-        </p:style>
-        <p:txBody>
-          <a:bodyPr rtlCol="0" anchor="ctr"/>
-          <a:lstStyle/>
-          <a:p>
-            <a:pPr algn="ctr"/>
-          </a:p>
-        </p:txBody>
-      </p:sp>
-      <p:sp>
-        <p:nvSpPr>
-          <p:cNvPr id="19" name="TextBox 18"/>
-          <p:cNvSpPr txBox="1"/>
-          <p:nvPr/>
-        </p:nvSpPr>
-        <p:spPr>
-          <a:xfrm>
-            <a:off x="777240" y="2910160"/>
-            <a:ext cx="1783080" cy="240000"/>
-          </a:xfrm>
-          <a:prstGeom prst="rect">
-            <a:avLst/>
-          </a:prstGeom>
-          <a:noFill/>
-        </p:spPr>
-        <p:txBody>
-          <a:bodyPr wrap="square">
-            <a:spAutoFit/>
-          </a:bodyPr>
-          <a:lstStyle/>
-          <a:p>
-            <a:pPr algn="l"/>
-            <a:r>
-              <a:rPr sz="850" b="0">
-                <a:solidFill>
-                  <a:srgbClr val="E0E8F0"/>
-                </a:solidFill>
-                <a:latin typeface="メイリオ"/>
-              </a:rPr>
-              <a:t>虹  ──  最高（艇王濃厚）</a:t>
-            </a:r>
-          </a:p>
-        </p:txBody>
-      </p:sp>
-      <p:sp>
-        <p:nvSpPr>
-          <p:cNvPr id="20" name="Rectangle 19"/>
-          <p:cNvSpPr/>
-          <p:nvPr/>
-        </p:nvSpPr>
-        <p:spPr>
-          <a:xfrm>
-            <a:off x="3108960" y="777240"/>
-            <a:ext cx="2834640" cy="3200400"/>
+            <a:ext cx="4069080" cy="3154680"/>
           </a:xfrm>
           <a:prstGeom prst="rect">
             <a:avLst/>
@@ -13351,55 +13487,55 @@
       </p:sp>
       <p:sp>
         <p:nvSpPr>
-          <p:cNvPr id="21" name="TextBox 20"/>
-          <p:cNvSpPr txBox="1"/>
-          <p:nvPr/>
-        </p:nvSpPr>
-        <p:spPr>
-          <a:xfrm>
-            <a:off x="3218688" y="841248"/>
-            <a:ext cx="2606040" cy="320000"/>
-          </a:xfrm>
-          <a:prstGeom prst="rect">
-            <a:avLst/>
-          </a:prstGeom>
-          <a:noFill/>
-        </p:spPr>
-        <p:txBody>
-          <a:bodyPr wrap="square">
-            <a:spAutoFit/>
-          </a:bodyPr>
-          <a:lstStyle/>
-          <a:p>
-            <a:pPr algn="l"/>
-            <a:r>
-              <a:rPr sz="1000" b="1">
+          <p:cNvPr id="7" name="TextBox 6"/>
+          <p:cNvSpPr txBox="1"/>
+          <p:nvPr/>
+        </p:nvSpPr>
+        <p:spPr>
+          <a:xfrm>
+            <a:off x="292608" y="841248"/>
+            <a:ext cx="3749039" cy="320000"/>
+          </a:xfrm>
+          <a:prstGeom prst="rect">
+            <a:avLst/>
+          </a:prstGeom>
+          <a:noFill/>
+        </p:spPr>
+        <p:txBody>
+          <a:bodyPr wrap="square">
+            <a:spAutoFit/>
+          </a:bodyPr>
+          <a:lstStyle/>
+          <a:p>
+            <a:pPr algn="l"/>
+            <a:r>
+              <a:rPr sz="1100" b="1">
                 <a:solidFill>
                   <a:srgbClr val="FFA020"/>
                 </a:solidFill>
                 <a:latin typeface="游明朝"/>
               </a:rPr>
-              <a:t>サブ液晶・セリフ示唆</a:t>
-            </a:r>
-          </a:p>
-        </p:txBody>
-      </p:sp>
-      <p:sp>
-        <p:nvSpPr>
-          <p:cNvPr id="22" name="Rectangle 21"/>
+              <a:t>ぶっちぎりバトル</a:t>
+            </a:r>
+          </a:p>
+        </p:txBody>
+      </p:sp>
+      <p:sp>
+        <p:nvSpPr>
+          <p:cNvPr id="8" name="Rectangle 7"/>
           <p:cNvSpPr/>
           <p:nvPr/>
         </p:nvSpPr>
         <p:spPr>
           <a:xfrm>
-            <a:off x="3182112" y="1280160"/>
-            <a:ext cx="2688336" cy="320000"/>
+            <a:off x="256032" y="1261872"/>
+            <a:ext cx="3904487" cy="315000"/>
           </a:xfrm>
           <a:prstGeom prst="rect">
             <a:avLst/>
           </a:prstGeom>
           <a:solidFill>
-            <a:srgbClr val="101206"/>
+            <a:srgbClr val="0A1428"/>
           </a:solidFill>
           <a:ln>
             <a:noFill/>
@@ -13429,14 +13565,14 @@
       </p:sp>
       <p:sp>
         <p:nvSpPr>
-          <p:cNvPr id="23" name="TextBox 22"/>
-          <p:cNvSpPr txBox="1"/>
-          <p:nvPr/>
-        </p:nvSpPr>
-        <p:spPr>
-          <a:xfrm>
-            <a:off x="3273552" y="1305160"/>
-            <a:ext cx="1143000" cy="275000"/>
+          <p:cNvPr id="9" name="TextBox 8"/>
+          <p:cNvSpPr txBox="1"/>
+          <p:nvPr/>
+        </p:nvSpPr>
+        <p:spPr>
+          <a:xfrm>
+            <a:off x="347472" y="1289872"/>
+            <a:ext cx="1371600" cy="265000"/>
           </a:xfrm>
           <a:prstGeom prst="rect">
             <a:avLst/>
@@ -13451,68 +13587,68 @@
           <a:p>
             <a:pPr algn="l"/>
             <a:r>
-              <a:rPr sz="800" b="1">
+              <a:rPr sz="850" b="1">
+                <a:solidFill>
+                  <a:srgbClr val="14887C"/>
+                </a:solidFill>
+                <a:latin typeface="メイリオ"/>
+              </a:rPr>
+              <a:t>突入契機</a:t>
+            </a:r>
+          </a:p>
+        </p:txBody>
+      </p:sp>
+      <p:sp>
+        <p:nvSpPr>
+          <p:cNvPr id="10" name="TextBox 9"/>
+          <p:cNvSpPr txBox="1"/>
+          <p:nvPr/>
+        </p:nvSpPr>
+        <p:spPr>
+          <a:xfrm>
+            <a:off x="1764792" y="1289872"/>
+            <a:ext cx="2194560" cy="265000"/>
+          </a:xfrm>
+          <a:prstGeom prst="rect">
+            <a:avLst/>
+          </a:prstGeom>
+          <a:noFill/>
+        </p:spPr>
+        <p:txBody>
+          <a:bodyPr wrap="none">
+            <a:spAutoFit/>
+          </a:bodyPr>
+          <a:lstStyle/>
+          <a:p>
+            <a:pPr algn="l"/>
+            <a:r>
+              <a:rPr sz="850" b="0">
                 <a:solidFill>
                   <a:srgbClr val="FFA020"/>
                 </a:solidFill>
                 <a:latin typeface="メイリオ"/>
               </a:rPr>
-              <a:t>登場キャラ</a:t>
-            </a:r>
-          </a:p>
-        </p:txBody>
-      </p:sp>
-      <p:sp>
-        <p:nvSpPr>
-          <p:cNvPr id="24" name="TextBox 23"/>
-          <p:cNvSpPr txBox="1"/>
-          <p:nvPr/>
-        </p:nvSpPr>
-        <p:spPr>
-          <a:xfrm>
-            <a:off x="4462272" y="1305160"/>
-            <a:ext cx="1325880" cy="275000"/>
-          </a:xfrm>
-          <a:prstGeom prst="rect">
-            <a:avLst/>
-          </a:prstGeom>
-          <a:noFill/>
-        </p:spPr>
-        <p:txBody>
-          <a:bodyPr wrap="square">
-            <a:spAutoFit/>
-          </a:bodyPr>
-          <a:lstStyle/>
-          <a:p>
-            <a:pPr algn="l"/>
-            <a:r>
-              <a:rPr sz="750" b="0">
-                <a:solidFill>
-                  <a:srgbClr val="E0E8F0"/>
-                </a:solidFill>
-                <a:latin typeface="メイリオ"/>
-              </a:rPr>
-              <a:t>キャラによってモード・シナリオ段階を示唆</a:t>
-            </a:r>
-          </a:p>
-        </p:txBody>
-      </p:sp>
-      <p:sp>
-        <p:nvSpPr>
-          <p:cNvPr id="25" name="Rectangle 24"/>
+              <a:t>周回パートのチェリー主契機（高確=全役）</a:t>
+            </a:r>
+          </a:p>
+        </p:txBody>
+      </p:sp>
+      <p:sp>
+        <p:nvSpPr>
+          <p:cNvPr id="11" name="Rectangle 10"/>
           <p:cNvSpPr/>
           <p:nvPr/>
         </p:nvSpPr>
         <p:spPr>
           <a:xfrm>
-            <a:off x="3182112" y="1612160"/>
-            <a:ext cx="2688336" cy="320000"/>
+            <a:off x="256032" y="1586872"/>
+            <a:ext cx="3904487" cy="315000"/>
           </a:xfrm>
           <a:prstGeom prst="rect">
             <a:avLst/>
           </a:prstGeom>
           <a:solidFill>
-            <a:srgbClr val="141608"/>
+            <a:srgbClr val="0E182E"/>
           </a:solidFill>
           <a:ln>
             <a:noFill/>
@@ -13542,14 +13678,14 @@
       </p:sp>
       <p:sp>
         <p:nvSpPr>
-          <p:cNvPr id="26" name="TextBox 25"/>
-          <p:cNvSpPr txBox="1"/>
-          <p:nvPr/>
-        </p:nvSpPr>
-        <p:spPr>
-          <a:xfrm>
-            <a:off x="3273552" y="1637160"/>
-            <a:ext cx="1143000" cy="275000"/>
+          <p:cNvPr id="12" name="TextBox 11"/>
+          <p:cNvSpPr txBox="1"/>
+          <p:nvPr/>
+        </p:nvSpPr>
+        <p:spPr>
+          <a:xfrm>
+            <a:off x="347472" y="1614872"/>
+            <a:ext cx="1371600" cy="265000"/>
           </a:xfrm>
           <a:prstGeom prst="rect">
             <a:avLst/>
@@ -13564,68 +13700,68 @@
           <a:p>
             <a:pPr algn="l"/>
             <a:r>
-              <a:rPr sz="800" b="1">
-                <a:solidFill>
-                  <a:srgbClr val="FFA020"/>
-                </a:solidFill>
-                <a:latin typeface="メイリオ"/>
-              </a:rPr>
-              <a:t>セリフ内容</a:t>
-            </a:r>
-          </a:p>
-        </p:txBody>
-      </p:sp>
-      <p:sp>
-        <p:nvSpPr>
-          <p:cNvPr id="27" name="TextBox 26"/>
-          <p:cNvSpPr txBox="1"/>
-          <p:nvPr/>
-        </p:nvSpPr>
-        <p:spPr>
-          <a:xfrm>
-            <a:off x="4462272" y="1637160"/>
-            <a:ext cx="1325880" cy="275000"/>
-          </a:xfrm>
-          <a:prstGeom prst="rect">
-            <a:avLst/>
-          </a:prstGeom>
-          <a:noFill/>
-        </p:spPr>
-        <p:txBody>
-          <a:bodyPr wrap="square">
-            <a:spAutoFit/>
-          </a:bodyPr>
-          <a:lstStyle/>
-          <a:p>
-            <a:pPr algn="l"/>
-            <a:r>
-              <a:rPr sz="750" b="0">
-                <a:solidFill>
-                  <a:srgbClr val="E0E8F0"/>
-                </a:solidFill>
-                <a:latin typeface="メイリオ"/>
-              </a:rPr>
-              <a:t>ポジティブ/ネガティブで継続率の高低を示唆</a:t>
-            </a:r>
-          </a:p>
-        </p:txBody>
-      </p:sp>
-      <p:sp>
-        <p:nvSpPr>
-          <p:cNvPr id="28" name="Rectangle 27"/>
+              <a:rPr sz="850" b="1">
+                <a:solidFill>
+                  <a:srgbClr val="14887C"/>
+                </a:solidFill>
+                <a:latin typeface="メイリオ"/>
+              </a:rPr>
+              <a:t>内容</a:t>
+            </a:r>
+          </a:p>
+        </p:txBody>
+      </p:sp>
+      <p:sp>
+        <p:nvSpPr>
+          <p:cNvPr id="13" name="TextBox 12"/>
+          <p:cNvSpPr txBox="1"/>
+          <p:nvPr/>
+        </p:nvSpPr>
+        <p:spPr>
+          <a:xfrm>
+            <a:off x="1764792" y="1614872"/>
+            <a:ext cx="2194560" cy="265000"/>
+          </a:xfrm>
+          <a:prstGeom prst="rect">
+            <a:avLst/>
+          </a:prstGeom>
+          <a:noFill/>
+        </p:spPr>
+        <p:txBody>
+          <a:bodyPr wrap="none">
+            <a:spAutoFit/>
+          </a:bodyPr>
+          <a:lstStyle/>
+          <a:p>
+            <a:pPr algn="l"/>
+            <a:r>
+              <a:rPr sz="850" b="0">
+                <a:solidFill>
+                  <a:srgbClr val="FFFFFF"/>
+                </a:solidFill>
+                <a:latin typeface="メイリオ"/>
+              </a:rPr>
+              <a:t>通常SGバトルと独立した自力バトル</a:t>
+            </a:r>
+          </a:p>
+        </p:txBody>
+      </p:sp>
+      <p:sp>
+        <p:nvSpPr>
+          <p:cNvPr id="14" name="Rectangle 13"/>
           <p:cNvSpPr/>
           <p:nvPr/>
         </p:nvSpPr>
         <p:spPr>
           <a:xfrm>
-            <a:off x="3182112" y="1944160"/>
-            <a:ext cx="2688336" cy="320000"/>
+            <a:off x="256032" y="1911872"/>
+            <a:ext cx="3904487" cy="315000"/>
           </a:xfrm>
           <a:prstGeom prst="rect">
             <a:avLst/>
           </a:prstGeom>
           <a:solidFill>
-            <a:srgbClr val="101206"/>
+            <a:srgbClr val="0A1428"/>
           </a:solidFill>
           <a:ln>
             <a:noFill/>
@@ -13655,14 +13791,14 @@
       </p:sp>
       <p:sp>
         <p:nvSpPr>
-          <p:cNvPr id="29" name="TextBox 28"/>
-          <p:cNvSpPr txBox="1"/>
-          <p:nvPr/>
-        </p:nvSpPr>
-        <p:spPr>
-          <a:xfrm>
-            <a:off x="3273552" y="1969160"/>
-            <a:ext cx="1143000" cy="275000"/>
+          <p:cNvPr id="15" name="TextBox 14"/>
+          <p:cNvSpPr txBox="1"/>
+          <p:nvPr/>
+        </p:nvSpPr>
+        <p:spPr>
+          <a:xfrm>
+            <a:off x="347472" y="1939872"/>
+            <a:ext cx="1371600" cy="265000"/>
           </a:xfrm>
           <a:prstGeom prst="rect">
             <a:avLst/>
@@ -13677,68 +13813,68 @@
           <a:p>
             <a:pPr algn="l"/>
             <a:r>
-              <a:rPr sz="800" b="1">
-                <a:solidFill>
-                  <a:srgbClr val="FFA020"/>
-                </a:solidFill>
-                <a:latin typeface="メイリオ"/>
-              </a:rPr>
-              <a:t>ランプ×セリフ</a:t>
-            </a:r>
-          </a:p>
-        </p:txBody>
-      </p:sp>
-      <p:sp>
-        <p:nvSpPr>
-          <p:cNvPr id="30" name="TextBox 29"/>
-          <p:cNvSpPr txBox="1"/>
-          <p:nvPr/>
-        </p:nvSpPr>
-        <p:spPr>
-          <a:xfrm>
-            <a:off x="4462272" y="1969160"/>
-            <a:ext cx="1325880" cy="275000"/>
-          </a:xfrm>
-          <a:prstGeom prst="rect">
-            <a:avLst/>
-          </a:prstGeom>
-          <a:noFill/>
-        </p:spPr>
-        <p:txBody>
-          <a:bodyPr wrap="square">
-            <a:spAutoFit/>
-          </a:bodyPr>
-          <a:lstStyle/>
-          <a:p>
-            <a:pPr algn="l"/>
-            <a:r>
-              <a:rPr sz="750" b="0">
-                <a:solidFill>
-                  <a:srgbClr val="E0E8F0"/>
-                </a:solidFill>
-                <a:latin typeface="メイリオ"/>
-              </a:rPr>
-              <a:t>組み合わせで絞り込み精度が上がる</a:t>
-            </a:r>
-          </a:p>
-        </p:txBody>
-      </p:sp>
-      <p:sp>
-        <p:nvSpPr>
-          <p:cNvPr id="31" name="Rectangle 30"/>
+              <a:rPr sz="850" b="1">
+                <a:solidFill>
+                  <a:srgbClr val="14887C"/>
+                </a:solidFill>
+                <a:latin typeface="メイリオ"/>
+              </a:rPr>
+              <a:t>勝率</a:t>
+            </a:r>
+          </a:p>
+        </p:txBody>
+      </p:sp>
+      <p:sp>
+        <p:nvSpPr>
+          <p:cNvPr id="16" name="TextBox 15"/>
+          <p:cNvSpPr txBox="1"/>
+          <p:nvPr/>
+        </p:nvSpPr>
+        <p:spPr>
+          <a:xfrm>
+            <a:off x="1764792" y="1939872"/>
+            <a:ext cx="2194560" cy="265000"/>
+          </a:xfrm>
+          <a:prstGeom prst="rect">
+            <a:avLst/>
+          </a:prstGeom>
+          <a:noFill/>
+        </p:spPr>
+        <p:txBody>
+          <a:bodyPr wrap="none">
+            <a:spAutoFit/>
+          </a:bodyPr>
+          <a:lstStyle/>
+          <a:p>
+            <a:pPr algn="l"/>
+            <a:r>
+              <a:rPr sz="850" b="0">
+                <a:solidFill>
+                  <a:srgbClr val="C8A840"/>
+                </a:solidFill>
+                <a:latin typeface="メイリオ"/>
+              </a:rPr>
+              <a:t>約50%〜（強役ほど高確率）</a:t>
+            </a:r>
+          </a:p>
+        </p:txBody>
+      </p:sp>
+      <p:sp>
+        <p:nvSpPr>
+          <p:cNvPr id="17" name="Rectangle 16"/>
           <p:cNvSpPr/>
           <p:nvPr/>
         </p:nvSpPr>
         <p:spPr>
           <a:xfrm>
-            <a:off x="3182112" y="2276160"/>
-            <a:ext cx="2688336" cy="320000"/>
+            <a:off x="256032" y="2236872"/>
+            <a:ext cx="3904487" cy="315000"/>
           </a:xfrm>
           <a:prstGeom prst="rect">
             <a:avLst/>
           </a:prstGeom>
           <a:solidFill>
-            <a:srgbClr val="141608"/>
+            <a:srgbClr val="0E182E"/>
           </a:solidFill>
           <a:ln>
             <a:noFill/>
@@ -13768,14 +13904,14 @@
       </p:sp>
       <p:sp>
         <p:nvSpPr>
-          <p:cNvPr id="32" name="TextBox 31"/>
-          <p:cNvSpPr txBox="1"/>
-          <p:nvPr/>
-        </p:nvSpPr>
-        <p:spPr>
-          <a:xfrm>
-            <a:off x="3273552" y="2301160"/>
-            <a:ext cx="1143000" cy="275000"/>
+          <p:cNvPr id="18" name="TextBox 17"/>
+          <p:cNvSpPr txBox="1"/>
+          <p:nvPr/>
+        </p:nvSpPr>
+        <p:spPr>
+          <a:xfrm>
+            <a:off x="347472" y="2264872"/>
+            <a:ext cx="1371600" cy="265000"/>
           </a:xfrm>
           <a:prstGeom prst="rect">
             <a:avLst/>
@@ -13790,68 +13926,68 @@
           <a:p>
             <a:pPr algn="l"/>
             <a:r>
-              <a:rPr sz="800" b="1">
-                <a:solidFill>
-                  <a:srgbClr val="FFA020"/>
-                </a:solidFill>
-                <a:latin typeface="メイリオ"/>
-              </a:rPr>
-              <a:t>ラウンド開始画面</a:t>
-            </a:r>
-          </a:p>
-        </p:txBody>
-      </p:sp>
-      <p:sp>
-        <p:nvSpPr>
-          <p:cNvPr id="33" name="TextBox 32"/>
-          <p:cNvSpPr txBox="1"/>
-          <p:nvPr/>
-        </p:nvSpPr>
-        <p:spPr>
-          <a:xfrm>
-            <a:off x="4462272" y="2301160"/>
-            <a:ext cx="1325880" cy="275000"/>
-          </a:xfrm>
-          <a:prstGeom prst="rect">
-            <a:avLst/>
-          </a:prstGeom>
-          <a:noFill/>
-        </p:spPr>
-        <p:txBody>
-          <a:bodyPr wrap="square">
-            <a:spAutoFit/>
-          </a:bodyPr>
-          <a:lstStyle/>
-          <a:p>
-            <a:pPr algn="l"/>
-            <a:r>
-              <a:rPr sz="750" b="0">
-                <a:solidFill>
-                  <a:srgbClr val="E0E8F0"/>
-                </a:solidFill>
-                <a:latin typeface="メイリオ"/>
-              </a:rPr>
-              <a:t>シナリオ段階と設定を直接示唆する要素</a:t>
-            </a:r>
-          </a:p>
-        </p:txBody>
-      </p:sp>
-      <p:sp>
-        <p:nvSpPr>
-          <p:cNvPr id="34" name="Rectangle 33"/>
+              <a:rPr sz="850" b="1">
+                <a:solidFill>
+                  <a:srgbClr val="14887C"/>
+                </a:solidFill>
+                <a:latin typeface="メイリオ"/>
+              </a:rPr>
+              <a:t>恩恵A〜E</a:t>
+            </a:r>
+          </a:p>
+        </p:txBody>
+      </p:sp>
+      <p:sp>
+        <p:nvSpPr>
+          <p:cNvPr id="19" name="TextBox 18"/>
+          <p:cNvSpPr txBox="1"/>
+          <p:nvPr/>
+        </p:nvSpPr>
+        <p:spPr>
+          <a:xfrm>
+            <a:off x="1764792" y="2264872"/>
+            <a:ext cx="2194560" cy="265000"/>
+          </a:xfrm>
+          <a:prstGeom prst="rect">
+            <a:avLst/>
+          </a:prstGeom>
+          <a:noFill/>
+        </p:spPr>
+        <p:txBody>
+          <a:bodyPr wrap="none">
+            <a:spAutoFit/>
+          </a:bodyPr>
+          <a:lstStyle/>
+          <a:p>
+            <a:pPr algn="l"/>
+            <a:r>
+              <a:rPr sz="850" b="0">
+                <a:solidFill>
+                  <a:srgbClr val="22CC66"/>
+                </a:solidFill>
+                <a:latin typeface="メイリオ"/>
+              </a:rPr>
+              <a:t>勝利後1Gで恩恵レベルを告知</a:t>
+            </a:r>
+          </a:p>
+        </p:txBody>
+      </p:sp>
+      <p:sp>
+        <p:nvSpPr>
+          <p:cNvPr id="20" name="Rectangle 19"/>
           <p:cNvSpPr/>
           <p:nvPr/>
         </p:nvSpPr>
         <p:spPr>
           <a:xfrm>
-            <a:off x="3182112" y="2608160"/>
-            <a:ext cx="2688336" cy="320000"/>
+            <a:off x="256032" y="2561872"/>
+            <a:ext cx="3904487" cy="315000"/>
           </a:xfrm>
           <a:prstGeom prst="rect">
             <a:avLst/>
           </a:prstGeom>
           <a:solidFill>
-            <a:srgbClr val="101206"/>
+            <a:srgbClr val="0A1428"/>
           </a:solidFill>
           <a:ln>
             <a:noFill/>
@@ -13881,14 +14017,14 @@
       </p:sp>
       <p:sp>
         <p:nvSpPr>
-          <p:cNvPr id="35" name="TextBox 34"/>
-          <p:cNvSpPr txBox="1"/>
-          <p:nvPr/>
-        </p:nvSpPr>
-        <p:spPr>
-          <a:xfrm>
-            <a:off x="3273552" y="2633160"/>
-            <a:ext cx="1143000" cy="275000"/>
+          <p:cNvPr id="21" name="TextBox 20"/>
+          <p:cNvSpPr txBox="1"/>
+          <p:nvPr/>
+        </p:nvSpPr>
+        <p:spPr>
+          <a:xfrm>
+            <a:off x="347472" y="2589872"/>
+            <a:ext cx="1371600" cy="265000"/>
           </a:xfrm>
           <a:prstGeom prst="rect">
             <a:avLst/>
@@ -13903,73 +14039,72 @@
           <a:p>
             <a:pPr algn="l"/>
             <a:r>
-              <a:rPr sz="800" b="1">
-                <a:solidFill>
-                  <a:srgbClr val="FFA020"/>
-                </a:solidFill>
-                <a:latin typeface="メイリオ"/>
-              </a:rPr>
-              <a:t>第3停止タイミング</a:t>
-            </a:r>
-          </a:p>
-        </p:txBody>
-      </p:sp>
-      <p:sp>
-        <p:nvSpPr>
-          <p:cNvPr id="36" name="TextBox 35"/>
-          <p:cNvSpPr txBox="1"/>
-          <p:nvPr/>
-        </p:nvSpPr>
-        <p:spPr>
-          <a:xfrm>
-            <a:off x="4462272" y="2633160"/>
-            <a:ext cx="1325880" cy="275000"/>
-          </a:xfrm>
-          <a:prstGeom prst="rect">
-            <a:avLst/>
-          </a:prstGeom>
-          <a:noFill/>
-        </p:spPr>
-        <p:txBody>
-          <a:bodyPr wrap="square">
-            <a:spAutoFit/>
-          </a:bodyPr>
-          <a:lstStyle/>
-          <a:p>
-            <a:pPr algn="l"/>
-            <a:r>
-              <a:rPr sz="750" b="0">
-                <a:solidFill>
-                  <a:srgbClr val="E0E8F0"/>
-                </a:solidFill>
-                <a:latin typeface="メイリオ"/>
-              </a:rPr>
-              <a:t>第3停止を離す瞬間のカットインで確定示唆</a:t>
-            </a:r>
-          </a:p>
-        </p:txBody>
-      </p:sp>
-      <p:sp>
-        <p:nvSpPr>
-          <p:cNvPr id="37" name="Rectangle 36"/>
+              <a:rPr sz="850" b="1">
+                <a:solidFill>
+                  <a:srgbClr val="14887C"/>
+                </a:solidFill>
+                <a:latin typeface="メイリオ"/>
+              </a:rPr>
+              <a:t>Eが頂点</a:t>
+            </a:r>
+          </a:p>
+        </p:txBody>
+      </p:sp>
+      <p:sp>
+        <p:nvSpPr>
+          <p:cNvPr id="22" name="TextBox 21"/>
+          <p:cNvSpPr txBox="1"/>
+          <p:nvPr/>
+        </p:nvSpPr>
+        <p:spPr>
+          <a:xfrm>
+            <a:off x="1764792" y="2589872"/>
+            <a:ext cx="2194560" cy="265000"/>
+          </a:xfrm>
+          <a:prstGeom prst="rect">
+            <a:avLst/>
+          </a:prstGeom>
+          <a:noFill/>
+        </p:spPr>
+        <p:txBody>
+          <a:bodyPr wrap="none">
+            <a:spAutoFit/>
+          </a:bodyPr>
+          <a:lstStyle/>
+          <a:p>
+            <a:pPr algn="l"/>
+            <a:r>
+              <a:rPr sz="850" b="0">
+                <a:solidFill>
+                  <a:srgbClr val="C8A840"/>
+                </a:solidFill>
+                <a:latin typeface="メイリオ"/>
+              </a:rPr>
+              <a:t>究極Vフリーズ（100G以上確定）
+レア役で300G以上に昇格</a:t>
+            </a:r>
+          </a:p>
+        </p:txBody>
+      </p:sp>
+      <p:sp>
+        <p:nvSpPr>
+          <p:cNvPr id="23" name="Rectangle 22"/>
           <p:cNvSpPr/>
           <p:nvPr/>
         </p:nvSpPr>
         <p:spPr>
           <a:xfrm>
-            <a:off x="6126480" y="777240"/>
-            <a:ext cx="2834640" cy="3200400"/>
+            <a:off x="256032" y="2886872"/>
+            <a:ext cx="3904487" cy="315000"/>
           </a:xfrm>
           <a:prstGeom prst="rect">
             <a:avLst/>
           </a:prstGeom>
           <a:solidFill>
-            <a:srgbClr val="0C142C"/>
+            <a:srgbClr val="0E182E"/>
           </a:solidFill>
-          <a:ln w="19050">
-            <a:solidFill>
-              <a:srgbClr val="C8A840"/>
-            </a:solidFill>
+          <a:ln>
+            <a:noFill/>
           </a:ln>
         </p:spPr>
         <p:style>
@@ -13996,58 +14131,95 @@
       </p:sp>
       <p:sp>
         <p:nvSpPr>
-          <p:cNvPr id="38" name="TextBox 37"/>
-          <p:cNvSpPr txBox="1"/>
-          <p:nvPr/>
-        </p:nvSpPr>
-        <p:spPr>
-          <a:xfrm>
-            <a:off x="6236208" y="841248"/>
-            <a:ext cx="2606040" cy="320000"/>
-          </a:xfrm>
-          <a:prstGeom prst="rect">
-            <a:avLst/>
-          </a:prstGeom>
-          <a:noFill/>
-        </p:spPr>
-        <p:txBody>
-          <a:bodyPr wrap="square">
-            <a:spAutoFit/>
-          </a:bodyPr>
-          <a:lstStyle/>
-          <a:p>
-            <a:pPr algn="l"/>
-            <a:r>
-              <a:rPr sz="1000" b="1">
-                <a:solidFill>
-                  <a:srgbClr val="C8A840"/>
-                </a:solidFill>
-                <a:latin typeface="游明朝"/>
-              </a:rPr>
-              <a:t>シナリオ推測の楽しさ</a:t>
-            </a:r>
-          </a:p>
-        </p:txBody>
-      </p:sp>
-      <p:sp>
-        <p:nvSpPr>
-          <p:cNvPr id="39" name="Rectangle 38"/>
+          <p:cNvPr id="24" name="TextBox 23"/>
+          <p:cNvSpPr txBox="1"/>
+          <p:nvPr/>
+        </p:nvSpPr>
+        <p:spPr>
+          <a:xfrm>
+            <a:off x="347472" y="2914872"/>
+            <a:ext cx="1371600" cy="265000"/>
+          </a:xfrm>
+          <a:prstGeom prst="rect">
+            <a:avLst/>
+          </a:prstGeom>
+          <a:noFill/>
+        </p:spPr>
+        <p:txBody>
+          <a:bodyPr wrap="none">
+            <a:spAutoFit/>
+          </a:bodyPr>
+          <a:lstStyle/>
+          <a:p>
+            <a:pPr algn="l"/>
+            <a:r>
+              <a:rPr sz="850" b="1">
+                <a:solidFill>
+                  <a:srgbClr val="14887C"/>
+                </a:solidFill>
+                <a:latin typeface="メイリオ"/>
+              </a:rPr>
+              <a:t>連戦突入</a:t>
+            </a:r>
+          </a:p>
+        </p:txBody>
+      </p:sp>
+      <p:sp>
+        <p:nvSpPr>
+          <p:cNvPr id="25" name="TextBox 24"/>
+          <p:cNvSpPr txBox="1"/>
+          <p:nvPr/>
+        </p:nvSpPr>
+        <p:spPr>
+          <a:xfrm>
+            <a:off x="1764792" y="2914872"/>
+            <a:ext cx="2194560" cy="265000"/>
+          </a:xfrm>
+          <a:prstGeom prst="rect">
+            <a:avLst/>
+          </a:prstGeom>
+          <a:noFill/>
+        </p:spPr>
+        <p:txBody>
+          <a:bodyPr wrap="none">
+            <a:spAutoFit/>
+          </a:bodyPr>
+          <a:lstStyle/>
+          <a:p>
+            <a:pPr algn="l"/>
+            <a:r>
+              <a:rPr sz="850" b="0">
+                <a:solidFill>
+                  <a:srgbClr val="00C0C8"/>
+                </a:solidFill>
+                <a:latin typeface="メイリオ"/>
+              </a:rPr>
+              <a:t>赤=通常連戦 / 紫=裏連戦（80%ループ）</a:t>
+            </a:r>
+          </a:p>
+        </p:txBody>
+      </p:sp>
+      <p:sp>
+        <p:nvSpPr>
+          <p:cNvPr id="26" name="Rectangle 25"/>
           <p:cNvSpPr/>
           <p:nvPr/>
         </p:nvSpPr>
         <p:spPr>
           <a:xfrm>
-            <a:off x="6199632" y="1280160"/>
-            <a:ext cx="50000" cy="510000"/>
+            <a:off x="4434840" y="804672"/>
+            <a:ext cx="4526280" cy="340000"/>
           </a:xfrm>
           <a:prstGeom prst="rect">
             <a:avLst/>
           </a:prstGeom>
           <a:solidFill>
-            <a:srgbClr val="C8A840"/>
+            <a:srgbClr val="140800"/>
           </a:solidFill>
-          <a:ln>
-            <a:noFill/>
+          <a:ln w="25400">
+            <a:solidFill>
+              <a:srgbClr val="FFA020"/>
+            </a:solidFill>
           </a:ln>
         </p:spPr>
         <p:style>
@@ -14074,49 +14246,362 @@
       </p:sp>
       <p:sp>
         <p:nvSpPr>
-          <p:cNvPr id="40" name="TextBox 39"/>
-          <p:cNvSpPr txBox="1"/>
-          <p:nvPr/>
-        </p:nvSpPr>
-        <p:spPr>
-          <a:xfrm>
-            <a:off x="6382512" y="1305160"/>
-            <a:ext cx="2423160" cy="240000"/>
-          </a:xfrm>
-          <a:prstGeom prst="rect">
-            <a:avLst/>
-          </a:prstGeom>
-          <a:noFill/>
-        </p:spPr>
-        <p:txBody>
-          <a:bodyPr wrap="square">
-            <a:spAutoFit/>
-          </a:bodyPr>
-          <a:lstStyle/>
-          <a:p>
-            <a:pPr algn="l"/>
-            <a:r>
-              <a:rPr sz="900" b="1">
-                <a:solidFill>
-                  <a:srgbClr val="C8A840"/>
-                </a:solidFill>
-                <a:latin typeface="メイリオ"/>
-              </a:rPr>
-              <a:t>情報収集の喜び</a:t>
-            </a:r>
-          </a:p>
-        </p:txBody>
-      </p:sp>
-      <p:sp>
-        <p:nvSpPr>
-          <p:cNvPr id="41" name="TextBox 40"/>
-          <p:cNvSpPr txBox="1"/>
-          <p:nvPr/>
-        </p:nvSpPr>
-        <p:spPr>
-          <a:xfrm>
-            <a:off x="6382512" y="1545160"/>
-            <a:ext cx="2423160" cy="260000"/>
+          <p:cNvPr id="27" name="TextBox 26"/>
+          <p:cNvSpPr txBox="1"/>
+          <p:nvPr/>
+        </p:nvSpPr>
+        <p:spPr>
+          <a:xfrm>
+            <a:off x="4514840" y="859536"/>
+            <a:ext cx="4366280" cy="280000"/>
+          </a:xfrm>
+          <a:prstGeom prst="rect">
+            <a:avLst/>
+          </a:prstGeom>
+          <a:noFill/>
+        </p:spPr>
+        <p:txBody>
+          <a:bodyPr wrap="square">
+            <a:spAutoFit/>
+          </a:bodyPr>
+          <a:lstStyle/>
+          <a:p>
+            <a:pPr algn="l"/>
+            <a:r>
+              <a:rPr sz="1000" b="1">
+                <a:solidFill>
+                  <a:srgbClr val="FFA020"/>
+                </a:solidFill>
+                <a:latin typeface="游明朝"/>
+              </a:rPr>
+              <a:t>連戦システム  ──  エフェクト色が強さを決める</a:t>
+            </a:r>
+          </a:p>
+        </p:txBody>
+      </p:sp>
+      <p:sp>
+        <p:nvSpPr>
+          <p:cNvPr id="28" name="Rectangle 27"/>
+          <p:cNvSpPr/>
+          <p:nvPr/>
+        </p:nvSpPr>
+        <p:spPr>
+          <a:xfrm>
+            <a:off x="4434840" y="1244672"/>
+            <a:ext cx="4526280" cy="900000"/>
+          </a:xfrm>
+          <a:prstGeom prst="rect">
+            <a:avLst/>
+          </a:prstGeom>
+          <a:solidFill>
+            <a:srgbClr val="1A0404"/>
+          </a:solidFill>
+          <a:ln w="25400">
+            <a:solidFill>
+              <a:srgbClr val="CC2222"/>
+            </a:solidFill>
+          </a:ln>
+        </p:spPr>
+        <p:style>
+          <a:lnRef idx="1">
+            <a:schemeClr val="accent1"/>
+          </a:lnRef>
+          <a:fillRef idx="3">
+            <a:schemeClr val="accent1"/>
+          </a:fillRef>
+          <a:effectRef idx="2">
+            <a:schemeClr val="accent1"/>
+          </a:effectRef>
+          <a:fontRef idx="minor">
+            <a:schemeClr val="lt1"/>
+          </a:fontRef>
+        </p:style>
+        <p:txBody>
+          <a:bodyPr rtlCol="0" anchor="ctr"/>
+          <a:lstStyle/>
+          <a:p>
+            <a:pPr algn="ctr"/>
+          </a:p>
+        </p:txBody>
+      </p:sp>
+      <p:sp>
+        <p:nvSpPr>
+          <p:cNvPr id="29" name="TextBox 28"/>
+          <p:cNvSpPr txBox="1"/>
+          <p:nvPr/>
+        </p:nvSpPr>
+        <p:spPr>
+          <a:xfrm>
+            <a:off x="4514840" y="1299672"/>
+            <a:ext cx="4386280" cy="290000"/>
+          </a:xfrm>
+          <a:prstGeom prst="rect">
+            <a:avLst/>
+          </a:prstGeom>
+          <a:noFill/>
+        </p:spPr>
+        <p:txBody>
+          <a:bodyPr wrap="square">
+            <a:spAutoFit/>
+          </a:bodyPr>
+          <a:lstStyle/>
+          <a:p>
+            <a:pPr algn="l"/>
+            <a:r>
+              <a:rPr sz="1100" b="1">
+                <a:solidFill>
+                  <a:srgbClr val="CC2222"/>
+                </a:solidFill>
+                <a:latin typeface="游明朝"/>
+              </a:rPr>
+              <a:t>赤エフェクト → 通常連戦</a:t>
+            </a:r>
+          </a:p>
+        </p:txBody>
+      </p:sp>
+      <p:sp>
+        <p:nvSpPr>
+          <p:cNvPr id="30" name="TextBox 29"/>
+          <p:cNvSpPr txBox="1"/>
+          <p:nvPr/>
+        </p:nvSpPr>
+        <p:spPr>
+          <a:xfrm>
+            <a:off x="4514840" y="1594672"/>
+            <a:ext cx="4386280" cy="500000"/>
+          </a:xfrm>
+          <a:prstGeom prst="rect">
+            <a:avLst/>
+          </a:prstGeom>
+          <a:noFill/>
+        </p:spPr>
+        <p:txBody>
+          <a:bodyPr wrap="square">
+            <a:spAutoFit/>
+          </a:bodyPr>
+          <a:lstStyle/>
+          <a:p>
+            <a:pPr algn="l"/>
+            <a:r>
+              <a:rPr sz="900" b="0">
+                <a:solidFill>
+                  <a:srgbClr val="E0E8F0"/>
+                </a:solidFill>
+                <a:latin typeface="メイリオ"/>
+              </a:rPr>
+              <a:t>敗北するまでぶっちぎりバトルが継続。
+1バトルごとに追加報酬のチャンス。</a:t>
+            </a:r>
+          </a:p>
+        </p:txBody>
+      </p:sp>
+      <p:sp>
+        <p:nvSpPr>
+          <p:cNvPr id="31" name="Rectangle 30"/>
+          <p:cNvSpPr/>
+          <p:nvPr/>
+        </p:nvSpPr>
+        <p:spPr>
+          <a:xfrm>
+            <a:off x="4434840" y="2224672"/>
+            <a:ext cx="4526280" cy="900000"/>
+          </a:xfrm>
+          <a:prstGeom prst="rect">
+            <a:avLst/>
+          </a:prstGeom>
+          <a:solidFill>
+            <a:srgbClr val="12041A"/>
+          </a:solidFill>
+          <a:ln w="25400">
+            <a:solidFill>
+              <a:srgbClr val="8844CC"/>
+            </a:solidFill>
+          </a:ln>
+        </p:spPr>
+        <p:style>
+          <a:lnRef idx="1">
+            <a:schemeClr val="accent1"/>
+          </a:lnRef>
+          <a:fillRef idx="3">
+            <a:schemeClr val="accent1"/>
+          </a:fillRef>
+          <a:effectRef idx="2">
+            <a:schemeClr val="accent1"/>
+          </a:effectRef>
+          <a:fontRef idx="minor">
+            <a:schemeClr val="lt1"/>
+          </a:fontRef>
+        </p:style>
+        <p:txBody>
+          <a:bodyPr rtlCol="0" anchor="ctr"/>
+          <a:lstStyle/>
+          <a:p>
+            <a:pPr algn="ctr"/>
+          </a:p>
+        </p:txBody>
+      </p:sp>
+      <p:sp>
+        <p:nvSpPr>
+          <p:cNvPr id="32" name="TextBox 31"/>
+          <p:cNvSpPr txBox="1"/>
+          <p:nvPr/>
+        </p:nvSpPr>
+        <p:spPr>
+          <a:xfrm>
+            <a:off x="4514840" y="2279672"/>
+            <a:ext cx="4386280" cy="290000"/>
+          </a:xfrm>
+          <a:prstGeom prst="rect">
+            <a:avLst/>
+          </a:prstGeom>
+          <a:noFill/>
+        </p:spPr>
+        <p:txBody>
+          <a:bodyPr wrap="square">
+            <a:spAutoFit/>
+          </a:bodyPr>
+          <a:lstStyle/>
+          <a:p>
+            <a:pPr algn="l"/>
+            <a:r>
+              <a:rPr sz="1100" b="1">
+                <a:solidFill>
+                  <a:srgbClr val="8844CC"/>
+                </a:solidFill>
+                <a:latin typeface="游明朝"/>
+              </a:rPr>
+              <a:t>紫エフェクト → 裏連戦</a:t>
+            </a:r>
+          </a:p>
+        </p:txBody>
+      </p:sp>
+      <p:sp>
+        <p:nvSpPr>
+          <p:cNvPr id="33" name="TextBox 32"/>
+          <p:cNvSpPr txBox="1"/>
+          <p:nvPr/>
+        </p:nvSpPr>
+        <p:spPr>
+          <a:xfrm>
+            <a:off x="4514840" y="2574672"/>
+            <a:ext cx="4386280" cy="500000"/>
+          </a:xfrm>
+          <a:prstGeom prst="rect">
+            <a:avLst/>
+          </a:prstGeom>
+          <a:noFill/>
+        </p:spPr>
+        <p:txBody>
+          <a:bodyPr wrap="square">
+            <a:spAutoFit/>
+          </a:bodyPr>
+          <a:lstStyle/>
+          <a:p>
+            <a:pPr algn="l"/>
+            <a:r>
+              <a:rPr sz="900" b="0">
+                <a:solidFill>
+                  <a:srgbClr val="E0E8F0"/>
+                </a:solidFill>
+                <a:latin typeface="メイリオ"/>
+              </a:rPr>
+              <a:t>初回勝利がほぼ確定。
+以降は約80%ループで継続。
+「最強の横道」で大量報酬に期待。</a:t>
+            </a:r>
+          </a:p>
+        </p:txBody>
+      </p:sp>
+      <p:sp>
+        <p:nvSpPr>
+          <p:cNvPr id="34" name="Rectangle 33"/>
+          <p:cNvSpPr/>
+          <p:nvPr/>
+        </p:nvSpPr>
+        <p:spPr>
+          <a:xfrm>
+            <a:off x="4434840" y="3204672"/>
+            <a:ext cx="4526280" cy="620000"/>
+          </a:xfrm>
+          <a:prstGeom prst="rect">
+            <a:avLst/>
+          </a:prstGeom>
+          <a:solidFill>
+            <a:srgbClr val="061020"/>
+          </a:solidFill>
+          <a:ln w="15240">
+            <a:solidFill>
+              <a:srgbClr val="00C0C8"/>
+            </a:solidFill>
+          </a:ln>
+        </p:spPr>
+        <p:style>
+          <a:lnRef idx="1">
+            <a:schemeClr val="accent1"/>
+          </a:lnRef>
+          <a:fillRef idx="3">
+            <a:schemeClr val="accent1"/>
+          </a:fillRef>
+          <a:effectRef idx="2">
+            <a:schemeClr val="accent1"/>
+          </a:effectRef>
+          <a:fontRef idx="minor">
+            <a:schemeClr val="lt1"/>
+          </a:fontRef>
+        </p:style>
+        <p:txBody>
+          <a:bodyPr rtlCol="0" anchor="ctr"/>
+          <a:lstStyle/>
+          <a:p>
+            <a:pPr algn="ctr"/>
+          </a:p>
+        </p:txBody>
+      </p:sp>
+      <p:sp>
+        <p:nvSpPr>
+          <p:cNvPr id="35" name="TextBox 34"/>
+          <p:cNvSpPr txBox="1"/>
+          <p:nvPr/>
+        </p:nvSpPr>
+        <p:spPr>
+          <a:xfrm>
+            <a:off x="4504840" y="3254672"/>
+            <a:ext cx="4426280" cy="270000"/>
+          </a:xfrm>
+          <a:prstGeom prst="rect">
+            <a:avLst/>
+          </a:prstGeom>
+          <a:noFill/>
+        </p:spPr>
+        <p:txBody>
+          <a:bodyPr wrap="square">
+            <a:spAutoFit/>
+          </a:bodyPr>
+          <a:lstStyle/>
+          <a:p>
+            <a:pPr algn="l"/>
+            <a:r>
+              <a:rPr sz="950" b="1">
+                <a:solidFill>
+                  <a:srgbClr val="00C0C8"/>
+                </a:solidFill>
+                <a:latin typeface="游明朝"/>
+              </a:rPr>
+              <a:t>設計上の役割</a:t>
+            </a:r>
+          </a:p>
+        </p:txBody>
+      </p:sp>
+      <p:sp>
+        <p:nvSpPr>
+          <p:cNvPr id="36" name="TextBox 35"/>
+          <p:cNvSpPr txBox="1"/>
+          <p:nvPr/>
+        </p:nvSpPr>
+        <p:spPr>
+          <a:xfrm>
+            <a:off x="4504840" y="3514672"/>
+            <a:ext cx="4426280" cy="270000"/>
           </a:xfrm>
           <a:prstGeom prst="rect">
             <a:avLst/>
@@ -14137,22 +14622,65 @@
                 </a:solidFill>
                 <a:latin typeface="メイリオ"/>
               </a:rPr>
-              <a:t>ランプ・セリフ・画面を組み合わせて
-「このシナリオかも」と絞り込む楽しさ</a:t>
-            </a:r>
-          </a:p>
-        </p:txBody>
-      </p:sp>
-      <p:sp>
-        <p:nvSpPr>
-          <p:cNvPr id="42" name="Rectangle 41"/>
+              <a:t>SGバトル（継続判定）とは独立した「横道」として
+AT中に予期せず割り込む。驚きと興奮が打感を豊かにする。</a:t>
+            </a:r>
+          </a:p>
+        </p:txBody>
+      </p:sp>
+      <p:sp>
+        <p:nvSpPr>
+          <p:cNvPr id="37" name="Rectangle 36"/>
           <p:cNvSpPr/>
           <p:nvPr/>
         </p:nvSpPr>
         <p:spPr>
           <a:xfrm>
-            <a:off x="6199632" y="1835160"/>
-            <a:ext cx="50000" cy="510000"/>
+            <a:off x="182880" y="4041648"/>
+            <a:ext cx="8778240" cy="580000"/>
+          </a:xfrm>
+          <a:prstGeom prst="rect">
+            <a:avLst/>
+          </a:prstGeom>
+          <a:solidFill>
+            <a:srgbClr val="061020"/>
+          </a:solidFill>
+          <a:ln>
+            <a:noFill/>
+          </a:ln>
+        </p:spPr>
+        <p:style>
+          <a:lnRef idx="1">
+            <a:schemeClr val="accent1"/>
+          </a:lnRef>
+          <a:fillRef idx="3">
+            <a:schemeClr val="accent1"/>
+          </a:fillRef>
+          <a:effectRef idx="2">
+            <a:schemeClr val="accent1"/>
+          </a:effectRef>
+          <a:fontRef idx="minor">
+            <a:schemeClr val="lt1"/>
+          </a:fontRef>
+        </p:style>
+        <p:txBody>
+          <a:bodyPr rtlCol="0" anchor="ctr"/>
+          <a:lstStyle/>
+          <a:p>
+            <a:pPr algn="ctr"/>
+          </a:p>
+        </p:txBody>
+      </p:sp>
+      <p:sp>
+        <p:nvSpPr>
+          <p:cNvPr id="38" name="Rectangle 37"/>
+          <p:cNvSpPr/>
+          <p:nvPr/>
+        </p:nvSpPr>
+        <p:spPr>
+          <a:xfrm>
+            <a:off x="182880" y="4041648"/>
+            <a:ext cx="55000" cy="580000"/>
           </a:xfrm>
           <a:prstGeom prst="rect">
             <a:avLst/>
@@ -14188,462 +14716,77 @@
       </p:sp>
       <p:sp>
         <p:nvSpPr>
-          <p:cNvPr id="43" name="TextBox 42"/>
-          <p:cNvSpPr txBox="1"/>
-          <p:nvPr/>
-        </p:nvSpPr>
-        <p:spPr>
-          <a:xfrm>
-            <a:off x="6382512" y="1860160"/>
-            <a:ext cx="2423160" cy="240000"/>
-          </a:xfrm>
-          <a:prstGeom prst="rect">
-            <a:avLst/>
-          </a:prstGeom>
-          <a:noFill/>
-        </p:spPr>
-        <p:txBody>
-          <a:bodyPr wrap="square">
-            <a:spAutoFit/>
-          </a:bodyPr>
-          <a:lstStyle/>
-          <a:p>
-            <a:pPr algn="l"/>
-            <a:r>
-              <a:rPr sz="900" b="1">
+          <p:cNvPr id="39" name="TextBox 38"/>
+          <p:cNvSpPr txBox="1"/>
+          <p:nvPr/>
+        </p:nvSpPr>
+        <p:spPr>
+          <a:xfrm>
+            <a:off x="411480" y="4087368"/>
+            <a:ext cx="8321040" cy="250000"/>
+          </a:xfrm>
+          <a:prstGeom prst="rect">
+            <a:avLst/>
+          </a:prstGeom>
+          <a:noFill/>
+        </p:spPr>
+        <p:txBody>
+          <a:bodyPr wrap="square">
+            <a:spAutoFit/>
+          </a:bodyPr>
+          <a:lstStyle/>
+          <a:p>
+            <a:pPr algn="l"/>
+            <a:r>
+              <a:rPr sz="950" b="1">
                 <a:solidFill>
                   <a:srgbClr val="FFA020"/>
                 </a:solidFill>
                 <a:latin typeface="メイリオ"/>
               </a:rPr>
-              <a:t>期待感の変化</a:t>
-            </a:r>
-          </a:p>
-        </p:txBody>
-      </p:sp>
-      <p:sp>
-        <p:nvSpPr>
-          <p:cNvPr id="44" name="TextBox 43"/>
-          <p:cNvSpPr txBox="1"/>
-          <p:nvPr/>
-        </p:nvSpPr>
-        <p:spPr>
-          <a:xfrm>
-            <a:off x="6382512" y="2100160"/>
-            <a:ext cx="2423160" cy="260000"/>
-          </a:xfrm>
-          <a:prstGeom prst="rect">
-            <a:avLst/>
-          </a:prstGeom>
-          <a:noFill/>
-        </p:spPr>
-        <p:txBody>
-          <a:bodyPr wrap="square">
-            <a:spAutoFit/>
-          </a:bodyPr>
-          <a:lstStyle/>
-          <a:p>
-            <a:pPr algn="l"/>
-            <a:r>
-              <a:rPr sz="800" b="0">
+              <a:t>ぶっちぎりバトルの価値：SGバトルとは別軸の自力感で、AT消化が「ただ待つ」にならない</a:t>
+            </a:r>
+          </a:p>
+        </p:txBody>
+      </p:sp>
+      <p:sp>
+        <p:nvSpPr>
+          <p:cNvPr id="40" name="TextBox 39"/>
+          <p:cNvSpPr txBox="1"/>
+          <p:nvPr/>
+        </p:nvSpPr>
+        <p:spPr>
+          <a:xfrm>
+            <a:off x="411480" y="4389120"/>
+            <a:ext cx="8321040" cy="250000"/>
+          </a:xfrm>
+          <a:prstGeom prst="rect">
+            <a:avLst/>
+          </a:prstGeom>
+          <a:noFill/>
+        </p:spPr>
+        <p:txBody>
+          <a:bodyPr wrap="square">
+            <a:spAutoFit/>
+          </a:bodyPr>
+          <a:lstStyle/>
+          <a:p>
+            <a:pPr algn="l"/>
+            <a:r>
+              <a:rPr sz="850" b="0">
                 <a:solidFill>
                   <a:srgbClr val="E0E8F0"/>
                 </a:solidFill>
                 <a:latin typeface="メイリオ"/>
               </a:rPr>
-              <a:t>序盤に赤ランプが出た瞬間
-「今日は行ける」という確信が芽生える</a:t>
-            </a:r>
-          </a:p>
-        </p:txBody>
-      </p:sp>
-      <p:sp>
-        <p:nvSpPr>
-          <p:cNvPr id="45" name="Rectangle 44"/>
-          <p:cNvSpPr/>
-          <p:nvPr/>
-        </p:nvSpPr>
-        <p:spPr>
-          <a:xfrm>
-            <a:off x="6199632" y="2390160"/>
-            <a:ext cx="50000" cy="510000"/>
-          </a:xfrm>
-          <a:prstGeom prst="rect">
-            <a:avLst/>
-          </a:prstGeom>
-          <a:solidFill>
-            <a:srgbClr val="00C0C8"/>
-          </a:solidFill>
-          <a:ln>
-            <a:noFill/>
-          </a:ln>
-        </p:spPr>
-        <p:style>
-          <a:lnRef idx="1">
-            <a:schemeClr val="accent1"/>
-          </a:lnRef>
-          <a:fillRef idx="3">
-            <a:schemeClr val="accent1"/>
-          </a:fillRef>
-          <a:effectRef idx="2">
-            <a:schemeClr val="accent1"/>
-          </a:effectRef>
-          <a:fontRef idx="minor">
-            <a:schemeClr val="lt1"/>
-          </a:fontRef>
-        </p:style>
-        <p:txBody>
-          <a:bodyPr rtlCol="0" anchor="ctr"/>
-          <a:lstStyle/>
-          <a:p>
-            <a:pPr algn="ctr"/>
-          </a:p>
-        </p:txBody>
-      </p:sp>
-      <p:sp>
-        <p:nvSpPr>
-          <p:cNvPr id="46" name="TextBox 45"/>
-          <p:cNvSpPr txBox="1"/>
-          <p:nvPr/>
-        </p:nvSpPr>
-        <p:spPr>
-          <a:xfrm>
-            <a:off x="6382512" y="2415160"/>
-            <a:ext cx="2423160" cy="240000"/>
-          </a:xfrm>
-          <a:prstGeom prst="rect">
-            <a:avLst/>
-          </a:prstGeom>
-          <a:noFill/>
-        </p:spPr>
-        <p:txBody>
-          <a:bodyPr wrap="square">
-            <a:spAutoFit/>
-          </a:bodyPr>
-          <a:lstStyle/>
-          <a:p>
-            <a:pPr algn="l"/>
-            <a:r>
-              <a:rPr sz="900" b="1">
-                <a:solidFill>
-                  <a:srgbClr val="00C0C8"/>
-                </a:solidFill>
-                <a:latin typeface="メイリオ"/>
-              </a:rPr>
-              <a:t>仲間との共有</a:t>
-            </a:r>
-          </a:p>
-        </p:txBody>
-      </p:sp>
-      <p:sp>
-        <p:nvSpPr>
-          <p:cNvPr id="47" name="TextBox 46"/>
-          <p:cNvSpPr txBox="1"/>
-          <p:nvPr/>
-        </p:nvSpPr>
-        <p:spPr>
-          <a:xfrm>
-            <a:off x="6382512" y="2655160"/>
-            <a:ext cx="2423160" cy="260000"/>
-          </a:xfrm>
-          <a:prstGeom prst="rect">
-            <a:avLst/>
-          </a:prstGeom>
-          <a:noFill/>
-        </p:spPr>
-        <p:txBody>
-          <a:bodyPr wrap="square">
-            <a:spAutoFit/>
-          </a:bodyPr>
-          <a:lstStyle/>
-          <a:p>
-            <a:pPr algn="l"/>
-            <a:r>
-              <a:rPr sz="800" b="0">
-                <a:solidFill>
-                  <a:srgbClr val="E0E8F0"/>
-                </a:solidFill>
-                <a:latin typeface="メイリオ"/>
-              </a:rPr>
-              <a:t>「艇王引いたから8セット行くわ」という
-ホールでの会話・コミュニティ形成</a:t>
-            </a:r>
-          </a:p>
-        </p:txBody>
-      </p:sp>
-      <p:sp>
-        <p:nvSpPr>
-          <p:cNvPr id="48" name="Rectangle 47"/>
-          <p:cNvSpPr/>
-          <p:nvPr/>
-        </p:nvSpPr>
-        <p:spPr>
-          <a:xfrm>
-            <a:off x="6199632" y="2945160"/>
-            <a:ext cx="50000" cy="510000"/>
-          </a:xfrm>
-          <a:prstGeom prst="rect">
-            <a:avLst/>
-          </a:prstGeom>
-          <a:solidFill>
-            <a:srgbClr val="22CC66"/>
-          </a:solidFill>
-          <a:ln>
-            <a:noFill/>
-          </a:ln>
-        </p:spPr>
-        <p:style>
-          <a:lnRef idx="1">
-            <a:schemeClr val="accent1"/>
-          </a:lnRef>
-          <a:fillRef idx="3">
-            <a:schemeClr val="accent1"/>
-          </a:fillRef>
-          <a:effectRef idx="2">
-            <a:schemeClr val="accent1"/>
-          </a:effectRef>
-          <a:fontRef idx="minor">
-            <a:schemeClr val="lt1"/>
-          </a:fontRef>
-        </p:style>
-        <p:txBody>
-          <a:bodyPr rtlCol="0" anchor="ctr"/>
-          <a:lstStyle/>
-          <a:p>
-            <a:pPr algn="ctr"/>
-          </a:p>
-        </p:txBody>
-      </p:sp>
-      <p:sp>
-        <p:nvSpPr>
-          <p:cNvPr id="49" name="TextBox 48"/>
-          <p:cNvSpPr txBox="1"/>
-          <p:nvPr/>
-        </p:nvSpPr>
-        <p:spPr>
-          <a:xfrm>
-            <a:off x="6382512" y="2970160"/>
-            <a:ext cx="2423160" cy="240000"/>
-          </a:xfrm>
-          <a:prstGeom prst="rect">
-            <a:avLst/>
-          </a:prstGeom>
-          <a:noFill/>
-        </p:spPr>
-        <p:txBody>
-          <a:bodyPr wrap="square">
-            <a:spAutoFit/>
-          </a:bodyPr>
-          <a:lstStyle/>
-          <a:p>
-            <a:pPr algn="l"/>
-            <a:r>
-              <a:rPr sz="900" b="1">
-                <a:solidFill>
-                  <a:srgbClr val="22CC66"/>
-                </a:solidFill>
-                <a:latin typeface="メイリオ"/>
-              </a:rPr>
-              <a:t>公平な抽選設計</a:t>
-            </a:r>
-          </a:p>
-        </p:txBody>
-      </p:sp>
-      <p:sp>
-        <p:nvSpPr>
-          <p:cNvPr id="50" name="TextBox 49"/>
-          <p:cNvSpPr txBox="1"/>
-          <p:nvPr/>
-        </p:nvSpPr>
-        <p:spPr>
-          <a:xfrm>
-            <a:off x="6382512" y="3210160"/>
-            <a:ext cx="2423160" cy="260000"/>
-          </a:xfrm>
-          <a:prstGeom prst="rect">
-            <a:avLst/>
-          </a:prstGeom>
-          <a:noFill/>
-        </p:spPr>
-        <p:txBody>
-          <a:bodyPr wrap="square">
-            <a:spAutoFit/>
-          </a:bodyPr>
-          <a:lstStyle/>
-          <a:p>
-            <a:pPr algn="l"/>
-            <a:r>
-              <a:rPr sz="800" b="0">
-                <a:solidFill>
-                  <a:srgbClr val="E0E8F0"/>
-                </a:solidFill>
-                <a:latin typeface="メイリオ"/>
-              </a:rPr>
-              <a:t>ハマり度・設定に依存しないため
-「今回のAT」だけに集中できる</a:t>
-            </a:r>
-          </a:p>
-        </p:txBody>
-      </p:sp>
-      <p:sp>
-        <p:nvSpPr>
-          <p:cNvPr id="51" name="Rectangle 50"/>
-          <p:cNvSpPr/>
-          <p:nvPr/>
-        </p:nvSpPr>
-        <p:spPr>
-          <a:xfrm>
-            <a:off x="182880" y="4069080"/>
-            <a:ext cx="8778240" cy="560000"/>
-          </a:xfrm>
-          <a:prstGeom prst="rect">
-            <a:avLst/>
-          </a:prstGeom>
-          <a:solidFill>
-            <a:srgbClr val="061020"/>
-          </a:solidFill>
-          <a:ln>
-            <a:noFill/>
-          </a:ln>
-        </p:spPr>
-        <p:style>
-          <a:lnRef idx="1">
-            <a:schemeClr val="accent1"/>
-          </a:lnRef>
-          <a:fillRef idx="3">
-            <a:schemeClr val="accent1"/>
-          </a:fillRef>
-          <a:effectRef idx="2">
-            <a:schemeClr val="accent1"/>
-          </a:effectRef>
-          <a:fontRef idx="minor">
-            <a:schemeClr val="lt1"/>
-          </a:fontRef>
-        </p:style>
-        <p:txBody>
-          <a:bodyPr rtlCol="0" anchor="ctr"/>
-          <a:lstStyle/>
-          <a:p>
-            <a:pPr algn="ctr"/>
-          </a:p>
-        </p:txBody>
-      </p:sp>
-      <p:sp>
-        <p:nvSpPr>
-          <p:cNvPr id="52" name="Rectangle 51"/>
-          <p:cNvSpPr/>
-          <p:nvPr/>
-        </p:nvSpPr>
-        <p:spPr>
-          <a:xfrm>
-            <a:off x="182880" y="4069080"/>
-            <a:ext cx="55000" cy="560000"/>
-          </a:xfrm>
-          <a:prstGeom prst="rect">
-            <a:avLst/>
-          </a:prstGeom>
-          <a:solidFill>
-            <a:srgbClr val="00C0C8"/>
-          </a:solidFill>
-          <a:ln>
-            <a:noFill/>
-          </a:ln>
-        </p:spPr>
-        <p:style>
-          <a:lnRef idx="1">
-            <a:schemeClr val="accent1"/>
-          </a:lnRef>
-          <a:fillRef idx="3">
-            <a:schemeClr val="accent1"/>
-          </a:fillRef>
-          <a:effectRef idx="2">
-            <a:schemeClr val="accent1"/>
-          </a:effectRef>
-          <a:fontRef idx="minor">
-            <a:schemeClr val="lt1"/>
-          </a:fontRef>
-        </p:style>
-        <p:txBody>
-          <a:bodyPr rtlCol="0" anchor="ctr"/>
-          <a:lstStyle/>
-          <a:p>
-            <a:pPr algn="ctr"/>
-          </a:p>
-        </p:txBody>
-      </p:sp>
-      <p:sp>
-        <p:nvSpPr>
-          <p:cNvPr id="53" name="TextBox 52"/>
-          <p:cNvSpPr txBox="1"/>
-          <p:nvPr/>
-        </p:nvSpPr>
-        <p:spPr>
-          <a:xfrm>
-            <a:off x="411480" y="4114800"/>
-            <a:ext cx="8321040" cy="250000"/>
-          </a:xfrm>
-          <a:prstGeom prst="rect">
-            <a:avLst/>
-          </a:prstGeom>
-          <a:noFill/>
-        </p:spPr>
-        <p:txBody>
-          <a:bodyPr wrap="square">
-            <a:spAutoFit/>
-          </a:bodyPr>
-          <a:lstStyle/>
-          <a:p>
-            <a:pPr algn="l"/>
-            <a:r>
-              <a:rPr sz="950" b="1">
-                <a:solidFill>
-                  <a:srgbClr val="00C0C8"/>
-                </a:solidFill>
-                <a:latin typeface="メイリオ"/>
-              </a:rPr>
-              <a:t>示唆設計の本質：「完全に分からないが、ある程度読める」絶妙なバランス</a:t>
-            </a:r>
-          </a:p>
-        </p:txBody>
-      </p:sp>
-      <p:sp>
-        <p:nvSpPr>
-          <p:cNvPr id="54" name="TextBox 53"/>
-          <p:cNvSpPr txBox="1"/>
-          <p:nvPr/>
-        </p:nvSpPr>
-        <p:spPr>
-          <a:xfrm>
-            <a:off x="411480" y="4416552"/>
-            <a:ext cx="8321040" cy="250000"/>
-          </a:xfrm>
-          <a:prstGeom prst="rect">
-            <a:avLst/>
-          </a:prstGeom>
-          <a:noFill/>
-        </p:spPr>
-        <p:txBody>
-          <a:bodyPr wrap="square">
-            <a:spAutoFit/>
-          </a:bodyPr>
-          <a:lstStyle/>
-          <a:p>
-            <a:pPr algn="l"/>
-            <a:r>
-              <a:rPr sz="850" b="0">
-                <a:solidFill>
-                  <a:srgbClr val="E0E8F0"/>
-                </a:solidFill>
-                <a:latin typeface="メイリオ"/>
-              </a:rPr>
-              <a:t>全部わかると緊張感がなくなり、全く分からないと虚無感が残る。その中間に「楽しい」がある。</a:t>
-            </a:r>
-          </a:p>
-        </p:txBody>
-      </p:sp>
-      <p:sp>
-        <p:nvSpPr>
-          <p:cNvPr id="55" name="TextBox 54"/>
+              <a:t>裏連戦（紫）を引いた瞬間「今日は何かある」という直感が生まれる。シナリオ推測とは別軸の興奮。</a:t>
+            </a:r>
+          </a:p>
+        </p:txBody>
+      </p:sp>
+      <p:sp>
+        <p:nvSpPr>
+          <p:cNvPr id="41" name="TextBox 40"/>
           <p:cNvSpPr txBox="1"/>
           <p:nvPr/>
         </p:nvSpPr>
@@ -14834,7 +14977,7 @@
                 </a:solidFill>
                 <a:latin typeface="游明朝"/>
               </a:rPr>
-              <a:t>上位AT「青島SG」  ──  純増4.0枚 × 継続率83% の頂点体験</a:t>
+              <a:t>シナリオ × 示唆システム  ──  読み解く楽しさが遊技の深みになる</a:t>
             </a:r>
           </a:p>
         </p:txBody>
@@ -14848,7 +14991,7 @@
         <p:spPr>
           <a:xfrm>
             <a:off x="182880" y="777240"/>
-            <a:ext cx="4114800" cy="3154680"/>
+            <a:ext cx="2743200" cy="3200400"/>
           </a:xfrm>
           <a:prstGeom prst="rect">
             <a:avLst/>
@@ -14858,7 +15001,7 @@
           </a:solidFill>
           <a:ln w="19050">
             <a:solidFill>
-              <a:srgbClr val="007AFF"/>
+              <a:srgbClr val="00C0C8"/>
             </a:solidFill>
           </a:ln>
         </p:spPr>
@@ -14893,28 +15036,28 @@
         <p:spPr>
           <a:xfrm>
             <a:off x="292608" y="841248"/>
-            <a:ext cx="3840480" cy="320000"/>
-          </a:xfrm>
-          <a:prstGeom prst="rect">
-            <a:avLst/>
-          </a:prstGeom>
-          <a:noFill/>
-        </p:spPr>
-        <p:txBody>
-          <a:bodyPr wrap="square">
-            <a:spAutoFit/>
-          </a:bodyPr>
-          <a:lstStyle/>
-          <a:p>
-            <a:pPr algn="l"/>
-            <a:r>
-              <a:rPr sz="1100" b="1">
-                <a:solidFill>
-                  <a:srgbClr val="007AFF"/>
+            <a:ext cx="2514600" cy="320000"/>
+          </a:xfrm>
+          <a:prstGeom prst="rect">
+            <a:avLst/>
+          </a:prstGeom>
+          <a:noFill/>
+        </p:spPr>
+        <p:txBody>
+          <a:bodyPr wrap="square">
+            <a:spAutoFit/>
+          </a:bodyPr>
+          <a:lstStyle/>
+          <a:p>
+            <a:pPr algn="l"/>
+            <a:r>
+              <a:rPr sz="1000" b="1">
+                <a:solidFill>
+                  <a:srgbClr val="00C0C8"/>
                 </a:solidFill>
                 <a:latin typeface="游明朝"/>
               </a:rPr>
-              <a:t>青島SG スペック</a:t>
+              <a:t>フレームランプ示唆（6色）</a:t>
             </a:r>
           </a:p>
         </p:txBody>
@@ -14927,14 +15070,14 @@
         </p:nvSpPr>
         <p:spPr>
           <a:xfrm>
-            <a:off x="256032" y="1261872"/>
-            <a:ext cx="3950208" cy="330000"/>
+            <a:off x="320040" y="1280160"/>
+            <a:ext cx="340000" cy="290000"/>
           </a:xfrm>
           <a:prstGeom prst="rect">
             <a:avLst/>
           </a:prstGeom>
           <a:solidFill>
-            <a:srgbClr val="061428"/>
+            <a:srgbClr val="FFFFFF"/>
           </a:solidFill>
           <a:ln>
             <a:noFill/>
@@ -14970,43 +15113,8 @@
         </p:nvSpPr>
         <p:spPr>
           <a:xfrm>
-            <a:off x="347472" y="1289872"/>
-            <a:ext cx="1188720" cy="260000"/>
-          </a:xfrm>
-          <a:prstGeom prst="rect">
-            <a:avLst/>
-          </a:prstGeom>
-          <a:noFill/>
-        </p:spPr>
-        <p:txBody>
-          <a:bodyPr wrap="none">
-            <a:spAutoFit/>
-          </a:bodyPr>
-          <a:lstStyle/>
-          <a:p>
-            <a:pPr algn="l"/>
-            <a:r>
-              <a:rPr sz="850" b="1">
-                <a:solidFill>
-                  <a:srgbClr val="14887C"/>
-                </a:solidFill>
-                <a:latin typeface="メイリオ"/>
-              </a:rPr>
-              <a:t>純増</a:t>
-            </a:r>
-          </a:p>
-        </p:txBody>
-      </p:sp>
-      <p:sp>
-        <p:nvSpPr>
-          <p:cNvPr id="10" name="TextBox 9"/>
-          <p:cNvSpPr txBox="1"/>
-          <p:nvPr/>
-        </p:nvSpPr>
-        <p:spPr>
-          <a:xfrm>
-            <a:off x="1581912" y="1289872"/>
-            <a:ext cx="2514600" cy="280000"/>
+            <a:off x="777240" y="1310160"/>
+            <a:ext cx="1783080" cy="240000"/>
           </a:xfrm>
           <a:prstGeom prst="rect">
             <a:avLst/>
@@ -15023,31 +15131,31 @@
             <a:r>
               <a:rPr sz="850" b="0">
                 <a:solidFill>
-                  <a:srgbClr val="FFD700"/>
-                </a:solidFill>
-                <a:latin typeface="メイリオ"/>
-              </a:rPr>
-              <a:t>約4.0枚/G（SG RUSHの1.6倍）</a:t>
-            </a:r>
-          </a:p>
-        </p:txBody>
-      </p:sp>
-      <p:sp>
-        <p:nvSpPr>
-          <p:cNvPr id="11" name="Rectangle 10"/>
+                  <a:srgbClr val="E0E8F0"/>
+                </a:solidFill>
+                <a:latin typeface="メイリオ"/>
+              </a:rPr>
+              <a:t>白  ──  継続率：低</a:t>
+            </a:r>
+          </a:p>
+        </p:txBody>
+      </p:sp>
+      <p:sp>
+        <p:nvSpPr>
+          <p:cNvPr id="10" name="Rectangle 9"/>
           <p:cNvSpPr/>
           <p:nvPr/>
         </p:nvSpPr>
         <p:spPr>
           <a:xfrm>
-            <a:off x="256032" y="1601872"/>
-            <a:ext cx="3950208" cy="330000"/>
+            <a:off x="320040" y="1600160"/>
+            <a:ext cx="340000" cy="290000"/>
           </a:xfrm>
           <a:prstGeom prst="rect">
             <a:avLst/>
           </a:prstGeom>
           <a:solidFill>
-            <a:srgbClr val="0A182E"/>
+            <a:srgbClr val="4488FF"/>
           </a:solidFill>
           <a:ln>
             <a:noFill/>
@@ -15077,49 +15185,14 @@
       </p:sp>
       <p:sp>
         <p:nvSpPr>
-          <p:cNvPr id="12" name="TextBox 11"/>
-          <p:cNvSpPr txBox="1"/>
-          <p:nvPr/>
-        </p:nvSpPr>
-        <p:spPr>
-          <a:xfrm>
-            <a:off x="347472" y="1629872"/>
-            <a:ext cx="1188720" cy="260000"/>
-          </a:xfrm>
-          <a:prstGeom prst="rect">
-            <a:avLst/>
-          </a:prstGeom>
-          <a:noFill/>
-        </p:spPr>
-        <p:txBody>
-          <a:bodyPr wrap="none">
-            <a:spAutoFit/>
-          </a:bodyPr>
-          <a:lstStyle/>
-          <a:p>
-            <a:pPr algn="l"/>
-            <a:r>
-              <a:rPr sz="850" b="1">
-                <a:solidFill>
-                  <a:srgbClr val="14887C"/>
-                </a:solidFill>
-                <a:latin typeface="メイリオ"/>
-              </a:rPr>
-              <a:t>継続率</a:t>
-            </a:r>
-          </a:p>
-        </p:txBody>
-      </p:sp>
-      <p:sp>
-        <p:nvSpPr>
-          <p:cNvPr id="13" name="TextBox 12"/>
-          <p:cNvSpPr txBox="1"/>
-          <p:nvPr/>
-        </p:nvSpPr>
-        <p:spPr>
-          <a:xfrm>
-            <a:off x="1581912" y="1629872"/>
-            <a:ext cx="2514600" cy="280000"/>
+          <p:cNvPr id="11" name="TextBox 10"/>
+          <p:cNvSpPr txBox="1"/>
+          <p:nvPr/>
+        </p:nvSpPr>
+        <p:spPr>
+          <a:xfrm>
+            <a:off x="777240" y="1630160"/>
+            <a:ext cx="1783080" cy="240000"/>
           </a:xfrm>
           <a:prstGeom prst="rect">
             <a:avLst/>
@@ -15136,31 +15209,31 @@
             <a:r>
               <a:rPr sz="850" b="0">
                 <a:solidFill>
-                  <a:srgbClr val="007AFF"/>
-                </a:solidFill>
-                <a:latin typeface="メイリオ"/>
-              </a:rPr>
-              <a:t>約75%（Vストック込みで約83%）</a:t>
-            </a:r>
-          </a:p>
-        </p:txBody>
-      </p:sp>
-      <p:sp>
-        <p:nvSpPr>
-          <p:cNvPr id="14" name="Rectangle 13"/>
+                  <a:srgbClr val="E0E8F0"/>
+                </a:solidFill>
+                <a:latin typeface="メイリオ"/>
+              </a:rPr>
+              <a:t>青  ──  継続率：やや低</a:t>
+            </a:r>
+          </a:p>
+        </p:txBody>
+      </p:sp>
+      <p:sp>
+        <p:nvSpPr>
+          <p:cNvPr id="12" name="Rectangle 11"/>
           <p:cNvSpPr/>
           <p:nvPr/>
         </p:nvSpPr>
         <p:spPr>
           <a:xfrm>
-            <a:off x="256032" y="1941872"/>
-            <a:ext cx="3950208" cy="330000"/>
+            <a:off x="320040" y="1920160"/>
+            <a:ext cx="340000" cy="290000"/>
           </a:xfrm>
           <a:prstGeom prst="rect">
             <a:avLst/>
           </a:prstGeom>
           <a:solidFill>
-            <a:srgbClr val="061428"/>
+            <a:srgbClr val="FFEE00"/>
           </a:solidFill>
           <a:ln>
             <a:noFill/>
@@ -15190,49 +15263,14 @@
       </p:sp>
       <p:sp>
         <p:nvSpPr>
-          <p:cNvPr id="15" name="TextBox 14"/>
-          <p:cNvSpPr txBox="1"/>
-          <p:nvPr/>
-        </p:nvSpPr>
-        <p:spPr>
-          <a:xfrm>
-            <a:off x="347472" y="1969872"/>
-            <a:ext cx="1188720" cy="260000"/>
-          </a:xfrm>
-          <a:prstGeom prst="rect">
-            <a:avLst/>
-          </a:prstGeom>
-          <a:noFill/>
-        </p:spPr>
-        <p:txBody>
-          <a:bodyPr wrap="none">
-            <a:spAutoFit/>
-          </a:bodyPr>
-          <a:lstStyle/>
-          <a:p>
-            <a:pPr algn="l"/>
-            <a:r>
-              <a:rPr sz="850" b="1">
-                <a:solidFill>
-                  <a:srgbClr val="14887C"/>
-                </a:solidFill>
-                <a:latin typeface="メイリオ"/>
-              </a:rPr>
-              <a:t>突入経路</a:t>
-            </a:r>
-          </a:p>
-        </p:txBody>
-      </p:sp>
-      <p:sp>
-        <p:nvSpPr>
-          <p:cNvPr id="16" name="TextBox 15"/>
-          <p:cNvSpPr txBox="1"/>
-          <p:nvPr/>
-        </p:nvSpPr>
-        <p:spPr>
-          <a:xfrm>
-            <a:off x="1581912" y="1969872"/>
-            <a:ext cx="2514600" cy="280000"/>
+          <p:cNvPr id="13" name="TextBox 12"/>
+          <p:cNvSpPr txBox="1"/>
+          <p:nvPr/>
+        </p:nvSpPr>
+        <p:spPr>
+          <a:xfrm>
+            <a:off x="777240" y="1950160"/>
+            <a:ext cx="1783080" cy="240000"/>
           </a:xfrm>
           <a:prstGeom prst="rect">
             <a:avLst/>
@@ -15253,27 +15291,27 @@
                 </a:solidFill>
                 <a:latin typeface="メイリオ"/>
               </a:rPr>
-              <a:t>グランドスラム後の青島VS波多野勝利</a:t>
-            </a:r>
-          </a:p>
-        </p:txBody>
-      </p:sp>
-      <p:sp>
-        <p:nvSpPr>
-          <p:cNvPr id="17" name="Rectangle 16"/>
+              <a:t>黄  ──  継続率：中</a:t>
+            </a:r>
+          </a:p>
+        </p:txBody>
+      </p:sp>
+      <p:sp>
+        <p:nvSpPr>
+          <p:cNvPr id="14" name="Rectangle 13"/>
           <p:cNvSpPr/>
           <p:nvPr/>
         </p:nvSpPr>
         <p:spPr>
           <a:xfrm>
-            <a:off x="256032" y="2281872"/>
-            <a:ext cx="3950208" cy="330000"/>
+            <a:off x="320040" y="2240160"/>
+            <a:ext cx="340000" cy="290000"/>
           </a:xfrm>
           <a:prstGeom prst="rect">
             <a:avLst/>
           </a:prstGeom>
           <a:solidFill>
-            <a:srgbClr val="0A182E"/>
+            <a:srgbClr val="22CC44"/>
           </a:solidFill>
           <a:ln>
             <a:noFill/>
@@ -15303,49 +15341,14 @@
       </p:sp>
       <p:sp>
         <p:nvSpPr>
-          <p:cNvPr id="18" name="TextBox 17"/>
-          <p:cNvSpPr txBox="1"/>
-          <p:nvPr/>
-        </p:nvSpPr>
-        <p:spPr>
-          <a:xfrm>
-            <a:off x="347472" y="2309872"/>
-            <a:ext cx="1188720" cy="260000"/>
-          </a:xfrm>
-          <a:prstGeom prst="rect">
-            <a:avLst/>
-          </a:prstGeom>
-          <a:noFill/>
-        </p:spPr>
-        <p:txBody>
-          <a:bodyPr wrap="none">
-            <a:spAutoFit/>
-          </a:bodyPr>
-          <a:lstStyle/>
-          <a:p>
-            <a:pPr algn="l"/>
-            <a:r>
-              <a:rPr sz="850" b="1">
-                <a:solidFill>
-                  <a:srgbClr val="14887C"/>
-                </a:solidFill>
-                <a:latin typeface="メイリオ"/>
-              </a:rPr>
-              <a:t>構成</a:t>
-            </a:r>
-          </a:p>
-        </p:txBody>
-      </p:sp>
-      <p:sp>
-        <p:nvSpPr>
-          <p:cNvPr id="19" name="TextBox 18"/>
-          <p:cNvSpPr txBox="1"/>
-          <p:nvPr/>
-        </p:nvSpPr>
-        <p:spPr>
-          <a:xfrm>
-            <a:off x="1581912" y="2309872"/>
-            <a:ext cx="2514600" cy="280000"/>
+          <p:cNvPr id="15" name="TextBox 14"/>
+          <p:cNvSpPr txBox="1"/>
+          <p:nvPr/>
+        </p:nvSpPr>
+        <p:spPr>
+          <a:xfrm>
+            <a:off x="777240" y="2270160"/>
+            <a:ext cx="1783080" cy="240000"/>
           </a:xfrm>
           <a:prstGeom prst="rect">
             <a:avLst/>
@@ -15366,27 +15369,27 @@
                 </a:solidFill>
                 <a:latin typeface="メイリオ"/>
               </a:rPr>
-              <a:t>青島周回パート＋青島VS波多野の2部</a:t>
-            </a:r>
-          </a:p>
-        </p:txBody>
-      </p:sp>
-      <p:sp>
-        <p:nvSpPr>
-          <p:cNvPr id="20" name="Rectangle 19"/>
+              <a:t>緑  ──  継続率：やや高</a:t>
+            </a:r>
+          </a:p>
+        </p:txBody>
+      </p:sp>
+      <p:sp>
+        <p:nvSpPr>
+          <p:cNvPr id="16" name="Rectangle 15"/>
           <p:cNvSpPr/>
           <p:nvPr/>
         </p:nvSpPr>
         <p:spPr>
           <a:xfrm>
-            <a:off x="256032" y="2621872"/>
-            <a:ext cx="3950208" cy="620000"/>
+            <a:off x="320040" y="2560160"/>
+            <a:ext cx="340000" cy="290000"/>
           </a:xfrm>
           <a:prstGeom prst="rect">
             <a:avLst/>
           </a:prstGeom>
           <a:solidFill>
-            <a:srgbClr val="061428"/>
+            <a:srgbClr val="CC2222"/>
           </a:solidFill>
           <a:ln>
             <a:noFill/>
@@ -15416,49 +15419,14 @@
       </p:sp>
       <p:sp>
         <p:nvSpPr>
-          <p:cNvPr id="21" name="TextBox 20"/>
-          <p:cNvSpPr txBox="1"/>
-          <p:nvPr/>
-        </p:nvSpPr>
-        <p:spPr>
-          <a:xfrm>
-            <a:off x="347472" y="2649872"/>
-            <a:ext cx="1188720" cy="260000"/>
-          </a:xfrm>
-          <a:prstGeom prst="rect">
-            <a:avLst/>
-          </a:prstGeom>
-          <a:noFill/>
-        </p:spPr>
-        <p:txBody>
-          <a:bodyPr wrap="none">
-            <a:spAutoFit/>
-          </a:bodyPr>
-          <a:lstStyle/>
-          <a:p>
-            <a:pPr algn="l"/>
-            <a:r>
-              <a:rPr sz="850" b="1">
-                <a:solidFill>
-                  <a:srgbClr val="14887C"/>
-                </a:solidFill>
-                <a:latin typeface="メイリオ"/>
-              </a:rPr>
-              <a:t>上乗せ</a:t>
-            </a:r>
-          </a:p>
-        </p:txBody>
-      </p:sp>
-      <p:sp>
-        <p:nvSpPr>
-          <p:cNvPr id="22" name="TextBox 21"/>
-          <p:cNvSpPr txBox="1"/>
-          <p:nvPr/>
-        </p:nvSpPr>
-        <p:spPr>
-          <a:xfrm>
-            <a:off x="1581912" y="2649872"/>
-            <a:ext cx="2514600" cy="560000"/>
+          <p:cNvPr id="17" name="TextBox 16"/>
+          <p:cNvSpPr txBox="1"/>
+          <p:nvPr/>
+        </p:nvSpPr>
+        <p:spPr>
+          <a:xfrm>
+            <a:off x="777240" y="2590160"/>
+            <a:ext cx="1783080" cy="240000"/>
           </a:xfrm>
           <a:prstGeom prst="rect">
             <a:avLst/>
@@ -15475,26 +15443,103 @@
             <a:r>
               <a:rPr sz="850" b="0">
                 <a:solidFill>
-                  <a:srgbClr val="FFA020"/>
-                </a:solidFill>
-                <a:latin typeface="メイリオ"/>
-              </a:rPr>
-              <a:t>V揃い単：次セット継続濃厚
-  V揃いダブル：継続＋100〜300G上乗せ</a:t>
-            </a:r>
-          </a:p>
-        </p:txBody>
-      </p:sp>
-      <p:sp>
-        <p:nvSpPr>
-          <p:cNvPr id="23" name="Rectangle 22"/>
+                  <a:srgbClr val="E0E8F0"/>
+                </a:solidFill>
+                <a:latin typeface="メイリオ"/>
+              </a:rPr>
+              <a:t>赤  ──  継続率：高</a:t>
+            </a:r>
+          </a:p>
+        </p:txBody>
+      </p:sp>
+      <p:sp>
+        <p:nvSpPr>
+          <p:cNvPr id="18" name="Rectangle 17"/>
           <p:cNvSpPr/>
           <p:nvPr/>
         </p:nvSpPr>
         <p:spPr>
           <a:xfrm>
-            <a:off x="4480560" y="777240"/>
-            <a:ext cx="4480560" cy="3154680"/>
+            <a:off x="320040" y="2880160"/>
+            <a:ext cx="340000" cy="290000"/>
+          </a:xfrm>
+          <a:prstGeom prst="rect">
+            <a:avLst/>
+          </a:prstGeom>
+          <a:solidFill>
+            <a:srgbClr val="FF80FF"/>
+          </a:solidFill>
+          <a:ln>
+            <a:noFill/>
+          </a:ln>
+        </p:spPr>
+        <p:style>
+          <a:lnRef idx="1">
+            <a:schemeClr val="accent1"/>
+          </a:lnRef>
+          <a:fillRef idx="3">
+            <a:schemeClr val="accent1"/>
+          </a:fillRef>
+          <a:effectRef idx="2">
+            <a:schemeClr val="accent1"/>
+          </a:effectRef>
+          <a:fontRef idx="minor">
+            <a:schemeClr val="lt1"/>
+          </a:fontRef>
+        </p:style>
+        <p:txBody>
+          <a:bodyPr rtlCol="0" anchor="ctr"/>
+          <a:lstStyle/>
+          <a:p>
+            <a:pPr algn="ctr"/>
+          </a:p>
+        </p:txBody>
+      </p:sp>
+      <p:sp>
+        <p:nvSpPr>
+          <p:cNvPr id="19" name="TextBox 18"/>
+          <p:cNvSpPr txBox="1"/>
+          <p:nvPr/>
+        </p:nvSpPr>
+        <p:spPr>
+          <a:xfrm>
+            <a:off x="777240" y="2910160"/>
+            <a:ext cx="1783080" cy="240000"/>
+          </a:xfrm>
+          <a:prstGeom prst="rect">
+            <a:avLst/>
+          </a:prstGeom>
+          <a:noFill/>
+        </p:spPr>
+        <p:txBody>
+          <a:bodyPr wrap="square">
+            <a:spAutoFit/>
+          </a:bodyPr>
+          <a:lstStyle/>
+          <a:p>
+            <a:pPr algn="l"/>
+            <a:r>
+              <a:rPr sz="850" b="0">
+                <a:solidFill>
+                  <a:srgbClr val="E0E8F0"/>
+                </a:solidFill>
+                <a:latin typeface="メイリオ"/>
+              </a:rPr>
+              <a:t>虹  ──  最高（艇王濃厚）</a:t>
+            </a:r>
+          </a:p>
+        </p:txBody>
+      </p:sp>
+      <p:sp>
+        <p:nvSpPr>
+          <p:cNvPr id="20" name="Rectangle 19"/>
+          <p:cNvSpPr/>
+          <p:nvPr/>
+        </p:nvSpPr>
+        <p:spPr>
+          <a:xfrm>
+            <a:off x="3108960" y="777240"/>
+            <a:ext cx="2834640" cy="3200400"/>
           </a:xfrm>
           <a:prstGeom prst="rect">
             <a:avLst/>
@@ -15532,60 +15577,58 @@
       </p:sp>
       <p:sp>
         <p:nvSpPr>
-          <p:cNvPr id="24" name="TextBox 23"/>
-          <p:cNvSpPr txBox="1"/>
-          <p:nvPr/>
-        </p:nvSpPr>
-        <p:spPr>
-          <a:xfrm>
-            <a:off x="4590288" y="841248"/>
-            <a:ext cx="4206240" cy="320000"/>
-          </a:xfrm>
-          <a:prstGeom prst="rect">
-            <a:avLst/>
-          </a:prstGeom>
-          <a:noFill/>
-        </p:spPr>
-        <p:txBody>
-          <a:bodyPr wrap="square">
-            <a:spAutoFit/>
-          </a:bodyPr>
-          <a:lstStyle/>
-          <a:p>
-            <a:pPr algn="l"/>
-            <a:r>
-              <a:rPr sz="1100" b="1">
+          <p:cNvPr id="21" name="TextBox 20"/>
+          <p:cNvSpPr txBox="1"/>
+          <p:nvPr/>
+        </p:nvSpPr>
+        <p:spPr>
+          <a:xfrm>
+            <a:off x="3218688" y="841248"/>
+            <a:ext cx="2606040" cy="320000"/>
+          </a:xfrm>
+          <a:prstGeom prst="rect">
+            <a:avLst/>
+          </a:prstGeom>
+          <a:noFill/>
+        </p:spPr>
+        <p:txBody>
+          <a:bodyPr wrap="square">
+            <a:spAutoFit/>
+          </a:bodyPr>
+          <a:lstStyle/>
+          <a:p>
+            <a:pPr algn="l"/>
+            <a:r>
+              <a:rPr sz="1000" b="1">
                 <a:solidFill>
                   <a:srgbClr val="FFA020"/>
                 </a:solidFill>
                 <a:latin typeface="游明朝"/>
               </a:rPr>
-              <a:t>特化ゾーン「温泉モード」＆突入の価値</a:t>
-            </a:r>
-          </a:p>
-        </p:txBody>
-      </p:sp>
-      <p:sp>
-        <p:nvSpPr>
-          <p:cNvPr id="25" name="Rectangle 24"/>
+              <a:t>サブ液晶・セリフ示唆</a:t>
+            </a:r>
+          </a:p>
+        </p:txBody>
+      </p:sp>
+      <p:sp>
+        <p:nvSpPr>
+          <p:cNvPr id="22" name="Rectangle 21"/>
           <p:cNvSpPr/>
           <p:nvPr/>
         </p:nvSpPr>
         <p:spPr>
           <a:xfrm>
-            <a:off x="4645152" y="1261872"/>
-            <a:ext cx="4242816" cy="840000"/>
+            <a:off x="3182112" y="1280160"/>
+            <a:ext cx="2688336" cy="320000"/>
           </a:xfrm>
           <a:prstGeom prst="rect">
             <a:avLst/>
           </a:prstGeom>
           <a:solidFill>
-            <a:srgbClr val="101806"/>
+            <a:srgbClr val="101206"/>
           </a:solidFill>
-          <a:ln w="12700">
-            <a:solidFill>
-              <a:srgbClr val="FFA020"/>
-            </a:solidFill>
+          <a:ln>
+            <a:noFill/>
           </a:ln>
         </p:spPr>
         <p:style>
@@ -15612,97 +15655,93 @@
       </p:sp>
       <p:sp>
         <p:nvSpPr>
-          <p:cNvPr id="26" name="TextBox 25"/>
-          <p:cNvSpPr txBox="1"/>
-          <p:nvPr/>
-        </p:nvSpPr>
-        <p:spPr>
-          <a:xfrm>
-            <a:off x="4754880" y="1316736"/>
-            <a:ext cx="3931920" cy="280000"/>
-          </a:xfrm>
-          <a:prstGeom prst="rect">
-            <a:avLst/>
-          </a:prstGeom>
-          <a:noFill/>
-        </p:spPr>
-        <p:txBody>
-          <a:bodyPr wrap="square">
-            <a:spAutoFit/>
-          </a:bodyPr>
-          <a:lstStyle/>
-          <a:p>
-            <a:pPr algn="l"/>
-            <a:r>
-              <a:rPr sz="1000" b="1">
+          <p:cNvPr id="23" name="TextBox 22"/>
+          <p:cNvSpPr txBox="1"/>
+          <p:nvPr/>
+        </p:nvSpPr>
+        <p:spPr>
+          <a:xfrm>
+            <a:off x="3273552" y="1305160"/>
+            <a:ext cx="1143000" cy="275000"/>
+          </a:xfrm>
+          <a:prstGeom prst="rect">
+            <a:avLst/>
+          </a:prstGeom>
+          <a:noFill/>
+        </p:spPr>
+        <p:txBody>
+          <a:bodyPr wrap="none">
+            <a:spAutoFit/>
+          </a:bodyPr>
+          <a:lstStyle/>
+          <a:p>
+            <a:pPr algn="l"/>
+            <a:r>
+              <a:rPr sz="800" b="1">
                 <a:solidFill>
                   <a:srgbClr val="FFA020"/>
                 </a:solidFill>
                 <a:latin typeface="メイリオ"/>
               </a:rPr>
-              <a:t>温泉モード（30G）</a:t>
-            </a:r>
-          </a:p>
-        </p:txBody>
-      </p:sp>
-      <p:sp>
-        <p:nvSpPr>
-          <p:cNvPr id="27" name="TextBox 26"/>
-          <p:cNvSpPr txBox="1"/>
-          <p:nvPr/>
-        </p:nvSpPr>
-        <p:spPr>
-          <a:xfrm>
-            <a:off x="4754880" y="1627632"/>
-            <a:ext cx="3931920" cy="400000"/>
-          </a:xfrm>
-          <a:prstGeom prst="rect">
-            <a:avLst/>
-          </a:prstGeom>
-          <a:noFill/>
-        </p:spPr>
-        <p:txBody>
-          <a:bodyPr wrap="square">
-            <a:spAutoFit/>
-          </a:bodyPr>
-          <a:lstStyle/>
-          <a:p>
-            <a:pPr algn="l"/>
-            <a:r>
-              <a:rPr sz="850" b="0">
+              <a:t>登場キャラ</a:t>
+            </a:r>
+          </a:p>
+        </p:txBody>
+      </p:sp>
+      <p:sp>
+        <p:nvSpPr>
+          <p:cNvPr id="24" name="TextBox 23"/>
+          <p:cNvSpPr txBox="1"/>
+          <p:nvPr/>
+        </p:nvSpPr>
+        <p:spPr>
+          <a:xfrm>
+            <a:off x="4462272" y="1305160"/>
+            <a:ext cx="1325880" cy="275000"/>
+          </a:xfrm>
+          <a:prstGeom prst="rect">
+            <a:avLst/>
+          </a:prstGeom>
+          <a:noFill/>
+        </p:spPr>
+        <p:txBody>
+          <a:bodyPr wrap="square">
+            <a:spAutoFit/>
+          </a:bodyPr>
+          <a:lstStyle/>
+          <a:p>
+            <a:pPr algn="l"/>
+            <a:r>
+              <a:rPr sz="750" b="0">
                 <a:solidFill>
                   <a:srgbClr val="E0E8F0"/>
                 </a:solidFill>
                 <a:latin typeface="メイリオ"/>
               </a:rPr>
-              <a:t>青島VS波多野レース中のレア役成立で突入
-消化中はゲーム数上乗せ抽選が強化
-弱チェリー・強チャンス役で上乗せ確定</a:t>
-            </a:r>
-          </a:p>
-        </p:txBody>
-      </p:sp>
-      <p:sp>
-        <p:nvSpPr>
-          <p:cNvPr id="28" name="Rectangle 27"/>
+              <a:t>キャラによってモード・シナリオ段階を示唆</a:t>
+            </a:r>
+          </a:p>
+        </p:txBody>
+      </p:sp>
+      <p:sp>
+        <p:nvSpPr>
+          <p:cNvPr id="25" name="Rectangle 24"/>
           <p:cNvSpPr/>
           <p:nvPr/>
         </p:nvSpPr>
         <p:spPr>
           <a:xfrm>
-            <a:off x="4645152" y="2176272"/>
-            <a:ext cx="4242816" cy="1700000"/>
+            <a:off x="3182112" y="1612160"/>
+            <a:ext cx="2688336" cy="320000"/>
           </a:xfrm>
           <a:prstGeom prst="rect">
             <a:avLst/>
           </a:prstGeom>
           <a:solidFill>
-            <a:srgbClr val="000A22"/>
+            <a:srgbClr val="141608"/>
           </a:solidFill>
-          <a:ln w="12700">
-            <a:solidFill>
-              <a:srgbClr val="007AFF"/>
-            </a:solidFill>
+          <a:ln>
+            <a:noFill/>
           </a:ln>
         </p:spPr>
         <p:style>
@@ -15729,95 +15768,90 @@
       </p:sp>
       <p:sp>
         <p:nvSpPr>
-          <p:cNvPr id="29" name="TextBox 28"/>
-          <p:cNvSpPr txBox="1"/>
-          <p:nvPr/>
-        </p:nvSpPr>
-        <p:spPr>
-          <a:xfrm>
-            <a:off x="4754880" y="2231136"/>
-            <a:ext cx="3931920" cy="280000"/>
-          </a:xfrm>
-          <a:prstGeom prst="rect">
-            <a:avLst/>
-          </a:prstGeom>
-          <a:noFill/>
-        </p:spPr>
-        <p:txBody>
-          <a:bodyPr wrap="square">
-            <a:spAutoFit/>
-          </a:bodyPr>
-          <a:lstStyle/>
-          <a:p>
-            <a:pPr algn="l"/>
-            <a:r>
-              <a:rPr sz="1000" b="1">
-                <a:solidFill>
-                  <a:srgbClr val="007AFF"/>
-                </a:solidFill>
-                <a:latin typeface="メイリオ"/>
-              </a:rPr>
-              <a:t>青島SGに突入する意味</a:t>
-            </a:r>
-          </a:p>
-        </p:txBody>
-      </p:sp>
-      <p:sp>
-        <p:nvSpPr>
-          <p:cNvPr id="30" name="TextBox 29"/>
-          <p:cNvSpPr txBox="1"/>
-          <p:nvPr/>
-        </p:nvSpPr>
-        <p:spPr>
-          <a:xfrm>
-            <a:off x="4754880" y="2542032"/>
-            <a:ext cx="3931920" cy="1300000"/>
-          </a:xfrm>
-          <a:prstGeom prst="rect">
-            <a:avLst/>
-          </a:prstGeom>
-          <a:noFill/>
-        </p:spPr>
-        <p:txBody>
-          <a:bodyPr wrap="square">
-            <a:spAutoFit/>
-          </a:bodyPr>
-          <a:lstStyle/>
-          <a:p>
-            <a:pPr algn="l"/>
-            <a:r>
-              <a:rPr sz="850" b="0">
+          <p:cNvPr id="26" name="TextBox 25"/>
+          <p:cNvSpPr txBox="1"/>
+          <p:nvPr/>
+        </p:nvSpPr>
+        <p:spPr>
+          <a:xfrm>
+            <a:off x="3273552" y="1637160"/>
+            <a:ext cx="1143000" cy="275000"/>
+          </a:xfrm>
+          <a:prstGeom prst="rect">
+            <a:avLst/>
+          </a:prstGeom>
+          <a:noFill/>
+        </p:spPr>
+        <p:txBody>
+          <a:bodyPr wrap="none">
+            <a:spAutoFit/>
+          </a:bodyPr>
+          <a:lstStyle/>
+          <a:p>
+            <a:pPr algn="l"/>
+            <a:r>
+              <a:rPr sz="800" b="1">
+                <a:solidFill>
+                  <a:srgbClr val="FFA020"/>
+                </a:solidFill>
+                <a:latin typeface="メイリオ"/>
+              </a:rPr>
+              <a:t>セリフ内容</a:t>
+            </a:r>
+          </a:p>
+        </p:txBody>
+      </p:sp>
+      <p:sp>
+        <p:nvSpPr>
+          <p:cNvPr id="27" name="TextBox 26"/>
+          <p:cNvSpPr txBox="1"/>
+          <p:nvPr/>
+        </p:nvSpPr>
+        <p:spPr>
+          <a:xfrm>
+            <a:off x="4462272" y="1637160"/>
+            <a:ext cx="1325880" cy="275000"/>
+          </a:xfrm>
+          <a:prstGeom prst="rect">
+            <a:avLst/>
+          </a:prstGeom>
+          <a:noFill/>
+        </p:spPr>
+        <p:txBody>
+          <a:bodyPr wrap="square">
+            <a:spAutoFit/>
+          </a:bodyPr>
+          <a:lstStyle/>
+          <a:p>
+            <a:pPr algn="l"/>
+            <a:r>
+              <a:rPr sz="750" b="0">
                 <a:solidFill>
                   <a:srgbClr val="E0E8F0"/>
                 </a:solidFill>
                 <a:latin typeface="メイリオ"/>
               </a:rPr>
-              <a:t>SG RUSH（純増2.5枚）との差は1.5枚/G
-100G消化で+150枚の差が生まれる
-継続率83%で長く続く×純増4.0枚
-= 1日の大台を作る唯一のルート
-「グランドスラム達成 → 青島SG」が
-来店時の最大目標として機能する</a:t>
-            </a:r>
-          </a:p>
-        </p:txBody>
-      </p:sp>
-      <p:sp>
-        <p:nvSpPr>
-          <p:cNvPr id="31" name="Rectangle 30"/>
+              <a:t>ポジティブ/ネガティブで継続率の高低を示唆</a:t>
+            </a:r>
+          </a:p>
+        </p:txBody>
+      </p:sp>
+      <p:sp>
+        <p:nvSpPr>
+          <p:cNvPr id="28" name="Rectangle 27"/>
           <p:cNvSpPr/>
           <p:nvPr/>
         </p:nvSpPr>
         <p:spPr>
           <a:xfrm>
-            <a:off x="182880" y="4041648"/>
-            <a:ext cx="8778240" cy="580000"/>
+            <a:off x="3182112" y="1944160"/>
+            <a:ext cx="2688336" cy="320000"/>
           </a:xfrm>
           <a:prstGeom prst="rect">
             <a:avLst/>
           </a:prstGeom>
           <a:solidFill>
-            <a:srgbClr val="001024"/>
+            <a:srgbClr val="101206"/>
           </a:solidFill>
           <a:ln>
             <a:noFill/>
@@ -15847,20 +15881,90 @@
       </p:sp>
       <p:sp>
         <p:nvSpPr>
-          <p:cNvPr id="32" name="Rectangle 31"/>
+          <p:cNvPr id="29" name="TextBox 28"/>
+          <p:cNvSpPr txBox="1"/>
+          <p:nvPr/>
+        </p:nvSpPr>
+        <p:spPr>
+          <a:xfrm>
+            <a:off x="3273552" y="1969160"/>
+            <a:ext cx="1143000" cy="275000"/>
+          </a:xfrm>
+          <a:prstGeom prst="rect">
+            <a:avLst/>
+          </a:prstGeom>
+          <a:noFill/>
+        </p:spPr>
+        <p:txBody>
+          <a:bodyPr wrap="none">
+            <a:spAutoFit/>
+          </a:bodyPr>
+          <a:lstStyle/>
+          <a:p>
+            <a:pPr algn="l"/>
+            <a:r>
+              <a:rPr sz="800" b="1">
+                <a:solidFill>
+                  <a:srgbClr val="FFA020"/>
+                </a:solidFill>
+                <a:latin typeface="メイリオ"/>
+              </a:rPr>
+              <a:t>ランプ×セリフ</a:t>
+            </a:r>
+          </a:p>
+        </p:txBody>
+      </p:sp>
+      <p:sp>
+        <p:nvSpPr>
+          <p:cNvPr id="30" name="TextBox 29"/>
+          <p:cNvSpPr txBox="1"/>
+          <p:nvPr/>
+        </p:nvSpPr>
+        <p:spPr>
+          <a:xfrm>
+            <a:off x="4462272" y="1969160"/>
+            <a:ext cx="1325880" cy="275000"/>
+          </a:xfrm>
+          <a:prstGeom prst="rect">
+            <a:avLst/>
+          </a:prstGeom>
+          <a:noFill/>
+        </p:spPr>
+        <p:txBody>
+          <a:bodyPr wrap="square">
+            <a:spAutoFit/>
+          </a:bodyPr>
+          <a:lstStyle/>
+          <a:p>
+            <a:pPr algn="l"/>
+            <a:r>
+              <a:rPr sz="750" b="0">
+                <a:solidFill>
+                  <a:srgbClr val="E0E8F0"/>
+                </a:solidFill>
+                <a:latin typeface="メイリオ"/>
+              </a:rPr>
+              <a:t>組み合わせで絞り込み精度が上がる</a:t>
+            </a:r>
+          </a:p>
+        </p:txBody>
+      </p:sp>
+      <p:sp>
+        <p:nvSpPr>
+          <p:cNvPr id="31" name="Rectangle 30"/>
           <p:cNvSpPr/>
           <p:nvPr/>
         </p:nvSpPr>
         <p:spPr>
           <a:xfrm>
-            <a:off x="182880" y="4041648"/>
-            <a:ext cx="55000" cy="580000"/>
+            <a:off x="3182112" y="2276160"/>
+            <a:ext cx="2688336" cy="320000"/>
           </a:xfrm>
           <a:prstGeom prst="rect">
             <a:avLst/>
           </a:prstGeom>
           <a:solidFill>
-            <a:srgbClr val="007AFF"/>
+            <a:srgbClr val="141608"/>
           </a:solidFill>
           <a:ln>
             <a:noFill/>
@@ -15890,13 +15994,818 @@
       </p:sp>
       <p:sp>
         <p:nvSpPr>
+          <p:cNvPr id="32" name="TextBox 31"/>
+          <p:cNvSpPr txBox="1"/>
+          <p:nvPr/>
+        </p:nvSpPr>
+        <p:spPr>
+          <a:xfrm>
+            <a:off x="3273552" y="2301160"/>
+            <a:ext cx="1143000" cy="275000"/>
+          </a:xfrm>
+          <a:prstGeom prst="rect">
+            <a:avLst/>
+          </a:prstGeom>
+          <a:noFill/>
+        </p:spPr>
+        <p:txBody>
+          <a:bodyPr wrap="none">
+            <a:spAutoFit/>
+          </a:bodyPr>
+          <a:lstStyle/>
+          <a:p>
+            <a:pPr algn="l"/>
+            <a:r>
+              <a:rPr sz="800" b="1">
+                <a:solidFill>
+                  <a:srgbClr val="FFA020"/>
+                </a:solidFill>
+                <a:latin typeface="メイリオ"/>
+              </a:rPr>
+              <a:t>ラウンド開始画面</a:t>
+            </a:r>
+          </a:p>
+        </p:txBody>
+      </p:sp>
+      <p:sp>
+        <p:nvSpPr>
           <p:cNvPr id="33" name="TextBox 32"/>
           <p:cNvSpPr txBox="1"/>
           <p:nvPr/>
         </p:nvSpPr>
         <p:spPr>
           <a:xfrm>
-            <a:off x="411480" y="4087368"/>
+            <a:off x="4462272" y="2301160"/>
+            <a:ext cx="1325880" cy="275000"/>
+          </a:xfrm>
+          <a:prstGeom prst="rect">
+            <a:avLst/>
+          </a:prstGeom>
+          <a:noFill/>
+        </p:spPr>
+        <p:txBody>
+          <a:bodyPr wrap="square">
+            <a:spAutoFit/>
+          </a:bodyPr>
+          <a:lstStyle/>
+          <a:p>
+            <a:pPr algn="l"/>
+            <a:r>
+              <a:rPr sz="750" b="0">
+                <a:solidFill>
+                  <a:srgbClr val="E0E8F0"/>
+                </a:solidFill>
+                <a:latin typeface="メイリオ"/>
+              </a:rPr>
+              <a:t>シナリオ段階と設定を直接示唆する要素</a:t>
+            </a:r>
+          </a:p>
+        </p:txBody>
+      </p:sp>
+      <p:sp>
+        <p:nvSpPr>
+          <p:cNvPr id="34" name="Rectangle 33"/>
+          <p:cNvSpPr/>
+          <p:nvPr/>
+        </p:nvSpPr>
+        <p:spPr>
+          <a:xfrm>
+            <a:off x="3182112" y="2608160"/>
+            <a:ext cx="2688336" cy="320000"/>
+          </a:xfrm>
+          <a:prstGeom prst="rect">
+            <a:avLst/>
+          </a:prstGeom>
+          <a:solidFill>
+            <a:srgbClr val="101206"/>
+          </a:solidFill>
+          <a:ln>
+            <a:noFill/>
+          </a:ln>
+        </p:spPr>
+        <p:style>
+          <a:lnRef idx="1">
+            <a:schemeClr val="accent1"/>
+          </a:lnRef>
+          <a:fillRef idx="3">
+            <a:schemeClr val="accent1"/>
+          </a:fillRef>
+          <a:effectRef idx="2">
+            <a:schemeClr val="accent1"/>
+          </a:effectRef>
+          <a:fontRef idx="minor">
+            <a:schemeClr val="lt1"/>
+          </a:fontRef>
+        </p:style>
+        <p:txBody>
+          <a:bodyPr rtlCol="0" anchor="ctr"/>
+          <a:lstStyle/>
+          <a:p>
+            <a:pPr algn="ctr"/>
+          </a:p>
+        </p:txBody>
+      </p:sp>
+      <p:sp>
+        <p:nvSpPr>
+          <p:cNvPr id="35" name="TextBox 34"/>
+          <p:cNvSpPr txBox="1"/>
+          <p:nvPr/>
+        </p:nvSpPr>
+        <p:spPr>
+          <a:xfrm>
+            <a:off x="3273552" y="2633160"/>
+            <a:ext cx="1143000" cy="275000"/>
+          </a:xfrm>
+          <a:prstGeom prst="rect">
+            <a:avLst/>
+          </a:prstGeom>
+          <a:noFill/>
+        </p:spPr>
+        <p:txBody>
+          <a:bodyPr wrap="none">
+            <a:spAutoFit/>
+          </a:bodyPr>
+          <a:lstStyle/>
+          <a:p>
+            <a:pPr algn="l"/>
+            <a:r>
+              <a:rPr sz="800" b="1">
+                <a:solidFill>
+                  <a:srgbClr val="FFA020"/>
+                </a:solidFill>
+                <a:latin typeface="メイリオ"/>
+              </a:rPr>
+              <a:t>第3停止タイミング</a:t>
+            </a:r>
+          </a:p>
+        </p:txBody>
+      </p:sp>
+      <p:sp>
+        <p:nvSpPr>
+          <p:cNvPr id="36" name="TextBox 35"/>
+          <p:cNvSpPr txBox="1"/>
+          <p:nvPr/>
+        </p:nvSpPr>
+        <p:spPr>
+          <a:xfrm>
+            <a:off x="4462272" y="2633160"/>
+            <a:ext cx="1325880" cy="275000"/>
+          </a:xfrm>
+          <a:prstGeom prst="rect">
+            <a:avLst/>
+          </a:prstGeom>
+          <a:noFill/>
+        </p:spPr>
+        <p:txBody>
+          <a:bodyPr wrap="square">
+            <a:spAutoFit/>
+          </a:bodyPr>
+          <a:lstStyle/>
+          <a:p>
+            <a:pPr algn="l"/>
+            <a:r>
+              <a:rPr sz="750" b="0">
+                <a:solidFill>
+                  <a:srgbClr val="E0E8F0"/>
+                </a:solidFill>
+                <a:latin typeface="メイリオ"/>
+              </a:rPr>
+              <a:t>第3停止を離す瞬間のカットインで確定示唆</a:t>
+            </a:r>
+          </a:p>
+        </p:txBody>
+      </p:sp>
+      <p:sp>
+        <p:nvSpPr>
+          <p:cNvPr id="37" name="Rectangle 36"/>
+          <p:cNvSpPr/>
+          <p:nvPr/>
+        </p:nvSpPr>
+        <p:spPr>
+          <a:xfrm>
+            <a:off x="6126480" y="777240"/>
+            <a:ext cx="2834640" cy="3200400"/>
+          </a:xfrm>
+          <a:prstGeom prst="rect">
+            <a:avLst/>
+          </a:prstGeom>
+          <a:solidFill>
+            <a:srgbClr val="0C142C"/>
+          </a:solidFill>
+          <a:ln w="19050">
+            <a:solidFill>
+              <a:srgbClr val="C8A840"/>
+            </a:solidFill>
+          </a:ln>
+        </p:spPr>
+        <p:style>
+          <a:lnRef idx="1">
+            <a:schemeClr val="accent1"/>
+          </a:lnRef>
+          <a:fillRef idx="3">
+            <a:schemeClr val="accent1"/>
+          </a:fillRef>
+          <a:effectRef idx="2">
+            <a:schemeClr val="accent1"/>
+          </a:effectRef>
+          <a:fontRef idx="minor">
+            <a:schemeClr val="lt1"/>
+          </a:fontRef>
+        </p:style>
+        <p:txBody>
+          <a:bodyPr rtlCol="0" anchor="ctr"/>
+          <a:lstStyle/>
+          <a:p>
+            <a:pPr algn="ctr"/>
+          </a:p>
+        </p:txBody>
+      </p:sp>
+      <p:sp>
+        <p:nvSpPr>
+          <p:cNvPr id="38" name="TextBox 37"/>
+          <p:cNvSpPr txBox="1"/>
+          <p:nvPr/>
+        </p:nvSpPr>
+        <p:spPr>
+          <a:xfrm>
+            <a:off x="6236208" y="841248"/>
+            <a:ext cx="2606040" cy="320000"/>
+          </a:xfrm>
+          <a:prstGeom prst="rect">
+            <a:avLst/>
+          </a:prstGeom>
+          <a:noFill/>
+        </p:spPr>
+        <p:txBody>
+          <a:bodyPr wrap="square">
+            <a:spAutoFit/>
+          </a:bodyPr>
+          <a:lstStyle/>
+          <a:p>
+            <a:pPr algn="l"/>
+            <a:r>
+              <a:rPr sz="1000" b="1">
+                <a:solidFill>
+                  <a:srgbClr val="C8A840"/>
+                </a:solidFill>
+                <a:latin typeface="游明朝"/>
+              </a:rPr>
+              <a:t>シナリオ推測の楽しさ</a:t>
+            </a:r>
+          </a:p>
+        </p:txBody>
+      </p:sp>
+      <p:sp>
+        <p:nvSpPr>
+          <p:cNvPr id="39" name="Rectangle 38"/>
+          <p:cNvSpPr/>
+          <p:nvPr/>
+        </p:nvSpPr>
+        <p:spPr>
+          <a:xfrm>
+            <a:off x="6199632" y="1280160"/>
+            <a:ext cx="50000" cy="510000"/>
+          </a:xfrm>
+          <a:prstGeom prst="rect">
+            <a:avLst/>
+          </a:prstGeom>
+          <a:solidFill>
+            <a:srgbClr val="C8A840"/>
+          </a:solidFill>
+          <a:ln>
+            <a:noFill/>
+          </a:ln>
+        </p:spPr>
+        <p:style>
+          <a:lnRef idx="1">
+            <a:schemeClr val="accent1"/>
+          </a:lnRef>
+          <a:fillRef idx="3">
+            <a:schemeClr val="accent1"/>
+          </a:fillRef>
+          <a:effectRef idx="2">
+            <a:schemeClr val="accent1"/>
+          </a:effectRef>
+          <a:fontRef idx="minor">
+            <a:schemeClr val="lt1"/>
+          </a:fontRef>
+        </p:style>
+        <p:txBody>
+          <a:bodyPr rtlCol="0" anchor="ctr"/>
+          <a:lstStyle/>
+          <a:p>
+            <a:pPr algn="ctr"/>
+          </a:p>
+        </p:txBody>
+      </p:sp>
+      <p:sp>
+        <p:nvSpPr>
+          <p:cNvPr id="40" name="TextBox 39"/>
+          <p:cNvSpPr txBox="1"/>
+          <p:nvPr/>
+        </p:nvSpPr>
+        <p:spPr>
+          <a:xfrm>
+            <a:off x="6382512" y="1305160"/>
+            <a:ext cx="2423160" cy="240000"/>
+          </a:xfrm>
+          <a:prstGeom prst="rect">
+            <a:avLst/>
+          </a:prstGeom>
+          <a:noFill/>
+        </p:spPr>
+        <p:txBody>
+          <a:bodyPr wrap="square">
+            <a:spAutoFit/>
+          </a:bodyPr>
+          <a:lstStyle/>
+          <a:p>
+            <a:pPr algn="l"/>
+            <a:r>
+              <a:rPr sz="900" b="1">
+                <a:solidFill>
+                  <a:srgbClr val="C8A840"/>
+                </a:solidFill>
+                <a:latin typeface="メイリオ"/>
+              </a:rPr>
+              <a:t>情報収集の喜び</a:t>
+            </a:r>
+          </a:p>
+        </p:txBody>
+      </p:sp>
+      <p:sp>
+        <p:nvSpPr>
+          <p:cNvPr id="41" name="TextBox 40"/>
+          <p:cNvSpPr txBox="1"/>
+          <p:nvPr/>
+        </p:nvSpPr>
+        <p:spPr>
+          <a:xfrm>
+            <a:off x="6382512" y="1545160"/>
+            <a:ext cx="2423160" cy="260000"/>
+          </a:xfrm>
+          <a:prstGeom prst="rect">
+            <a:avLst/>
+          </a:prstGeom>
+          <a:noFill/>
+        </p:spPr>
+        <p:txBody>
+          <a:bodyPr wrap="square">
+            <a:spAutoFit/>
+          </a:bodyPr>
+          <a:lstStyle/>
+          <a:p>
+            <a:pPr algn="l"/>
+            <a:r>
+              <a:rPr sz="800" b="0">
+                <a:solidFill>
+                  <a:srgbClr val="E0E8F0"/>
+                </a:solidFill>
+                <a:latin typeface="メイリオ"/>
+              </a:rPr>
+              <a:t>ランプ・セリフ・画面を組み合わせて
+「このシナリオかも」と絞り込む楽しさ</a:t>
+            </a:r>
+          </a:p>
+        </p:txBody>
+      </p:sp>
+      <p:sp>
+        <p:nvSpPr>
+          <p:cNvPr id="42" name="Rectangle 41"/>
+          <p:cNvSpPr/>
+          <p:nvPr/>
+        </p:nvSpPr>
+        <p:spPr>
+          <a:xfrm>
+            <a:off x="6199632" y="1835160"/>
+            <a:ext cx="50000" cy="510000"/>
+          </a:xfrm>
+          <a:prstGeom prst="rect">
+            <a:avLst/>
+          </a:prstGeom>
+          <a:solidFill>
+            <a:srgbClr val="FFA020"/>
+          </a:solidFill>
+          <a:ln>
+            <a:noFill/>
+          </a:ln>
+        </p:spPr>
+        <p:style>
+          <a:lnRef idx="1">
+            <a:schemeClr val="accent1"/>
+          </a:lnRef>
+          <a:fillRef idx="3">
+            <a:schemeClr val="accent1"/>
+          </a:fillRef>
+          <a:effectRef idx="2">
+            <a:schemeClr val="accent1"/>
+          </a:effectRef>
+          <a:fontRef idx="minor">
+            <a:schemeClr val="lt1"/>
+          </a:fontRef>
+        </p:style>
+        <p:txBody>
+          <a:bodyPr rtlCol="0" anchor="ctr"/>
+          <a:lstStyle/>
+          <a:p>
+            <a:pPr algn="ctr"/>
+          </a:p>
+        </p:txBody>
+      </p:sp>
+      <p:sp>
+        <p:nvSpPr>
+          <p:cNvPr id="43" name="TextBox 42"/>
+          <p:cNvSpPr txBox="1"/>
+          <p:nvPr/>
+        </p:nvSpPr>
+        <p:spPr>
+          <a:xfrm>
+            <a:off x="6382512" y="1860160"/>
+            <a:ext cx="2423160" cy="240000"/>
+          </a:xfrm>
+          <a:prstGeom prst="rect">
+            <a:avLst/>
+          </a:prstGeom>
+          <a:noFill/>
+        </p:spPr>
+        <p:txBody>
+          <a:bodyPr wrap="square">
+            <a:spAutoFit/>
+          </a:bodyPr>
+          <a:lstStyle/>
+          <a:p>
+            <a:pPr algn="l"/>
+            <a:r>
+              <a:rPr sz="900" b="1">
+                <a:solidFill>
+                  <a:srgbClr val="FFA020"/>
+                </a:solidFill>
+                <a:latin typeface="メイリオ"/>
+              </a:rPr>
+              <a:t>期待感の変化</a:t>
+            </a:r>
+          </a:p>
+        </p:txBody>
+      </p:sp>
+      <p:sp>
+        <p:nvSpPr>
+          <p:cNvPr id="44" name="TextBox 43"/>
+          <p:cNvSpPr txBox="1"/>
+          <p:nvPr/>
+        </p:nvSpPr>
+        <p:spPr>
+          <a:xfrm>
+            <a:off x="6382512" y="2100160"/>
+            <a:ext cx="2423160" cy="260000"/>
+          </a:xfrm>
+          <a:prstGeom prst="rect">
+            <a:avLst/>
+          </a:prstGeom>
+          <a:noFill/>
+        </p:spPr>
+        <p:txBody>
+          <a:bodyPr wrap="square">
+            <a:spAutoFit/>
+          </a:bodyPr>
+          <a:lstStyle/>
+          <a:p>
+            <a:pPr algn="l"/>
+            <a:r>
+              <a:rPr sz="800" b="0">
+                <a:solidFill>
+                  <a:srgbClr val="E0E8F0"/>
+                </a:solidFill>
+                <a:latin typeface="メイリオ"/>
+              </a:rPr>
+              <a:t>序盤に赤ランプが出た瞬間
+「今日は行ける」という確信が芽生える</a:t>
+            </a:r>
+          </a:p>
+        </p:txBody>
+      </p:sp>
+      <p:sp>
+        <p:nvSpPr>
+          <p:cNvPr id="45" name="Rectangle 44"/>
+          <p:cNvSpPr/>
+          <p:nvPr/>
+        </p:nvSpPr>
+        <p:spPr>
+          <a:xfrm>
+            <a:off x="6199632" y="2390160"/>
+            <a:ext cx="50000" cy="510000"/>
+          </a:xfrm>
+          <a:prstGeom prst="rect">
+            <a:avLst/>
+          </a:prstGeom>
+          <a:solidFill>
+            <a:srgbClr val="00C0C8"/>
+          </a:solidFill>
+          <a:ln>
+            <a:noFill/>
+          </a:ln>
+        </p:spPr>
+        <p:style>
+          <a:lnRef idx="1">
+            <a:schemeClr val="accent1"/>
+          </a:lnRef>
+          <a:fillRef idx="3">
+            <a:schemeClr val="accent1"/>
+          </a:fillRef>
+          <a:effectRef idx="2">
+            <a:schemeClr val="accent1"/>
+          </a:effectRef>
+          <a:fontRef idx="minor">
+            <a:schemeClr val="lt1"/>
+          </a:fontRef>
+        </p:style>
+        <p:txBody>
+          <a:bodyPr rtlCol="0" anchor="ctr"/>
+          <a:lstStyle/>
+          <a:p>
+            <a:pPr algn="ctr"/>
+          </a:p>
+        </p:txBody>
+      </p:sp>
+      <p:sp>
+        <p:nvSpPr>
+          <p:cNvPr id="46" name="TextBox 45"/>
+          <p:cNvSpPr txBox="1"/>
+          <p:nvPr/>
+        </p:nvSpPr>
+        <p:spPr>
+          <a:xfrm>
+            <a:off x="6382512" y="2415160"/>
+            <a:ext cx="2423160" cy="240000"/>
+          </a:xfrm>
+          <a:prstGeom prst="rect">
+            <a:avLst/>
+          </a:prstGeom>
+          <a:noFill/>
+        </p:spPr>
+        <p:txBody>
+          <a:bodyPr wrap="square">
+            <a:spAutoFit/>
+          </a:bodyPr>
+          <a:lstStyle/>
+          <a:p>
+            <a:pPr algn="l"/>
+            <a:r>
+              <a:rPr sz="900" b="1">
+                <a:solidFill>
+                  <a:srgbClr val="00C0C8"/>
+                </a:solidFill>
+                <a:latin typeface="メイリオ"/>
+              </a:rPr>
+              <a:t>仲間との共有</a:t>
+            </a:r>
+          </a:p>
+        </p:txBody>
+      </p:sp>
+      <p:sp>
+        <p:nvSpPr>
+          <p:cNvPr id="47" name="TextBox 46"/>
+          <p:cNvSpPr txBox="1"/>
+          <p:nvPr/>
+        </p:nvSpPr>
+        <p:spPr>
+          <a:xfrm>
+            <a:off x="6382512" y="2655160"/>
+            <a:ext cx="2423160" cy="260000"/>
+          </a:xfrm>
+          <a:prstGeom prst="rect">
+            <a:avLst/>
+          </a:prstGeom>
+          <a:noFill/>
+        </p:spPr>
+        <p:txBody>
+          <a:bodyPr wrap="square">
+            <a:spAutoFit/>
+          </a:bodyPr>
+          <a:lstStyle/>
+          <a:p>
+            <a:pPr algn="l"/>
+            <a:r>
+              <a:rPr sz="800" b="0">
+                <a:solidFill>
+                  <a:srgbClr val="E0E8F0"/>
+                </a:solidFill>
+                <a:latin typeface="メイリオ"/>
+              </a:rPr>
+              <a:t>「艇王引いたから8セット行くわ」という
+ホールでの会話・コミュニティ形成</a:t>
+            </a:r>
+          </a:p>
+        </p:txBody>
+      </p:sp>
+      <p:sp>
+        <p:nvSpPr>
+          <p:cNvPr id="48" name="Rectangle 47"/>
+          <p:cNvSpPr/>
+          <p:nvPr/>
+        </p:nvSpPr>
+        <p:spPr>
+          <a:xfrm>
+            <a:off x="6199632" y="2945160"/>
+            <a:ext cx="50000" cy="510000"/>
+          </a:xfrm>
+          <a:prstGeom prst="rect">
+            <a:avLst/>
+          </a:prstGeom>
+          <a:solidFill>
+            <a:srgbClr val="22CC66"/>
+          </a:solidFill>
+          <a:ln>
+            <a:noFill/>
+          </a:ln>
+        </p:spPr>
+        <p:style>
+          <a:lnRef idx="1">
+            <a:schemeClr val="accent1"/>
+          </a:lnRef>
+          <a:fillRef idx="3">
+            <a:schemeClr val="accent1"/>
+          </a:fillRef>
+          <a:effectRef idx="2">
+            <a:schemeClr val="accent1"/>
+          </a:effectRef>
+          <a:fontRef idx="minor">
+            <a:schemeClr val="lt1"/>
+          </a:fontRef>
+        </p:style>
+        <p:txBody>
+          <a:bodyPr rtlCol="0" anchor="ctr"/>
+          <a:lstStyle/>
+          <a:p>
+            <a:pPr algn="ctr"/>
+          </a:p>
+        </p:txBody>
+      </p:sp>
+      <p:sp>
+        <p:nvSpPr>
+          <p:cNvPr id="49" name="TextBox 48"/>
+          <p:cNvSpPr txBox="1"/>
+          <p:nvPr/>
+        </p:nvSpPr>
+        <p:spPr>
+          <a:xfrm>
+            <a:off x="6382512" y="2970160"/>
+            <a:ext cx="2423160" cy="240000"/>
+          </a:xfrm>
+          <a:prstGeom prst="rect">
+            <a:avLst/>
+          </a:prstGeom>
+          <a:noFill/>
+        </p:spPr>
+        <p:txBody>
+          <a:bodyPr wrap="square">
+            <a:spAutoFit/>
+          </a:bodyPr>
+          <a:lstStyle/>
+          <a:p>
+            <a:pPr algn="l"/>
+            <a:r>
+              <a:rPr sz="900" b="1">
+                <a:solidFill>
+                  <a:srgbClr val="22CC66"/>
+                </a:solidFill>
+                <a:latin typeface="メイリオ"/>
+              </a:rPr>
+              <a:t>公平な抽選設計</a:t>
+            </a:r>
+          </a:p>
+        </p:txBody>
+      </p:sp>
+      <p:sp>
+        <p:nvSpPr>
+          <p:cNvPr id="50" name="TextBox 49"/>
+          <p:cNvSpPr txBox="1"/>
+          <p:nvPr/>
+        </p:nvSpPr>
+        <p:spPr>
+          <a:xfrm>
+            <a:off x="6382512" y="3210160"/>
+            <a:ext cx="2423160" cy="260000"/>
+          </a:xfrm>
+          <a:prstGeom prst="rect">
+            <a:avLst/>
+          </a:prstGeom>
+          <a:noFill/>
+        </p:spPr>
+        <p:txBody>
+          <a:bodyPr wrap="square">
+            <a:spAutoFit/>
+          </a:bodyPr>
+          <a:lstStyle/>
+          <a:p>
+            <a:pPr algn="l"/>
+            <a:r>
+              <a:rPr sz="800" b="0">
+                <a:solidFill>
+                  <a:srgbClr val="E0E8F0"/>
+                </a:solidFill>
+                <a:latin typeface="メイリオ"/>
+              </a:rPr>
+              <a:t>ハマり度・設定に依存しないため
+「今回のAT」だけに集中できる</a:t>
+            </a:r>
+          </a:p>
+        </p:txBody>
+      </p:sp>
+      <p:sp>
+        <p:nvSpPr>
+          <p:cNvPr id="51" name="Rectangle 50"/>
+          <p:cNvSpPr/>
+          <p:nvPr/>
+        </p:nvSpPr>
+        <p:spPr>
+          <a:xfrm>
+            <a:off x="182880" y="4069080"/>
+            <a:ext cx="8778240" cy="560000"/>
+          </a:xfrm>
+          <a:prstGeom prst="rect">
+            <a:avLst/>
+          </a:prstGeom>
+          <a:solidFill>
+            <a:srgbClr val="061020"/>
+          </a:solidFill>
+          <a:ln>
+            <a:noFill/>
+          </a:ln>
+        </p:spPr>
+        <p:style>
+          <a:lnRef idx="1">
+            <a:schemeClr val="accent1"/>
+          </a:lnRef>
+          <a:fillRef idx="3">
+            <a:schemeClr val="accent1"/>
+          </a:fillRef>
+          <a:effectRef idx="2">
+            <a:schemeClr val="accent1"/>
+          </a:effectRef>
+          <a:fontRef idx="minor">
+            <a:schemeClr val="lt1"/>
+          </a:fontRef>
+        </p:style>
+        <p:txBody>
+          <a:bodyPr rtlCol="0" anchor="ctr"/>
+          <a:lstStyle/>
+          <a:p>
+            <a:pPr algn="ctr"/>
+          </a:p>
+        </p:txBody>
+      </p:sp>
+      <p:sp>
+        <p:nvSpPr>
+          <p:cNvPr id="52" name="Rectangle 51"/>
+          <p:cNvSpPr/>
+          <p:nvPr/>
+        </p:nvSpPr>
+        <p:spPr>
+          <a:xfrm>
+            <a:off x="182880" y="4069080"/>
+            <a:ext cx="55000" cy="560000"/>
+          </a:xfrm>
+          <a:prstGeom prst="rect">
+            <a:avLst/>
+          </a:prstGeom>
+          <a:solidFill>
+            <a:srgbClr val="00C0C8"/>
+          </a:solidFill>
+          <a:ln>
+            <a:noFill/>
+          </a:ln>
+        </p:spPr>
+        <p:style>
+          <a:lnRef idx="1">
+            <a:schemeClr val="accent1"/>
+          </a:lnRef>
+          <a:fillRef idx="3">
+            <a:schemeClr val="accent1"/>
+          </a:fillRef>
+          <a:effectRef idx="2">
+            <a:schemeClr val="accent1"/>
+          </a:effectRef>
+          <a:fontRef idx="minor">
+            <a:schemeClr val="lt1"/>
+          </a:fontRef>
+        </p:style>
+        <p:txBody>
+          <a:bodyPr rtlCol="0" anchor="ctr"/>
+          <a:lstStyle/>
+          <a:p>
+            <a:pPr algn="ctr"/>
+          </a:p>
+        </p:txBody>
+      </p:sp>
+      <p:sp>
+        <p:nvSpPr>
+          <p:cNvPr id="53" name="TextBox 52"/>
+          <p:cNvSpPr txBox="1"/>
+          <p:nvPr/>
+        </p:nvSpPr>
+        <p:spPr>
+          <a:xfrm>
+            <a:off x="411480" y="4114800"/>
             <a:ext cx="8321040" cy="250000"/>
           </a:xfrm>
           <a:prstGeom prst="rect">
@@ -15914,24 +16823,24 @@
             <a:r>
               <a:rPr sz="950" b="1">
                 <a:solidFill>
-                  <a:srgbClr val="007AFF"/>
-                </a:solidFill>
-                <a:latin typeface="メイリオ"/>
-              </a:rPr>
-              <a:t>青島SGの設計意図：「到達した人だけが味わえる体験」として来店継続の最大動機を作る</a:t>
-            </a:r>
-          </a:p>
-        </p:txBody>
-      </p:sp>
-      <p:sp>
-        <p:nvSpPr>
-          <p:cNvPr id="34" name="TextBox 33"/>
-          <p:cNvSpPr txBox="1"/>
-          <p:nvPr/>
-        </p:nvSpPr>
-        <p:spPr>
-          <a:xfrm>
-            <a:off x="411480" y="4389120"/>
+                  <a:srgbClr val="00C0C8"/>
+                </a:solidFill>
+                <a:latin typeface="メイリオ"/>
+              </a:rPr>
+              <a:t>示唆設計の本質：「完全に分からないが、ある程度読める」絶妙なバランス</a:t>
+            </a:r>
+          </a:p>
+        </p:txBody>
+      </p:sp>
+      <p:sp>
+        <p:nvSpPr>
+          <p:cNvPr id="54" name="TextBox 53"/>
+          <p:cNvSpPr txBox="1"/>
+          <p:nvPr/>
+        </p:nvSpPr>
+        <p:spPr>
+          <a:xfrm>
+            <a:off x="411480" y="4416552"/>
             <a:ext cx="8321040" cy="250000"/>
           </a:xfrm>
           <a:prstGeom prst="rect">
@@ -15953,14 +16862,14 @@
                 </a:solidFill>
                 <a:latin typeface="メイリオ"/>
               </a:rPr>
-              <a:t>SG RUSHだけでも楽しめるが、青島SGを知ると「もう一度グランドスラムを取りたい」が生まれる。</a:t>
-            </a:r>
-          </a:p>
-        </p:txBody>
-      </p:sp>
-      <p:sp>
-        <p:nvSpPr>
-          <p:cNvPr id="35" name="TextBox 34"/>
+              <a:t>全部わかると緊張感がなくなり、全く分からないと虚無感が残る。その中間に「楽しい」がある。</a:t>
+            </a:r>
+          </a:p>
+        </p:txBody>
+      </p:sp>
+      <p:sp>
+        <p:nvSpPr>
+          <p:cNvPr id="55" name="TextBox 54"/>
           <p:cNvSpPr txBox="1"/>
           <p:nvPr/>
         </p:nvSpPr>
@@ -16151,7 +17060,7 @@
                 </a:solidFill>
                 <a:latin typeface="游明朝"/>
               </a:rPr>
-              <a:t>グランドスラム × エキシビションレース  ──  8セット完走の先にあるもの</a:t>
+              <a:t>上位AT「青島SG」  ──  純増4.0枚 × 継続率83% の頂点体験</a:t>
             </a:r>
           </a:p>
         </p:txBody>
@@ -16165,7 +17074,7 @@
         <p:spPr>
           <a:xfrm>
             <a:off x="182880" y="777240"/>
-            <a:ext cx="4160520" cy="3200400"/>
+            <a:ext cx="4114800" cy="3154680"/>
           </a:xfrm>
           <a:prstGeom prst="rect">
             <a:avLst/>
@@ -16173,9 +17082,9 @@
           <a:solidFill>
             <a:srgbClr val="0C142C"/>
           </a:solidFill>
-          <a:ln w="25400">
+          <a:ln w="19050">
             <a:solidFill>
-              <a:srgbClr val="C8A840"/>
+              <a:srgbClr val="007AFF"/>
             </a:solidFill>
           </a:ln>
         </p:spPr>
@@ -16227,66 +17136,31 @@
             <a:r>
               <a:rPr sz="1100" b="1">
                 <a:solidFill>
-                  <a:srgbClr val="C8A840"/>
+                  <a:srgbClr val="007AFF"/>
                 </a:solidFill>
                 <a:latin typeface="游明朝"/>
               </a:rPr>
-              <a:t>グランドスラム（8セット完走）</a:t>
-            </a:r>
-          </a:p>
-        </p:txBody>
-      </p:sp>
-      <p:sp>
-        <p:nvSpPr>
-          <p:cNvPr id="8" name="TextBox 7"/>
-          <p:cNvSpPr txBox="1"/>
-          <p:nvPr/>
-        </p:nvSpPr>
-        <p:spPr>
-          <a:xfrm>
-            <a:off x="292608" y="1234440"/>
-            <a:ext cx="3840480" cy="280000"/>
-          </a:xfrm>
-          <a:prstGeom prst="rect">
-            <a:avLst/>
-          </a:prstGeom>
-          <a:noFill/>
-        </p:spPr>
-        <p:txBody>
-          <a:bodyPr wrap="square">
-            <a:spAutoFit/>
-          </a:bodyPr>
-          <a:lstStyle/>
-          <a:p>
-            <a:pPr algn="l"/>
-            <a:r>
-              <a:rPr sz="850" b="0">
-                <a:solidFill>
-                  <a:srgbClr val="E0E8F0"/>
-                </a:solidFill>
-                <a:latin typeface="メイリオ"/>
-              </a:rPr>
-              <a:t>SGバトル（青島VS波多野）を8回連続で勝利した状態</a:t>
-            </a:r>
-          </a:p>
-        </p:txBody>
-      </p:sp>
-      <p:sp>
-        <p:nvSpPr>
-          <p:cNvPr id="9" name="Rectangle 8"/>
+              <a:t>青島SG スペック</a:t>
+            </a:r>
+          </a:p>
+        </p:txBody>
+      </p:sp>
+      <p:sp>
+        <p:nvSpPr>
+          <p:cNvPr id="8" name="Rectangle 7"/>
           <p:cNvSpPr/>
           <p:nvPr/>
         </p:nvSpPr>
         <p:spPr>
           <a:xfrm>
-            <a:off x="256032" y="1627632"/>
-            <a:ext cx="55000" cy="560000"/>
+            <a:off x="256032" y="1261872"/>
+            <a:ext cx="3950208" cy="330000"/>
           </a:xfrm>
           <a:prstGeom prst="rect">
             <a:avLst/>
           </a:prstGeom>
           <a:solidFill>
-            <a:srgbClr val="FFA020"/>
+            <a:srgbClr val="061428"/>
           </a:solidFill>
           <a:ln>
             <a:noFill/>
@@ -16316,49 +17190,49 @@
       </p:sp>
       <p:sp>
         <p:nvSpPr>
+          <p:cNvPr id="9" name="TextBox 8"/>
+          <p:cNvSpPr txBox="1"/>
+          <p:nvPr/>
+        </p:nvSpPr>
+        <p:spPr>
+          <a:xfrm>
+            <a:off x="347472" y="1289872"/>
+            <a:ext cx="1188720" cy="260000"/>
+          </a:xfrm>
+          <a:prstGeom prst="rect">
+            <a:avLst/>
+          </a:prstGeom>
+          <a:noFill/>
+        </p:spPr>
+        <p:txBody>
+          <a:bodyPr wrap="none">
+            <a:spAutoFit/>
+          </a:bodyPr>
+          <a:lstStyle/>
+          <a:p>
+            <a:pPr algn="l"/>
+            <a:r>
+              <a:rPr sz="850" b="1">
+                <a:solidFill>
+                  <a:srgbClr val="14887C"/>
+                </a:solidFill>
+                <a:latin typeface="メイリオ"/>
+              </a:rPr>
+              <a:t>純増</a:t>
+            </a:r>
+          </a:p>
+        </p:txBody>
+      </p:sp>
+      <p:sp>
+        <p:nvSpPr>
           <p:cNvPr id="10" name="TextBox 9"/>
           <p:cNvSpPr txBox="1"/>
           <p:nvPr/>
         </p:nvSpPr>
         <p:spPr>
           <a:xfrm>
-            <a:off x="475488" y="1657632"/>
-            <a:ext cx="3657600" cy="260000"/>
-          </a:xfrm>
-          <a:prstGeom prst="rect">
-            <a:avLst/>
-          </a:prstGeom>
-          <a:noFill/>
-        </p:spPr>
-        <p:txBody>
-          <a:bodyPr wrap="square">
-            <a:spAutoFit/>
-          </a:bodyPr>
-          <a:lstStyle/>
-          <a:p>
-            <a:pPr algn="l"/>
-            <a:r>
-              <a:rPr sz="950" b="1">
-                <a:solidFill>
-                  <a:srgbClr val="FFA020"/>
-                </a:solidFill>
-                <a:latin typeface="メイリオ"/>
-              </a:rPr>
-              <a:t>積み上げの快感</a:t>
-            </a:r>
-          </a:p>
-        </p:txBody>
-      </p:sp>
-      <p:sp>
-        <p:nvSpPr>
-          <p:cNvPr id="11" name="TextBox 10"/>
-          <p:cNvSpPr txBox="1"/>
-          <p:nvPr/>
-        </p:nvSpPr>
-        <p:spPr>
-          <a:xfrm>
-            <a:off x="475488" y="1922632"/>
-            <a:ext cx="3657600" cy="280000"/>
+            <a:off x="1581912" y="1289872"/>
+            <a:ext cx="2514600" cy="280000"/>
           </a:xfrm>
           <a:prstGeom prst="rect">
             <a:avLst/>
@@ -16375,32 +17249,31 @@
             <a:r>
               <a:rPr sz="850" b="0">
                 <a:solidFill>
-                  <a:srgbClr val="E0E8F0"/>
-                </a:solidFill>
-                <a:latin typeface="メイリオ"/>
-              </a:rPr>
-              <a:t>1セット目から8セット目まで
-「まだ続くかも」を8回繰り返す体験</a:t>
-            </a:r>
-          </a:p>
-        </p:txBody>
-      </p:sp>
-      <p:sp>
-        <p:nvSpPr>
-          <p:cNvPr id="12" name="Rectangle 11"/>
+                  <a:srgbClr val="FFD700"/>
+                </a:solidFill>
+                <a:latin typeface="メイリオ"/>
+              </a:rPr>
+              <a:t>約4.0枚/G（SG RUSHの1.6倍）</a:t>
+            </a:r>
+          </a:p>
+        </p:txBody>
+      </p:sp>
+      <p:sp>
+        <p:nvSpPr>
+          <p:cNvPr id="11" name="Rectangle 10"/>
           <p:cNvSpPr/>
           <p:nvPr/>
         </p:nvSpPr>
         <p:spPr>
           <a:xfrm>
-            <a:off x="256032" y="2227632"/>
-            <a:ext cx="55000" cy="560000"/>
+            <a:off x="256032" y="1601872"/>
+            <a:ext cx="3950208" cy="330000"/>
           </a:xfrm>
           <a:prstGeom prst="rect">
             <a:avLst/>
           </a:prstGeom>
           <a:solidFill>
-            <a:srgbClr val="C8A840"/>
+            <a:srgbClr val="0A182E"/>
           </a:solidFill>
           <a:ln>
             <a:noFill/>
@@ -16430,49 +17303,49 @@
       </p:sp>
       <p:sp>
         <p:nvSpPr>
+          <p:cNvPr id="12" name="TextBox 11"/>
+          <p:cNvSpPr txBox="1"/>
+          <p:nvPr/>
+        </p:nvSpPr>
+        <p:spPr>
+          <a:xfrm>
+            <a:off x="347472" y="1629872"/>
+            <a:ext cx="1188720" cy="260000"/>
+          </a:xfrm>
+          <a:prstGeom prst="rect">
+            <a:avLst/>
+          </a:prstGeom>
+          <a:noFill/>
+        </p:spPr>
+        <p:txBody>
+          <a:bodyPr wrap="none">
+            <a:spAutoFit/>
+          </a:bodyPr>
+          <a:lstStyle/>
+          <a:p>
+            <a:pPr algn="l"/>
+            <a:r>
+              <a:rPr sz="850" b="1">
+                <a:solidFill>
+                  <a:srgbClr val="14887C"/>
+                </a:solidFill>
+                <a:latin typeface="メイリオ"/>
+              </a:rPr>
+              <a:t>継続率</a:t>
+            </a:r>
+          </a:p>
+        </p:txBody>
+      </p:sp>
+      <p:sp>
+        <p:nvSpPr>
           <p:cNvPr id="13" name="TextBox 12"/>
           <p:cNvSpPr txBox="1"/>
           <p:nvPr/>
         </p:nvSpPr>
         <p:spPr>
           <a:xfrm>
-            <a:off x="475488" y="2257632"/>
-            <a:ext cx="3657600" cy="260000"/>
-          </a:xfrm>
-          <a:prstGeom prst="rect">
-            <a:avLst/>
-          </a:prstGeom>
-          <a:noFill/>
-        </p:spPr>
-        <p:txBody>
-          <a:bodyPr wrap="square">
-            <a:spAutoFit/>
-          </a:bodyPr>
-          <a:lstStyle/>
-          <a:p>
-            <a:pPr algn="l"/>
-            <a:r>
-              <a:rPr sz="950" b="1">
-                <a:solidFill>
-                  <a:srgbClr val="C8A840"/>
-                </a:solidFill>
-                <a:latin typeface="メイリオ"/>
-              </a:rPr>
-              <a:t>シナリオとの連動</a:t>
-            </a:r>
-          </a:p>
-        </p:txBody>
-      </p:sp>
-      <p:sp>
-        <p:nvSpPr>
-          <p:cNvPr id="14" name="TextBox 13"/>
-          <p:cNvSpPr txBox="1"/>
-          <p:nvPr/>
-        </p:nvSpPr>
-        <p:spPr>
-          <a:xfrm>
-            <a:off x="475488" y="2522632"/>
-            <a:ext cx="3657600" cy="280000"/>
+            <a:off x="1581912" y="1629872"/>
+            <a:ext cx="2514600" cy="280000"/>
           </a:xfrm>
           <a:prstGeom prst="rect">
             <a:avLst/>
@@ -16489,32 +17362,31 @@
             <a:r>
               <a:rPr sz="850" b="0">
                 <a:solidFill>
-                  <a:srgbClr val="E0E8F0"/>
-                </a:solidFill>
-                <a:latin typeface="メイリオ"/>
-              </a:rPr>
-              <a:t>艇王シナリオなら達成がほぼ確実
-低シナリオでの達成が「奇跡」体験</a:t>
-            </a:r>
-          </a:p>
-        </p:txBody>
-      </p:sp>
-      <p:sp>
-        <p:nvSpPr>
-          <p:cNvPr id="15" name="Rectangle 14"/>
+                  <a:srgbClr val="007AFF"/>
+                </a:solidFill>
+                <a:latin typeface="メイリオ"/>
+              </a:rPr>
+              <a:t>約75%（Vストック込みで約83%）</a:t>
+            </a:r>
+          </a:p>
+        </p:txBody>
+      </p:sp>
+      <p:sp>
+        <p:nvSpPr>
+          <p:cNvPr id="14" name="Rectangle 13"/>
           <p:cNvSpPr/>
           <p:nvPr/>
         </p:nvSpPr>
         <p:spPr>
           <a:xfrm>
-            <a:off x="256032" y="2827632"/>
-            <a:ext cx="55000" cy="560000"/>
+            <a:off x="256032" y="1941872"/>
+            <a:ext cx="3950208" cy="330000"/>
           </a:xfrm>
           <a:prstGeom prst="rect">
             <a:avLst/>
           </a:prstGeom>
           <a:solidFill>
-            <a:srgbClr val="00C0C8"/>
+            <a:srgbClr val="061428"/>
           </a:solidFill>
           <a:ln>
             <a:noFill/>
@@ -16544,49 +17416,49 @@
       </p:sp>
       <p:sp>
         <p:nvSpPr>
+          <p:cNvPr id="15" name="TextBox 14"/>
+          <p:cNvSpPr txBox="1"/>
+          <p:nvPr/>
+        </p:nvSpPr>
+        <p:spPr>
+          <a:xfrm>
+            <a:off x="347472" y="1969872"/>
+            <a:ext cx="1188720" cy="260000"/>
+          </a:xfrm>
+          <a:prstGeom prst="rect">
+            <a:avLst/>
+          </a:prstGeom>
+          <a:noFill/>
+        </p:spPr>
+        <p:txBody>
+          <a:bodyPr wrap="none">
+            <a:spAutoFit/>
+          </a:bodyPr>
+          <a:lstStyle/>
+          <a:p>
+            <a:pPr algn="l"/>
+            <a:r>
+              <a:rPr sz="850" b="1">
+                <a:solidFill>
+                  <a:srgbClr val="14887C"/>
+                </a:solidFill>
+                <a:latin typeface="メイリオ"/>
+              </a:rPr>
+              <a:t>突入経路</a:t>
+            </a:r>
+          </a:p>
+        </p:txBody>
+      </p:sp>
+      <p:sp>
+        <p:nvSpPr>
           <p:cNvPr id="16" name="TextBox 15"/>
           <p:cNvSpPr txBox="1"/>
           <p:nvPr/>
         </p:nvSpPr>
         <p:spPr>
           <a:xfrm>
-            <a:off x="475488" y="2857632"/>
-            <a:ext cx="3657600" cy="260000"/>
-          </a:xfrm>
-          <a:prstGeom prst="rect">
-            <a:avLst/>
-          </a:prstGeom>
-          <a:noFill/>
-        </p:spPr>
-        <p:txBody>
-          <a:bodyPr wrap="square">
-            <a:spAutoFit/>
-          </a:bodyPr>
-          <a:lstStyle/>
-          <a:p>
-            <a:pPr algn="l"/>
-            <a:r>
-              <a:rPr sz="950" b="1">
-                <a:solidFill>
-                  <a:srgbClr val="00C0C8"/>
-                </a:solidFill>
-                <a:latin typeface="メイリオ"/>
-              </a:rPr>
-              <a:t>達成後の特典</a:t>
-            </a:r>
-          </a:p>
-        </p:txBody>
-      </p:sp>
-      <p:sp>
-        <p:nvSpPr>
-          <p:cNvPr id="17" name="TextBox 16"/>
-          <p:cNvSpPr txBox="1"/>
-          <p:nvPr/>
-        </p:nvSpPr>
-        <p:spPr>
-          <a:xfrm>
-            <a:off x="475488" y="3122632"/>
-            <a:ext cx="3657600" cy="280000"/>
+            <a:off x="1581912" y="1969872"/>
+            <a:ext cx="2514600" cy="280000"/>
           </a:xfrm>
           <a:prstGeom prst="rect">
             <a:avLst/>
@@ -16607,22 +17479,248 @@
                 </a:solidFill>
                 <a:latin typeface="メイリオ"/>
               </a:rPr>
-              <a:t>エキシビションレースへ自動移行
-青島SGへの入口が開く</a:t>
-            </a:r>
-          </a:p>
-        </p:txBody>
-      </p:sp>
-      <p:sp>
-        <p:nvSpPr>
-          <p:cNvPr id="18" name="Rectangle 17"/>
+              <a:t>グランドスラム後の青島VS波多野勝利</a:t>
+            </a:r>
+          </a:p>
+        </p:txBody>
+      </p:sp>
+      <p:sp>
+        <p:nvSpPr>
+          <p:cNvPr id="17" name="Rectangle 16"/>
           <p:cNvSpPr/>
           <p:nvPr/>
         </p:nvSpPr>
         <p:spPr>
           <a:xfrm>
-            <a:off x="4572000" y="777240"/>
-            <a:ext cx="4343400" cy="3200400"/>
+            <a:off x="256032" y="2281872"/>
+            <a:ext cx="3950208" cy="330000"/>
+          </a:xfrm>
+          <a:prstGeom prst="rect">
+            <a:avLst/>
+          </a:prstGeom>
+          <a:solidFill>
+            <a:srgbClr val="0A182E"/>
+          </a:solidFill>
+          <a:ln>
+            <a:noFill/>
+          </a:ln>
+        </p:spPr>
+        <p:style>
+          <a:lnRef idx="1">
+            <a:schemeClr val="accent1"/>
+          </a:lnRef>
+          <a:fillRef idx="3">
+            <a:schemeClr val="accent1"/>
+          </a:fillRef>
+          <a:effectRef idx="2">
+            <a:schemeClr val="accent1"/>
+          </a:effectRef>
+          <a:fontRef idx="minor">
+            <a:schemeClr val="lt1"/>
+          </a:fontRef>
+        </p:style>
+        <p:txBody>
+          <a:bodyPr rtlCol="0" anchor="ctr"/>
+          <a:lstStyle/>
+          <a:p>
+            <a:pPr algn="ctr"/>
+          </a:p>
+        </p:txBody>
+      </p:sp>
+      <p:sp>
+        <p:nvSpPr>
+          <p:cNvPr id="18" name="TextBox 17"/>
+          <p:cNvSpPr txBox="1"/>
+          <p:nvPr/>
+        </p:nvSpPr>
+        <p:spPr>
+          <a:xfrm>
+            <a:off x="347472" y="2309872"/>
+            <a:ext cx="1188720" cy="260000"/>
+          </a:xfrm>
+          <a:prstGeom prst="rect">
+            <a:avLst/>
+          </a:prstGeom>
+          <a:noFill/>
+        </p:spPr>
+        <p:txBody>
+          <a:bodyPr wrap="none">
+            <a:spAutoFit/>
+          </a:bodyPr>
+          <a:lstStyle/>
+          <a:p>
+            <a:pPr algn="l"/>
+            <a:r>
+              <a:rPr sz="850" b="1">
+                <a:solidFill>
+                  <a:srgbClr val="14887C"/>
+                </a:solidFill>
+                <a:latin typeface="メイリオ"/>
+              </a:rPr>
+              <a:t>構成</a:t>
+            </a:r>
+          </a:p>
+        </p:txBody>
+      </p:sp>
+      <p:sp>
+        <p:nvSpPr>
+          <p:cNvPr id="19" name="TextBox 18"/>
+          <p:cNvSpPr txBox="1"/>
+          <p:nvPr/>
+        </p:nvSpPr>
+        <p:spPr>
+          <a:xfrm>
+            <a:off x="1581912" y="2309872"/>
+            <a:ext cx="2514600" cy="280000"/>
+          </a:xfrm>
+          <a:prstGeom prst="rect">
+            <a:avLst/>
+          </a:prstGeom>
+          <a:noFill/>
+        </p:spPr>
+        <p:txBody>
+          <a:bodyPr wrap="square">
+            <a:spAutoFit/>
+          </a:bodyPr>
+          <a:lstStyle/>
+          <a:p>
+            <a:pPr algn="l"/>
+            <a:r>
+              <a:rPr sz="850" b="0">
+                <a:solidFill>
+                  <a:srgbClr val="E0E8F0"/>
+                </a:solidFill>
+                <a:latin typeface="メイリオ"/>
+              </a:rPr>
+              <a:t>青島周回パート＋青島VS波多野の2部</a:t>
+            </a:r>
+          </a:p>
+        </p:txBody>
+      </p:sp>
+      <p:sp>
+        <p:nvSpPr>
+          <p:cNvPr id="20" name="Rectangle 19"/>
+          <p:cNvSpPr/>
+          <p:nvPr/>
+        </p:nvSpPr>
+        <p:spPr>
+          <a:xfrm>
+            <a:off x="256032" y="2621872"/>
+            <a:ext cx="3950208" cy="620000"/>
+          </a:xfrm>
+          <a:prstGeom prst="rect">
+            <a:avLst/>
+          </a:prstGeom>
+          <a:solidFill>
+            <a:srgbClr val="061428"/>
+          </a:solidFill>
+          <a:ln>
+            <a:noFill/>
+          </a:ln>
+        </p:spPr>
+        <p:style>
+          <a:lnRef idx="1">
+            <a:schemeClr val="accent1"/>
+          </a:lnRef>
+          <a:fillRef idx="3">
+            <a:schemeClr val="accent1"/>
+          </a:fillRef>
+          <a:effectRef idx="2">
+            <a:schemeClr val="accent1"/>
+          </a:effectRef>
+          <a:fontRef idx="minor">
+            <a:schemeClr val="lt1"/>
+          </a:fontRef>
+        </p:style>
+        <p:txBody>
+          <a:bodyPr rtlCol="0" anchor="ctr"/>
+          <a:lstStyle/>
+          <a:p>
+            <a:pPr algn="ctr"/>
+          </a:p>
+        </p:txBody>
+      </p:sp>
+      <p:sp>
+        <p:nvSpPr>
+          <p:cNvPr id="21" name="TextBox 20"/>
+          <p:cNvSpPr txBox="1"/>
+          <p:nvPr/>
+        </p:nvSpPr>
+        <p:spPr>
+          <a:xfrm>
+            <a:off x="347472" y="2649872"/>
+            <a:ext cx="1188720" cy="260000"/>
+          </a:xfrm>
+          <a:prstGeom prst="rect">
+            <a:avLst/>
+          </a:prstGeom>
+          <a:noFill/>
+        </p:spPr>
+        <p:txBody>
+          <a:bodyPr wrap="none">
+            <a:spAutoFit/>
+          </a:bodyPr>
+          <a:lstStyle/>
+          <a:p>
+            <a:pPr algn="l"/>
+            <a:r>
+              <a:rPr sz="850" b="1">
+                <a:solidFill>
+                  <a:srgbClr val="14887C"/>
+                </a:solidFill>
+                <a:latin typeface="メイリオ"/>
+              </a:rPr>
+              <a:t>上乗せ</a:t>
+            </a:r>
+          </a:p>
+        </p:txBody>
+      </p:sp>
+      <p:sp>
+        <p:nvSpPr>
+          <p:cNvPr id="22" name="TextBox 21"/>
+          <p:cNvSpPr txBox="1"/>
+          <p:nvPr/>
+        </p:nvSpPr>
+        <p:spPr>
+          <a:xfrm>
+            <a:off x="1581912" y="2649872"/>
+            <a:ext cx="2514600" cy="560000"/>
+          </a:xfrm>
+          <a:prstGeom prst="rect">
+            <a:avLst/>
+          </a:prstGeom>
+          <a:noFill/>
+        </p:spPr>
+        <p:txBody>
+          <a:bodyPr wrap="square">
+            <a:spAutoFit/>
+          </a:bodyPr>
+          <a:lstStyle/>
+          <a:p>
+            <a:pPr algn="l"/>
+            <a:r>
+              <a:rPr sz="850" b="0">
+                <a:solidFill>
+                  <a:srgbClr val="FFA020"/>
+                </a:solidFill>
+                <a:latin typeface="メイリオ"/>
+              </a:rPr>
+              <a:t>V揃い単：次セット継続濃厚
+  V揃いダブル：継続＋100〜300G上乗せ</a:t>
+            </a:r>
+          </a:p>
+        </p:txBody>
+      </p:sp>
+      <p:sp>
+        <p:nvSpPr>
+          <p:cNvPr id="23" name="Rectangle 22"/>
+          <p:cNvSpPr/>
+          <p:nvPr/>
+        </p:nvSpPr>
+        <p:spPr>
+          <a:xfrm>
+            <a:off x="4480560" y="777240"/>
+            <a:ext cx="4480560" cy="3154680"/>
           </a:xfrm>
           <a:prstGeom prst="rect">
             <a:avLst/>
@@ -16660,14 +17758,14 @@
       </p:sp>
       <p:sp>
         <p:nvSpPr>
-          <p:cNvPr id="19" name="TextBox 18"/>
-          <p:cNvSpPr txBox="1"/>
-          <p:nvPr/>
-        </p:nvSpPr>
-        <p:spPr>
-          <a:xfrm>
-            <a:off x="4681728" y="841248"/>
-            <a:ext cx="4114800" cy="320000"/>
+          <p:cNvPr id="24" name="TextBox 23"/>
+          <p:cNvSpPr txBox="1"/>
+          <p:nvPr/>
+        </p:nvSpPr>
+        <p:spPr>
+          <a:xfrm>
+            <a:off x="4590288" y="841248"/>
+            <a:ext cx="4206240" cy="320000"/>
           </a:xfrm>
           <a:prstGeom prst="rect">
             <a:avLst/>
@@ -16688,65 +17786,32 @@
                 </a:solidFill>
                 <a:latin typeface="游明朝"/>
               </a:rPr>
-              <a:t>エキシビションレース</a:t>
-            </a:r>
-          </a:p>
-        </p:txBody>
-      </p:sp>
-      <p:sp>
-        <p:nvSpPr>
-          <p:cNvPr id="20" name="TextBox 19"/>
-          <p:cNvSpPr txBox="1"/>
-          <p:nvPr/>
-        </p:nvSpPr>
-        <p:spPr>
-          <a:xfrm>
-            <a:off x="4681728" y="1216152"/>
-            <a:ext cx="4114800" cy="250000"/>
-          </a:xfrm>
-          <a:prstGeom prst="rect">
-            <a:avLst/>
-          </a:prstGeom>
-          <a:noFill/>
-        </p:spPr>
-        <p:txBody>
-          <a:bodyPr wrap="square">
-            <a:spAutoFit/>
-          </a:bodyPr>
-          <a:lstStyle/>
-          <a:p>
-            <a:pPr algn="l"/>
-            <a:r>
-              <a:rPr sz="850" b="0">
-                <a:solidFill>
-                  <a:srgbClr val="E0E8F0"/>
-                </a:solidFill>
-                <a:latin typeface="メイリオ"/>
-              </a:rPr>
-              <a:t>グランドスラム後の継続率固定AT区間</a:t>
-            </a:r>
-          </a:p>
-        </p:txBody>
-      </p:sp>
-      <p:sp>
-        <p:nvSpPr>
-          <p:cNvPr id="21" name="Rectangle 20"/>
+              <a:t>特化ゾーン「温泉モード」＆突入の価値</a:t>
+            </a:r>
+          </a:p>
+        </p:txBody>
+      </p:sp>
+      <p:sp>
+        <p:nvSpPr>
+          <p:cNvPr id="25" name="Rectangle 24"/>
           <p:cNvSpPr/>
           <p:nvPr/>
         </p:nvSpPr>
         <p:spPr>
           <a:xfrm>
-            <a:off x="4663440" y="1536192"/>
-            <a:ext cx="4160520" cy="360000"/>
+            <a:off x="4645152" y="1261872"/>
+            <a:ext cx="4242816" cy="840000"/>
           </a:xfrm>
           <a:prstGeom prst="rect">
             <a:avLst/>
           </a:prstGeom>
           <a:solidFill>
-            <a:srgbClr val="0A1424"/>
+            <a:srgbClr val="101806"/>
           </a:solidFill>
-          <a:ln>
-            <a:noFill/>
+          <a:ln w="12700">
+            <a:solidFill>
+              <a:srgbClr val="FFA020"/>
+            </a:solidFill>
           </a:ln>
         </p:spPr>
         <p:style>
@@ -16773,84 +17838,49 @@
       </p:sp>
       <p:sp>
         <p:nvSpPr>
-          <p:cNvPr id="22" name="TextBox 21"/>
-          <p:cNvSpPr txBox="1"/>
-          <p:nvPr/>
-        </p:nvSpPr>
-        <p:spPr>
-          <a:xfrm>
-            <a:off x="4754880" y="1566192"/>
-            <a:ext cx="380000" cy="300000"/>
-          </a:xfrm>
-          <a:prstGeom prst="rect">
-            <a:avLst/>
-          </a:prstGeom>
-          <a:noFill/>
-        </p:spPr>
-        <p:txBody>
-          <a:bodyPr wrap="none">
-            <a:spAutoFit/>
-          </a:bodyPr>
-          <a:lstStyle/>
-          <a:p>
-            <a:pPr algn="l"/>
-            <a:r>
-              <a:rPr sz="900" b="1">
-                <a:solidFill>
-                  <a:srgbClr val="BBBBBB"/>
-                </a:solidFill>
-                <a:latin typeface="メイリオ"/>
-              </a:rPr>
-              <a:t>型A</a:t>
-            </a:r>
-          </a:p>
-        </p:txBody>
-      </p:sp>
-      <p:sp>
-        <p:nvSpPr>
-          <p:cNvPr id="23" name="TextBox 22"/>
-          <p:cNvSpPr txBox="1"/>
-          <p:nvPr/>
-        </p:nvSpPr>
-        <p:spPr>
-          <a:xfrm>
-            <a:off x="5349240" y="1566192"/>
-            <a:ext cx="820000" cy="300000"/>
-          </a:xfrm>
-          <a:prstGeom prst="rect">
-            <a:avLst/>
-          </a:prstGeom>
-          <a:noFill/>
-        </p:spPr>
-        <p:txBody>
-          <a:bodyPr wrap="square">
-            <a:spAutoFit/>
-          </a:bodyPr>
-          <a:lstStyle/>
-          <a:p>
-            <a:pPr algn="ctr"/>
-            <a:r>
-              <a:rPr sz="1300" b="1">
-                <a:solidFill>
-                  <a:srgbClr val="BBBBBB"/>
-                </a:solidFill>
-                <a:latin typeface="メイリオ"/>
-              </a:rPr>
-              <a:t>50.0%</a:t>
-            </a:r>
-          </a:p>
-        </p:txBody>
-      </p:sp>
-      <p:sp>
-        <p:nvSpPr>
-          <p:cNvPr id="24" name="TextBox 23"/>
-          <p:cNvSpPr txBox="1"/>
-          <p:nvPr/>
-        </p:nvSpPr>
-        <p:spPr>
-          <a:xfrm>
-            <a:off x="6446520" y="1566192"/>
-            <a:ext cx="2240280" cy="300000"/>
+          <p:cNvPr id="26" name="TextBox 25"/>
+          <p:cNvSpPr txBox="1"/>
+          <p:nvPr/>
+        </p:nvSpPr>
+        <p:spPr>
+          <a:xfrm>
+            <a:off x="4754880" y="1316736"/>
+            <a:ext cx="3931920" cy="280000"/>
+          </a:xfrm>
+          <a:prstGeom prst="rect">
+            <a:avLst/>
+          </a:prstGeom>
+          <a:noFill/>
+        </p:spPr>
+        <p:txBody>
+          <a:bodyPr wrap="square">
+            <a:spAutoFit/>
+          </a:bodyPr>
+          <a:lstStyle/>
+          <a:p>
+            <a:pPr algn="l"/>
+            <a:r>
+              <a:rPr sz="1000" b="1">
+                <a:solidFill>
+                  <a:srgbClr val="FFA020"/>
+                </a:solidFill>
+                <a:latin typeface="メイリオ"/>
+              </a:rPr>
+              <a:t>温泉モード（30G）</a:t>
+            </a:r>
+          </a:p>
+        </p:txBody>
+      </p:sp>
+      <p:sp>
+        <p:nvSpPr>
+          <p:cNvPr id="27" name="TextBox 26"/>
+          <p:cNvSpPr txBox="1"/>
+          <p:nvPr/>
+        </p:nvSpPr>
+        <p:spPr>
+          <a:xfrm>
+            <a:off x="4754880" y="1627632"/>
+            <a:ext cx="3931920" cy="400000"/>
           </a:xfrm>
           <a:prstGeom prst="rect">
             <a:avLst/>
@@ -16871,30 +17901,34 @@
                 </a:solidFill>
                 <a:latin typeface="メイリオ"/>
               </a:rPr>
-              <a:t>継続率低め</a:t>
-            </a:r>
-          </a:p>
-        </p:txBody>
-      </p:sp>
-      <p:sp>
-        <p:nvSpPr>
-          <p:cNvPr id="25" name="Rectangle 24"/>
+              <a:t>青島VS波多野レース中のレア役成立で突入
+消化中はゲーム数上乗せ抽選が強化
+弱チェリー・強チャンス役で上乗せ確定</a:t>
+            </a:r>
+          </a:p>
+        </p:txBody>
+      </p:sp>
+      <p:sp>
+        <p:nvSpPr>
+          <p:cNvPr id="28" name="Rectangle 27"/>
           <p:cNvSpPr/>
           <p:nvPr/>
         </p:nvSpPr>
         <p:spPr>
           <a:xfrm>
-            <a:off x="4663440" y="1911192"/>
-            <a:ext cx="4160520" cy="360000"/>
+            <a:off x="4645152" y="2176272"/>
+            <a:ext cx="4242816" cy="1700000"/>
           </a:xfrm>
           <a:prstGeom prst="rect">
             <a:avLst/>
           </a:prstGeom>
           <a:solidFill>
-            <a:srgbClr val="0E182C"/>
+            <a:srgbClr val="000A22"/>
           </a:solidFill>
-          <a:ln>
-            <a:noFill/>
+          <a:ln w="12700">
+            <a:solidFill>
+              <a:srgbClr val="007AFF"/>
+            </a:solidFill>
           </a:ln>
         </p:spPr>
         <p:style>
@@ -16921,84 +17955,49 @@
       </p:sp>
       <p:sp>
         <p:nvSpPr>
-          <p:cNvPr id="26" name="TextBox 25"/>
-          <p:cNvSpPr txBox="1"/>
-          <p:nvPr/>
-        </p:nvSpPr>
-        <p:spPr>
-          <a:xfrm>
-            <a:off x="4754880" y="1941192"/>
-            <a:ext cx="380000" cy="300000"/>
-          </a:xfrm>
-          <a:prstGeom prst="rect">
-            <a:avLst/>
-          </a:prstGeom>
-          <a:noFill/>
-        </p:spPr>
-        <p:txBody>
-          <a:bodyPr wrap="none">
-            <a:spAutoFit/>
-          </a:bodyPr>
-          <a:lstStyle/>
-          <a:p>
-            <a:pPr algn="l"/>
-            <a:r>
-              <a:rPr sz="900" b="1">
-                <a:solidFill>
-                  <a:srgbClr val="FFA020"/>
-                </a:solidFill>
-                <a:latin typeface="メイリオ"/>
-              </a:rPr>
-              <a:t>型B</a:t>
-            </a:r>
-          </a:p>
-        </p:txBody>
-      </p:sp>
-      <p:sp>
-        <p:nvSpPr>
-          <p:cNvPr id="27" name="TextBox 26"/>
-          <p:cNvSpPr txBox="1"/>
-          <p:nvPr/>
-        </p:nvSpPr>
-        <p:spPr>
-          <a:xfrm>
-            <a:off x="5349240" y="1941192"/>
-            <a:ext cx="820000" cy="300000"/>
-          </a:xfrm>
-          <a:prstGeom prst="rect">
-            <a:avLst/>
-          </a:prstGeom>
-          <a:noFill/>
-        </p:spPr>
-        <p:txBody>
-          <a:bodyPr wrap="square">
-            <a:spAutoFit/>
-          </a:bodyPr>
-          <a:lstStyle/>
-          <a:p>
-            <a:pPr algn="ctr"/>
-            <a:r>
-              <a:rPr sz="1300" b="1">
-                <a:solidFill>
-                  <a:srgbClr val="FFA020"/>
-                </a:solidFill>
-                <a:latin typeface="メイリオ"/>
-              </a:rPr>
-              <a:t>66.4%</a:t>
-            </a:r>
-          </a:p>
-        </p:txBody>
-      </p:sp>
-      <p:sp>
-        <p:nvSpPr>
-          <p:cNvPr id="28" name="TextBox 27"/>
-          <p:cNvSpPr txBox="1"/>
-          <p:nvPr/>
-        </p:nvSpPr>
-        <p:spPr>
-          <a:xfrm>
-            <a:off x="6446520" y="1941192"/>
-            <a:ext cx="2240280" cy="300000"/>
+          <p:cNvPr id="29" name="TextBox 28"/>
+          <p:cNvSpPr txBox="1"/>
+          <p:nvPr/>
+        </p:nvSpPr>
+        <p:spPr>
+          <a:xfrm>
+            <a:off x="4754880" y="2231136"/>
+            <a:ext cx="3931920" cy="280000"/>
+          </a:xfrm>
+          <a:prstGeom prst="rect">
+            <a:avLst/>
+          </a:prstGeom>
+          <a:noFill/>
+        </p:spPr>
+        <p:txBody>
+          <a:bodyPr wrap="square">
+            <a:spAutoFit/>
+          </a:bodyPr>
+          <a:lstStyle/>
+          <a:p>
+            <a:pPr algn="l"/>
+            <a:r>
+              <a:rPr sz="1000" b="1">
+                <a:solidFill>
+                  <a:srgbClr val="007AFF"/>
+                </a:solidFill>
+                <a:latin typeface="メイリオ"/>
+              </a:rPr>
+              <a:t>青島SGに突入する意味</a:t>
+            </a:r>
+          </a:p>
+        </p:txBody>
+      </p:sp>
+      <p:sp>
+        <p:nvSpPr>
+          <p:cNvPr id="30" name="TextBox 29"/>
+          <p:cNvSpPr txBox="1"/>
+          <p:nvPr/>
+        </p:nvSpPr>
+        <p:spPr>
+          <a:xfrm>
+            <a:off x="4754880" y="2542032"/>
+            <a:ext cx="3931920" cy="1300000"/>
           </a:xfrm>
           <a:prstGeom prst="rect">
             <a:avLst/>
@@ -17019,27 +18018,32 @@
                 </a:solidFill>
                 <a:latin typeface="メイリオ"/>
               </a:rPr>
-              <a:t>継続率中</a:t>
-            </a:r>
-          </a:p>
-        </p:txBody>
-      </p:sp>
-      <p:sp>
-        <p:nvSpPr>
-          <p:cNvPr id="29" name="Rectangle 28"/>
+              <a:t>SG RUSH（純増2.5枚）との差は1.5枚/G
+100G消化で+150枚の差が生まれる
+継続率83%で長く続く×純増4.0枚
+= 1日の大台を作る唯一のルート
+「グランドスラム達成 → 青島SG」が
+来店時の最大目標として機能する</a:t>
+            </a:r>
+          </a:p>
+        </p:txBody>
+      </p:sp>
+      <p:sp>
+        <p:nvSpPr>
+          <p:cNvPr id="31" name="Rectangle 30"/>
           <p:cNvSpPr/>
           <p:nvPr/>
         </p:nvSpPr>
         <p:spPr>
           <a:xfrm>
-            <a:off x="4663440" y="2286192"/>
-            <a:ext cx="4160520" cy="360000"/>
+            <a:off x="182880" y="4041648"/>
+            <a:ext cx="8778240" cy="580000"/>
           </a:xfrm>
           <a:prstGeom prst="rect">
             <a:avLst/>
           </a:prstGeom>
           <a:solidFill>
-            <a:srgbClr val="0A1424"/>
+            <a:srgbClr val="001024"/>
           </a:solidFill>
           <a:ln>
             <a:noFill/>
@@ -17069,125 +18073,20 @@
       </p:sp>
       <p:sp>
         <p:nvSpPr>
-          <p:cNvPr id="30" name="TextBox 29"/>
-          <p:cNvSpPr txBox="1"/>
-          <p:nvPr/>
-        </p:nvSpPr>
-        <p:spPr>
-          <a:xfrm>
-            <a:off x="4754880" y="2316192"/>
-            <a:ext cx="380000" cy="300000"/>
-          </a:xfrm>
-          <a:prstGeom prst="rect">
-            <a:avLst/>
-          </a:prstGeom>
-          <a:noFill/>
-        </p:spPr>
-        <p:txBody>
-          <a:bodyPr wrap="none">
-            <a:spAutoFit/>
-          </a:bodyPr>
-          <a:lstStyle/>
-          <a:p>
-            <a:pPr algn="l"/>
-            <a:r>
-              <a:rPr sz="900" b="1">
-                <a:solidFill>
-                  <a:srgbClr val="00C0C8"/>
-                </a:solidFill>
-                <a:latin typeface="メイリオ"/>
-              </a:rPr>
-              <a:t>型C</a:t>
-            </a:r>
-          </a:p>
-        </p:txBody>
-      </p:sp>
-      <p:sp>
-        <p:nvSpPr>
-          <p:cNvPr id="31" name="TextBox 30"/>
-          <p:cNvSpPr txBox="1"/>
-          <p:nvPr/>
-        </p:nvSpPr>
-        <p:spPr>
-          <a:xfrm>
-            <a:off x="5349240" y="2316192"/>
-            <a:ext cx="820000" cy="300000"/>
-          </a:xfrm>
-          <a:prstGeom prst="rect">
-            <a:avLst/>
-          </a:prstGeom>
-          <a:noFill/>
-        </p:spPr>
-        <p:txBody>
-          <a:bodyPr wrap="square">
-            <a:spAutoFit/>
-          </a:bodyPr>
-          <a:lstStyle/>
-          <a:p>
-            <a:pPr algn="ctr"/>
-            <a:r>
-              <a:rPr sz="1300" b="1">
-                <a:solidFill>
-                  <a:srgbClr val="00C0C8"/>
-                </a:solidFill>
-                <a:latin typeface="メイリオ"/>
-              </a:rPr>
-              <a:t>80.1%</a:t>
-            </a:r>
-          </a:p>
-        </p:txBody>
-      </p:sp>
-      <p:sp>
-        <p:nvSpPr>
-          <p:cNvPr id="32" name="TextBox 31"/>
-          <p:cNvSpPr txBox="1"/>
-          <p:nvPr/>
-        </p:nvSpPr>
-        <p:spPr>
-          <a:xfrm>
-            <a:off x="6446520" y="2316192"/>
-            <a:ext cx="2240280" cy="300000"/>
-          </a:xfrm>
-          <a:prstGeom prst="rect">
-            <a:avLst/>
-          </a:prstGeom>
-          <a:noFill/>
-        </p:spPr>
-        <p:txBody>
-          <a:bodyPr wrap="square">
-            <a:spAutoFit/>
-          </a:bodyPr>
-          <a:lstStyle/>
-          <a:p>
-            <a:pPr algn="l"/>
-            <a:r>
-              <a:rPr sz="850" b="0">
-                <a:solidFill>
-                  <a:srgbClr val="E0E8F0"/>
-                </a:solidFill>
-                <a:latin typeface="メイリオ"/>
-              </a:rPr>
-              <a:t>継続率高め</a:t>
-            </a:r>
-          </a:p>
-        </p:txBody>
-      </p:sp>
-      <p:sp>
-        <p:nvSpPr>
-          <p:cNvPr id="33" name="Rectangle 32"/>
+          <p:cNvPr id="32" name="Rectangle 31"/>
           <p:cNvSpPr/>
           <p:nvPr/>
         </p:nvSpPr>
         <p:spPr>
           <a:xfrm>
-            <a:off x="4663440" y="2661192"/>
-            <a:ext cx="4160520" cy="360000"/>
+            <a:off x="182880" y="4041648"/>
+            <a:ext cx="55000" cy="580000"/>
           </a:xfrm>
           <a:prstGeom prst="rect">
             <a:avLst/>
           </a:prstGeom>
           <a:solidFill>
-            <a:srgbClr val="0E182C"/>
+            <a:srgbClr val="007AFF"/>
           </a:solidFill>
           <a:ln>
             <a:noFill/>
@@ -17217,35 +18116,70 @@
       </p:sp>
       <p:sp>
         <p:nvSpPr>
+          <p:cNvPr id="33" name="TextBox 32"/>
+          <p:cNvSpPr txBox="1"/>
+          <p:nvPr/>
+        </p:nvSpPr>
+        <p:spPr>
+          <a:xfrm>
+            <a:off x="411480" y="4087368"/>
+            <a:ext cx="8321040" cy="250000"/>
+          </a:xfrm>
+          <a:prstGeom prst="rect">
+            <a:avLst/>
+          </a:prstGeom>
+          <a:noFill/>
+        </p:spPr>
+        <p:txBody>
+          <a:bodyPr wrap="square">
+            <a:spAutoFit/>
+          </a:bodyPr>
+          <a:lstStyle/>
+          <a:p>
+            <a:pPr algn="l"/>
+            <a:r>
+              <a:rPr sz="950" b="1">
+                <a:solidFill>
+                  <a:srgbClr val="007AFF"/>
+                </a:solidFill>
+                <a:latin typeface="メイリオ"/>
+              </a:rPr>
+              <a:t>青島SGの設計意図：「到達した人だけが味わえる体験」として来店継続の最大動機を作る</a:t>
+            </a:r>
+          </a:p>
+        </p:txBody>
+      </p:sp>
+      <p:sp>
+        <p:nvSpPr>
           <p:cNvPr id="34" name="TextBox 33"/>
           <p:cNvSpPr txBox="1"/>
           <p:nvPr/>
         </p:nvSpPr>
         <p:spPr>
           <a:xfrm>
-            <a:off x="4754880" y="2691192"/>
-            <a:ext cx="380000" cy="300000"/>
-          </a:xfrm>
-          <a:prstGeom prst="rect">
-            <a:avLst/>
-          </a:prstGeom>
-          <a:noFill/>
-        </p:spPr>
-        <p:txBody>
-          <a:bodyPr wrap="none">
-            <a:spAutoFit/>
-          </a:bodyPr>
-          <a:lstStyle/>
-          <a:p>
-            <a:pPr algn="l"/>
-            <a:r>
-              <a:rPr sz="900" b="1">
-                <a:solidFill>
-                  <a:srgbClr val="FFD700"/>
-                </a:solidFill>
-                <a:latin typeface="メイリオ"/>
-              </a:rPr>
-              <a:t>型D</a:t>
+            <a:off x="411480" y="4389120"/>
+            <a:ext cx="8321040" cy="250000"/>
+          </a:xfrm>
+          <a:prstGeom prst="rect">
+            <a:avLst/>
+          </a:prstGeom>
+          <a:noFill/>
+        </p:spPr>
+        <p:txBody>
+          <a:bodyPr wrap="square">
+            <a:spAutoFit/>
+          </a:bodyPr>
+          <a:lstStyle/>
+          <a:p>
+            <a:pPr algn="l"/>
+            <a:r>
+              <a:rPr sz="850" b="0">
+                <a:solidFill>
+                  <a:srgbClr val="E0E8F0"/>
+                </a:solidFill>
+                <a:latin typeface="メイリオ"/>
+              </a:rPr>
+              <a:t>SG RUSHだけでも楽しめるが、青島SGを知ると「もう一度グランドスラムを取りたい」が生まれる。</a:t>
             </a:r>
           </a:p>
         </p:txBody>
@@ -17253,349 +18187,6 @@
       <p:sp>
         <p:nvSpPr>
           <p:cNvPr id="35" name="TextBox 34"/>
-          <p:cNvSpPr txBox="1"/>
-          <p:nvPr/>
-        </p:nvSpPr>
-        <p:spPr>
-          <a:xfrm>
-            <a:off x="5349240" y="2691192"/>
-            <a:ext cx="820000" cy="300000"/>
-          </a:xfrm>
-          <a:prstGeom prst="rect">
-            <a:avLst/>
-          </a:prstGeom>
-          <a:noFill/>
-        </p:spPr>
-        <p:txBody>
-          <a:bodyPr wrap="square">
-            <a:spAutoFit/>
-          </a:bodyPr>
-          <a:lstStyle/>
-          <a:p>
-            <a:pPr algn="ctr"/>
-            <a:r>
-              <a:rPr sz="1300" b="1">
-                <a:solidFill>
-                  <a:srgbClr val="FFD700"/>
-                </a:solidFill>
-                <a:latin typeface="メイリオ"/>
-              </a:rPr>
-              <a:t>90.2%</a:t>
-            </a:r>
-          </a:p>
-        </p:txBody>
-      </p:sp>
-      <p:sp>
-        <p:nvSpPr>
-          <p:cNvPr id="36" name="TextBox 35"/>
-          <p:cNvSpPr txBox="1"/>
-          <p:nvPr/>
-        </p:nvSpPr>
-        <p:spPr>
-          <a:xfrm>
-            <a:off x="6446520" y="2691192"/>
-            <a:ext cx="2240280" cy="300000"/>
-          </a:xfrm>
-          <a:prstGeom prst="rect">
-            <a:avLst/>
-          </a:prstGeom>
-          <a:noFill/>
-        </p:spPr>
-        <p:txBody>
-          <a:bodyPr wrap="square">
-            <a:spAutoFit/>
-          </a:bodyPr>
-          <a:lstStyle/>
-          <a:p>
-            <a:pPr algn="l"/>
-            <a:r>
-              <a:rPr sz="850" b="0">
-                <a:solidFill>
-                  <a:srgbClr val="E0E8F0"/>
-                </a:solidFill>
-                <a:latin typeface="メイリオ"/>
-              </a:rPr>
-              <a:t>継続率最高</a:t>
-            </a:r>
-          </a:p>
-        </p:txBody>
-      </p:sp>
-      <p:sp>
-        <p:nvSpPr>
-          <p:cNvPr id="37" name="Rectangle 36"/>
-          <p:cNvSpPr/>
-          <p:nvPr/>
-        </p:nvSpPr>
-        <p:spPr>
-          <a:xfrm>
-            <a:off x="4663440" y="3127248"/>
-            <a:ext cx="4160520" cy="820000"/>
-          </a:xfrm>
-          <a:prstGeom prst="rect">
-            <a:avLst/>
-          </a:prstGeom>
-          <a:solidFill>
-            <a:srgbClr val="000A22"/>
-          </a:solidFill>
-          <a:ln w="19050">
-            <a:solidFill>
-              <a:srgbClr val="007AFF"/>
-            </a:solidFill>
-          </a:ln>
-        </p:spPr>
-        <p:style>
-          <a:lnRef idx="1">
-            <a:schemeClr val="accent1"/>
-          </a:lnRef>
-          <a:fillRef idx="3">
-            <a:schemeClr val="accent1"/>
-          </a:fillRef>
-          <a:effectRef idx="2">
-            <a:schemeClr val="accent1"/>
-          </a:effectRef>
-          <a:fontRef idx="minor">
-            <a:schemeClr val="lt1"/>
-          </a:fontRef>
-        </p:style>
-        <p:txBody>
-          <a:bodyPr rtlCol="0" anchor="ctr"/>
-          <a:lstStyle/>
-          <a:p>
-            <a:pPr algn="ctr"/>
-          </a:p>
-        </p:txBody>
-      </p:sp>
-      <p:sp>
-        <p:nvSpPr>
-          <p:cNvPr id="38" name="TextBox 37"/>
-          <p:cNvSpPr txBox="1"/>
-          <p:nvPr/>
-        </p:nvSpPr>
-        <p:spPr>
-          <a:xfrm>
-            <a:off x="4773168" y="3182112"/>
-            <a:ext cx="3840480" cy="280000"/>
-          </a:xfrm>
-          <a:prstGeom prst="rect">
-            <a:avLst/>
-          </a:prstGeom>
-          <a:noFill/>
-        </p:spPr>
-        <p:txBody>
-          <a:bodyPr wrap="square">
-            <a:spAutoFit/>
-          </a:bodyPr>
-          <a:lstStyle/>
-          <a:p>
-            <a:pPr algn="l"/>
-            <a:r>
-              <a:rPr sz="950" b="1">
-                <a:solidFill>
-                  <a:srgbClr val="007AFF"/>
-                </a:solidFill>
-                <a:latin typeface="游明朝"/>
-              </a:rPr>
-              <a:t>継続率に漏れた場合</a:t>
-            </a:r>
-          </a:p>
-        </p:txBody>
-      </p:sp>
-      <p:sp>
-        <p:nvSpPr>
-          <p:cNvPr id="39" name="TextBox 38"/>
-          <p:cNvSpPr txBox="1"/>
-          <p:nvPr/>
-        </p:nvSpPr>
-        <p:spPr>
-          <a:xfrm>
-            <a:off x="4773168" y="3493008"/>
-            <a:ext cx="3840480" cy="420000"/>
-          </a:xfrm>
-          <a:prstGeom prst="rect">
-            <a:avLst/>
-          </a:prstGeom>
-          <a:noFill/>
-        </p:spPr>
-        <p:txBody>
-          <a:bodyPr wrap="square">
-            <a:spAutoFit/>
-          </a:bodyPr>
-          <a:lstStyle/>
-          <a:p>
-            <a:pPr algn="l"/>
-            <a:r>
-              <a:rPr sz="850" b="0">
-                <a:solidFill>
-                  <a:srgbClr val="E0E8F0"/>
-                </a:solidFill>
-                <a:latin typeface="メイリオ"/>
-              </a:rPr>
-              <a:t>青島VS波多野へ移行
-→ 勝利で上位AT「青島SG」突入
-（エキシビション失敗が青島SG入口になる）</a:t>
-            </a:r>
-          </a:p>
-        </p:txBody>
-      </p:sp>
-      <p:sp>
-        <p:nvSpPr>
-          <p:cNvPr id="40" name="Rectangle 39"/>
-          <p:cNvSpPr/>
-          <p:nvPr/>
-        </p:nvSpPr>
-        <p:spPr>
-          <a:xfrm>
-            <a:off x="182880" y="4069080"/>
-            <a:ext cx="8778240" cy="560000"/>
-          </a:xfrm>
-          <a:prstGeom prst="rect">
-            <a:avLst/>
-          </a:prstGeom>
-          <a:solidFill>
-            <a:srgbClr val="101006"/>
-          </a:solidFill>
-          <a:ln>
-            <a:noFill/>
-          </a:ln>
-        </p:spPr>
-        <p:style>
-          <a:lnRef idx="1">
-            <a:schemeClr val="accent1"/>
-          </a:lnRef>
-          <a:fillRef idx="3">
-            <a:schemeClr val="accent1"/>
-          </a:fillRef>
-          <a:effectRef idx="2">
-            <a:schemeClr val="accent1"/>
-          </a:effectRef>
-          <a:fontRef idx="minor">
-            <a:schemeClr val="lt1"/>
-          </a:fontRef>
-        </p:style>
-        <p:txBody>
-          <a:bodyPr rtlCol="0" anchor="ctr"/>
-          <a:lstStyle/>
-          <a:p>
-            <a:pPr algn="ctr"/>
-          </a:p>
-        </p:txBody>
-      </p:sp>
-      <p:sp>
-        <p:nvSpPr>
-          <p:cNvPr id="41" name="Rectangle 40"/>
-          <p:cNvSpPr/>
-          <p:nvPr/>
-        </p:nvSpPr>
-        <p:spPr>
-          <a:xfrm>
-            <a:off x="182880" y="4069080"/>
-            <a:ext cx="55000" cy="560000"/>
-          </a:xfrm>
-          <a:prstGeom prst="rect">
-            <a:avLst/>
-          </a:prstGeom>
-          <a:solidFill>
-            <a:srgbClr val="C8A840"/>
-          </a:solidFill>
-          <a:ln>
-            <a:noFill/>
-          </a:ln>
-        </p:spPr>
-        <p:style>
-          <a:lnRef idx="1">
-            <a:schemeClr val="accent1"/>
-          </a:lnRef>
-          <a:fillRef idx="3">
-            <a:schemeClr val="accent1"/>
-          </a:fillRef>
-          <a:effectRef idx="2">
-            <a:schemeClr val="accent1"/>
-          </a:effectRef>
-          <a:fontRef idx="minor">
-            <a:schemeClr val="lt1"/>
-          </a:fontRef>
-        </p:style>
-        <p:txBody>
-          <a:bodyPr rtlCol="0" anchor="ctr"/>
-          <a:lstStyle/>
-          <a:p>
-            <a:pPr algn="ctr"/>
-          </a:p>
-        </p:txBody>
-      </p:sp>
-      <p:sp>
-        <p:nvSpPr>
-          <p:cNvPr id="42" name="TextBox 41"/>
-          <p:cNvSpPr txBox="1"/>
-          <p:nvPr/>
-        </p:nvSpPr>
-        <p:spPr>
-          <a:xfrm>
-            <a:off x="411480" y="4114800"/>
-            <a:ext cx="8321040" cy="250000"/>
-          </a:xfrm>
-          <a:prstGeom prst="rect">
-            <a:avLst/>
-          </a:prstGeom>
-          <a:noFill/>
-        </p:spPr>
-        <p:txBody>
-          <a:bodyPr wrap="square">
-            <a:spAutoFit/>
-          </a:bodyPr>
-          <a:lstStyle/>
-          <a:p>
-            <a:pPr algn="l"/>
-            <a:r>
-              <a:rPr sz="950" b="1">
-                <a:solidFill>
-                  <a:srgbClr val="C8A840"/>
-                </a:solidFill>
-                <a:latin typeface="メイリオ"/>
-              </a:rPr>
-              <a:t>エキシビションの巧みな設計：「継続に漏れる = 青島SGへの入口」という逆転構造</a:t>
-            </a:r>
-          </a:p>
-        </p:txBody>
-      </p:sp>
-      <p:sp>
-        <p:nvSpPr>
-          <p:cNvPr id="43" name="TextBox 42"/>
-          <p:cNvSpPr txBox="1"/>
-          <p:nvPr/>
-        </p:nvSpPr>
-        <p:spPr>
-          <a:xfrm>
-            <a:off x="411480" y="4416552"/>
-            <a:ext cx="8321040" cy="250000"/>
-          </a:xfrm>
-          <a:prstGeom prst="rect">
-            <a:avLst/>
-          </a:prstGeom>
-          <a:noFill/>
-        </p:spPr>
-        <p:txBody>
-          <a:bodyPr wrap="square">
-            <a:spAutoFit/>
-          </a:bodyPr>
-          <a:lstStyle/>
-          <a:p>
-            <a:pPr algn="l"/>
-            <a:r>
-              <a:rPr sz="850" b="0">
-                <a:solidFill>
-                  <a:srgbClr val="E0E8F0"/>
-                </a:solidFill>
-                <a:latin typeface="メイリオ"/>
-              </a:rPr>
-              <a:t>エキシビションで多く続けば出玉増、漏れても青島SGチャンス。どちらに転んでも「良いことがある」設計。</a:t>
-            </a:r>
-          </a:p>
-        </p:txBody>
-      </p:sp>
-      <p:sp>
-        <p:nvSpPr>
-          <p:cNvPr id="44" name="TextBox 43"/>
           <p:cNvSpPr txBox="1"/>
           <p:nvPr/>
         </p:nvSpPr>
@@ -17786,7 +18377,7 @@
                 </a:solidFill>
                 <a:latin typeface="游明朝"/>
               </a:rPr>
-              <a:t>設計哲学  ──  なぜモンキーターンVは面白いのか</a:t>
+              <a:t>グランドスラム × エキシビションレース  ──  8セット完走の先にあるもの</a:t>
             </a:r>
           </a:p>
         </p:txBody>
@@ -17800,17 +18391,17 @@
         <p:spPr>
           <a:xfrm>
             <a:off x="182880" y="777240"/>
-            <a:ext cx="2743200" cy="3154680"/>
+            <a:ext cx="4160520" cy="3200400"/>
           </a:xfrm>
           <a:prstGeom prst="rect">
             <a:avLst/>
           </a:prstGeom>
           <a:solidFill>
-            <a:srgbClr val="041420"/>
+            <a:srgbClr val="0C142C"/>
           </a:solidFill>
           <a:ln w="25400">
             <a:solidFill>
-              <a:srgbClr val="14887C"/>
+              <a:srgbClr val="C8A840"/>
             </a:solidFill>
           </a:ln>
         </p:spPr>
@@ -17844,29 +18435,29 @@
         </p:nvSpPr>
         <p:spPr>
           <a:xfrm>
-            <a:off x="262880" y="841248"/>
-            <a:ext cx="2560320" cy="340000"/>
-          </a:xfrm>
-          <a:prstGeom prst="rect">
-            <a:avLst/>
-          </a:prstGeom>
-          <a:noFill/>
-        </p:spPr>
-        <p:txBody>
-          <a:bodyPr wrap="square">
-            <a:spAutoFit/>
-          </a:bodyPr>
-          <a:lstStyle/>
-          <a:p>
-            <a:pPr algn="l"/>
-            <a:r>
-              <a:rPr sz="1000" b="1">
-                <a:solidFill>
-                  <a:srgbClr val="14887C"/>
+            <a:off x="292608" y="841248"/>
+            <a:ext cx="3840480" cy="320000"/>
+          </a:xfrm>
+          <a:prstGeom prst="rect">
+            <a:avLst/>
+          </a:prstGeom>
+          <a:noFill/>
+        </p:spPr>
+        <p:txBody>
+          <a:bodyPr wrap="square">
+            <a:spAutoFit/>
+          </a:bodyPr>
+          <a:lstStyle/>
+          <a:p>
+            <a:pPr algn="l"/>
+            <a:r>
+              <a:rPr sz="1100" b="1">
+                <a:solidFill>
+                  <a:srgbClr val="C8A840"/>
                 </a:solidFill>
                 <a:latin typeface="游明朝"/>
               </a:rPr>
-              <a:t>複層的な目標設計</a:t>
+              <a:t>グランドスラム（8セット完走）</a:t>
             </a:r>
           </a:p>
         </p:txBody>
@@ -17879,34 +18470,29 @@
         </p:nvSpPr>
         <p:spPr>
           <a:xfrm>
-            <a:off x="262880" y="1280160"/>
-            <a:ext cx="2560320" cy="2377440"/>
-          </a:xfrm>
-          <a:prstGeom prst="rect">
-            <a:avLst/>
-          </a:prstGeom>
-          <a:noFill/>
-        </p:spPr>
-        <p:txBody>
-          <a:bodyPr wrap="square">
-            <a:spAutoFit/>
-          </a:bodyPr>
-          <a:lstStyle/>
-          <a:p>
-            <a:pPr algn="l"/>
-            <a:r>
-              <a:rPr sz="900" b="0">
+            <a:off x="292608" y="1234440"/>
+            <a:ext cx="3840480" cy="280000"/>
+          </a:xfrm>
+          <a:prstGeom prst="rect">
+            <a:avLst/>
+          </a:prstGeom>
+          <a:noFill/>
+        </p:spPr>
+        <p:txBody>
+          <a:bodyPr wrap="square">
+            <a:spAutoFit/>
+          </a:bodyPr>
+          <a:lstStyle/>
+          <a:p>
+            <a:pPr algn="l"/>
+            <a:r>
+              <a:rPr sz="850" b="0">
                 <a:solidFill>
                   <a:srgbClr val="E0E8F0"/>
                 </a:solidFill>
                 <a:latin typeface="メイリオ"/>
               </a:rPr>
-              <a:t>1G先：次の激走ポイント加算
-1AT先：次のセット継続
-1日先：グランドスラム達成
-将来：上位AT青島SG体験
-「今ここ」と「将来」を
-同時に意識させる設計</a:t>
+              <a:t>SGバトル（青島VS波多野）を8回連続で勝利した状態</a:t>
             </a:r>
           </a:p>
         </p:txBody>
@@ -17919,19 +18505,17 @@
         </p:nvSpPr>
         <p:spPr>
           <a:xfrm>
-            <a:off x="3246120" y="777240"/>
-            <a:ext cx="2743200" cy="3154680"/>
+            <a:off x="256032" y="1627632"/>
+            <a:ext cx="55000" cy="560000"/>
           </a:xfrm>
           <a:prstGeom prst="rect">
             <a:avLst/>
           </a:prstGeom>
           <a:solidFill>
-            <a:srgbClr val="181000"/>
+            <a:srgbClr val="FFA020"/>
           </a:solidFill>
-          <a:ln w="25400">
-            <a:solidFill>
-              <a:srgbClr val="FFA020"/>
-            </a:solidFill>
+          <a:ln>
+            <a:noFill/>
           </a:ln>
         </p:spPr>
         <p:style>
@@ -17964,29 +18548,29 @@
         </p:nvSpPr>
         <p:spPr>
           <a:xfrm>
-            <a:off x="3326120" y="841248"/>
-            <a:ext cx="2560320" cy="340000"/>
-          </a:xfrm>
-          <a:prstGeom prst="rect">
-            <a:avLst/>
-          </a:prstGeom>
-          <a:noFill/>
-        </p:spPr>
-        <p:txBody>
-          <a:bodyPr wrap="square">
-            <a:spAutoFit/>
-          </a:bodyPr>
-          <a:lstStyle/>
-          <a:p>
-            <a:pPr algn="l"/>
-            <a:r>
-              <a:rPr sz="1000" b="1">
+            <a:off x="475488" y="1657632"/>
+            <a:ext cx="3657600" cy="260000"/>
+          </a:xfrm>
+          <a:prstGeom prst="rect">
+            <a:avLst/>
+          </a:prstGeom>
+          <a:noFill/>
+        </p:spPr>
+        <p:txBody>
+          <a:bodyPr wrap="square">
+            <a:spAutoFit/>
+          </a:bodyPr>
+          <a:lstStyle/>
+          <a:p>
+            <a:pPr algn="l"/>
+            <a:r>
+              <a:rPr sz="950" b="1">
                 <a:solidFill>
                   <a:srgbClr val="FFA020"/>
                 </a:solidFill>
-                <a:latin typeface="游明朝"/>
-              </a:rPr>
-              <a:t>失敗を無駄にしない</a:t>
+                <a:latin typeface="メイリオ"/>
+              </a:rPr>
+              <a:t>積み上げの快感</a:t>
             </a:r>
           </a:p>
         </p:txBody>
@@ -17999,36 +18583,30 @@
         </p:nvSpPr>
         <p:spPr>
           <a:xfrm>
-            <a:off x="3326120" y="1280160"/>
-            <a:ext cx="2560320" cy="2377440"/>
-          </a:xfrm>
-          <a:prstGeom prst="rect">
-            <a:avLst/>
-          </a:prstGeom>
-          <a:noFill/>
-        </p:spPr>
-        <p:txBody>
-          <a:bodyPr wrap="square">
-            <a:spAutoFit/>
-          </a:bodyPr>
-          <a:lstStyle/>
-          <a:p>
-            <a:pPr algn="l"/>
-            <a:r>
-              <a:rPr sz="900" b="0">
+            <a:off x="475488" y="1922632"/>
+            <a:ext cx="3657600" cy="280000"/>
+          </a:xfrm>
+          <a:prstGeom prst="rect">
+            <a:avLst/>
+          </a:prstGeom>
+          <a:noFill/>
+        </p:spPr>
+        <p:txBody>
+          <a:bodyPr wrap="square">
+            <a:spAutoFit/>
+          </a:bodyPr>
+          <a:lstStyle/>
+          <a:p>
+            <a:pPr algn="l"/>
+            <a:r>
+              <a:rPr sz="850" b="0">
                 <a:solidFill>
                   <a:srgbClr val="E0E8F0"/>
                 </a:solidFill>
                 <a:latin typeface="メイリオ"/>
               </a:rPr>
-              <a:t>CZ失敗
-→ グランドスラムCH（救済）
-エキシビション漏れ
-→ 青島SG入口
-激走チャージ天井
-→ CZ確定
-どの失敗にも
-「次の期待」が残る</a:t>
+              <a:t>1セット目から8セット目まで
+「まだ続くかも」を8回繰り返す体験</a:t>
             </a:r>
           </a:p>
         </p:txBody>
@@ -18041,19 +18619,17 @@
         </p:nvSpPr>
         <p:spPr>
           <a:xfrm>
-            <a:off x="6309360" y="777240"/>
-            <a:ext cx="2743200" cy="3154680"/>
+            <a:off x="256032" y="2227632"/>
+            <a:ext cx="55000" cy="560000"/>
           </a:xfrm>
           <a:prstGeom prst="rect">
             <a:avLst/>
           </a:prstGeom>
           <a:solidFill>
-            <a:srgbClr val="001020"/>
+            <a:srgbClr val="C8A840"/>
           </a:solidFill>
-          <a:ln w="25400">
-            <a:solidFill>
-              <a:srgbClr val="00C0C8"/>
-            </a:solidFill>
+          <a:ln>
+            <a:noFill/>
           </a:ln>
         </p:spPr>
         <p:style>
@@ -18086,29 +18662,29 @@
         </p:nvSpPr>
         <p:spPr>
           <a:xfrm>
-            <a:off x="6389360" y="841248"/>
-            <a:ext cx="2560320" cy="340000"/>
-          </a:xfrm>
-          <a:prstGeom prst="rect">
-            <a:avLst/>
-          </a:prstGeom>
-          <a:noFill/>
-        </p:spPr>
-        <p:txBody>
-          <a:bodyPr wrap="square">
-            <a:spAutoFit/>
-          </a:bodyPr>
-          <a:lstStyle/>
-          <a:p>
-            <a:pPr algn="l"/>
-            <a:r>
-              <a:rPr sz="1000" b="1">
-                <a:solidFill>
-                  <a:srgbClr val="00C0C8"/>
-                </a:solidFill>
-                <a:latin typeface="游明朝"/>
-              </a:rPr>
-              <a:t>「読める」楽しさ</a:t>
+            <a:off x="475488" y="2257632"/>
+            <a:ext cx="3657600" cy="260000"/>
+          </a:xfrm>
+          <a:prstGeom prst="rect">
+            <a:avLst/>
+          </a:prstGeom>
+          <a:noFill/>
+        </p:spPr>
+        <p:txBody>
+          <a:bodyPr wrap="square">
+            <a:spAutoFit/>
+          </a:bodyPr>
+          <a:lstStyle/>
+          <a:p>
+            <a:pPr algn="l"/>
+            <a:r>
+              <a:rPr sz="950" b="1">
+                <a:solidFill>
+                  <a:srgbClr val="C8A840"/>
+                </a:solidFill>
+                <a:latin typeface="メイリオ"/>
+              </a:rPr>
+              <a:t>シナリオとの連動</a:t>
             </a:r>
           </a:p>
         </p:txBody>
@@ -18121,35 +18697,30 @@
         </p:nvSpPr>
         <p:spPr>
           <a:xfrm>
-            <a:off x="6389360" y="1280160"/>
-            <a:ext cx="2560320" cy="2377440"/>
-          </a:xfrm>
-          <a:prstGeom prst="rect">
-            <a:avLst/>
-          </a:prstGeom>
-          <a:noFill/>
-        </p:spPr>
-        <p:txBody>
-          <a:bodyPr wrap="square">
-            <a:spAutoFit/>
-          </a:bodyPr>
-          <a:lstStyle/>
-          <a:p>
-            <a:pPr algn="l"/>
-            <a:r>
-              <a:rPr sz="900" b="0">
+            <a:off x="475488" y="2522632"/>
+            <a:ext cx="3657600" cy="280000"/>
+          </a:xfrm>
+          <a:prstGeom prst="rect">
+            <a:avLst/>
+          </a:prstGeom>
+          <a:noFill/>
+        </p:spPr>
+        <p:txBody>
+          <a:bodyPr wrap="square">
+            <a:spAutoFit/>
+          </a:bodyPr>
+          <a:lstStyle/>
+          <a:p>
+            <a:pPr algn="l"/>
+            <a:r>
+              <a:rPr sz="850" b="0">
                 <a:solidFill>
                   <a:srgbClr val="E0E8F0"/>
                 </a:solidFill>
                 <a:latin typeface="メイリオ"/>
               </a:rPr>
-              <a:t>シナリオはランプで示唆
-周期はモードで予測可能
-ライバルモードは滞在確定
-「完全にわかる」ではなく
-「ある程度読める」バランス
-推測が当たる快感が
-遊技を豊かにする</a:t>
+              <a:t>艇王シナリオなら達成がほぼ確実
+低シナリオでの達成が「奇跡」体験</a:t>
             </a:r>
           </a:p>
         </p:txBody>
@@ -18162,14 +18733,14 @@
         </p:nvSpPr>
         <p:spPr>
           <a:xfrm>
-            <a:off x="182880" y="4023360"/>
-            <a:ext cx="8778240" cy="40000"/>
+            <a:off x="256032" y="2827632"/>
+            <a:ext cx="55000" cy="560000"/>
           </a:xfrm>
           <a:prstGeom prst="rect">
             <a:avLst/>
           </a:prstGeom>
           <a:solidFill>
-            <a:srgbClr val="14887C"/>
+            <a:srgbClr val="00C0C8"/>
           </a:solidFill>
           <a:ln>
             <a:noFill/>
@@ -18199,23 +18770,96 @@
       </p:sp>
       <p:sp>
         <p:nvSpPr>
-          <p:cNvPr id="16" name="Rectangle 15"/>
+          <p:cNvPr id="16" name="TextBox 15"/>
+          <p:cNvSpPr txBox="1"/>
+          <p:nvPr/>
+        </p:nvSpPr>
+        <p:spPr>
+          <a:xfrm>
+            <a:off x="475488" y="2857632"/>
+            <a:ext cx="3657600" cy="260000"/>
+          </a:xfrm>
+          <a:prstGeom prst="rect">
+            <a:avLst/>
+          </a:prstGeom>
+          <a:noFill/>
+        </p:spPr>
+        <p:txBody>
+          <a:bodyPr wrap="square">
+            <a:spAutoFit/>
+          </a:bodyPr>
+          <a:lstStyle/>
+          <a:p>
+            <a:pPr algn="l"/>
+            <a:r>
+              <a:rPr sz="950" b="1">
+                <a:solidFill>
+                  <a:srgbClr val="00C0C8"/>
+                </a:solidFill>
+                <a:latin typeface="メイリオ"/>
+              </a:rPr>
+              <a:t>達成後の特典</a:t>
+            </a:r>
+          </a:p>
+        </p:txBody>
+      </p:sp>
+      <p:sp>
+        <p:nvSpPr>
+          <p:cNvPr id="17" name="TextBox 16"/>
+          <p:cNvSpPr txBox="1"/>
+          <p:nvPr/>
+        </p:nvSpPr>
+        <p:spPr>
+          <a:xfrm>
+            <a:off x="475488" y="3122632"/>
+            <a:ext cx="3657600" cy="280000"/>
+          </a:xfrm>
+          <a:prstGeom prst="rect">
+            <a:avLst/>
+          </a:prstGeom>
+          <a:noFill/>
+        </p:spPr>
+        <p:txBody>
+          <a:bodyPr wrap="square">
+            <a:spAutoFit/>
+          </a:bodyPr>
+          <a:lstStyle/>
+          <a:p>
+            <a:pPr algn="l"/>
+            <a:r>
+              <a:rPr sz="850" b="0">
+                <a:solidFill>
+                  <a:srgbClr val="E0E8F0"/>
+                </a:solidFill>
+                <a:latin typeface="メイリオ"/>
+              </a:rPr>
+              <a:t>エキシビションレースへ自動移行
+青島SGへの入口が開く</a:t>
+            </a:r>
+          </a:p>
+        </p:txBody>
+      </p:sp>
+      <p:sp>
+        <p:nvSpPr>
+          <p:cNvPr id="18" name="Rectangle 17"/>
           <p:cNvSpPr/>
           <p:nvPr/>
         </p:nvSpPr>
         <p:spPr>
           <a:xfrm>
-            <a:off x="182880" y="4096512"/>
-            <a:ext cx="8778240" cy="640000"/>
+            <a:off x="4572000" y="777240"/>
+            <a:ext cx="4343400" cy="3200400"/>
           </a:xfrm>
           <a:prstGeom prst="rect">
             <a:avLst/>
           </a:prstGeom>
           <a:solidFill>
-            <a:srgbClr val="061220"/>
+            <a:srgbClr val="0C142C"/>
           </a:solidFill>
-          <a:ln>
-            <a:noFill/>
+          <a:ln w="19050">
+            <a:solidFill>
+              <a:srgbClr val="FFA020"/>
+            </a:solidFill>
           </a:ln>
         </p:spPr>
         <p:style>
@@ -18242,14 +18886,721 @@
       </p:sp>
       <p:sp>
         <p:nvSpPr>
-          <p:cNvPr id="17" name="TextBox 16"/>
-          <p:cNvSpPr txBox="1"/>
-          <p:nvPr/>
-        </p:nvSpPr>
-        <p:spPr>
-          <a:xfrm>
-            <a:off x="320040" y="4142232"/>
-            <a:ext cx="8412480" cy="270000"/>
+          <p:cNvPr id="19" name="TextBox 18"/>
+          <p:cNvSpPr txBox="1"/>
+          <p:nvPr/>
+        </p:nvSpPr>
+        <p:spPr>
+          <a:xfrm>
+            <a:off x="4681728" y="841248"/>
+            <a:ext cx="4114800" cy="320000"/>
+          </a:xfrm>
+          <a:prstGeom prst="rect">
+            <a:avLst/>
+          </a:prstGeom>
+          <a:noFill/>
+        </p:spPr>
+        <p:txBody>
+          <a:bodyPr wrap="square">
+            <a:spAutoFit/>
+          </a:bodyPr>
+          <a:lstStyle/>
+          <a:p>
+            <a:pPr algn="l"/>
+            <a:r>
+              <a:rPr sz="1100" b="1">
+                <a:solidFill>
+                  <a:srgbClr val="FFA020"/>
+                </a:solidFill>
+                <a:latin typeface="游明朝"/>
+              </a:rPr>
+              <a:t>エキシビションレース</a:t>
+            </a:r>
+          </a:p>
+        </p:txBody>
+      </p:sp>
+      <p:sp>
+        <p:nvSpPr>
+          <p:cNvPr id="20" name="TextBox 19"/>
+          <p:cNvSpPr txBox="1"/>
+          <p:nvPr/>
+        </p:nvSpPr>
+        <p:spPr>
+          <a:xfrm>
+            <a:off x="4681728" y="1216152"/>
+            <a:ext cx="4114800" cy="250000"/>
+          </a:xfrm>
+          <a:prstGeom prst="rect">
+            <a:avLst/>
+          </a:prstGeom>
+          <a:noFill/>
+        </p:spPr>
+        <p:txBody>
+          <a:bodyPr wrap="square">
+            <a:spAutoFit/>
+          </a:bodyPr>
+          <a:lstStyle/>
+          <a:p>
+            <a:pPr algn="l"/>
+            <a:r>
+              <a:rPr sz="850" b="0">
+                <a:solidFill>
+                  <a:srgbClr val="E0E8F0"/>
+                </a:solidFill>
+                <a:latin typeface="メイリオ"/>
+              </a:rPr>
+              <a:t>グランドスラム後の継続率固定AT区間</a:t>
+            </a:r>
+          </a:p>
+        </p:txBody>
+      </p:sp>
+      <p:sp>
+        <p:nvSpPr>
+          <p:cNvPr id="21" name="Rectangle 20"/>
+          <p:cNvSpPr/>
+          <p:nvPr/>
+        </p:nvSpPr>
+        <p:spPr>
+          <a:xfrm>
+            <a:off x="4663440" y="1536192"/>
+            <a:ext cx="4160520" cy="360000"/>
+          </a:xfrm>
+          <a:prstGeom prst="rect">
+            <a:avLst/>
+          </a:prstGeom>
+          <a:solidFill>
+            <a:srgbClr val="0A1424"/>
+          </a:solidFill>
+          <a:ln>
+            <a:noFill/>
+          </a:ln>
+        </p:spPr>
+        <p:style>
+          <a:lnRef idx="1">
+            <a:schemeClr val="accent1"/>
+          </a:lnRef>
+          <a:fillRef idx="3">
+            <a:schemeClr val="accent1"/>
+          </a:fillRef>
+          <a:effectRef idx="2">
+            <a:schemeClr val="accent1"/>
+          </a:effectRef>
+          <a:fontRef idx="minor">
+            <a:schemeClr val="lt1"/>
+          </a:fontRef>
+        </p:style>
+        <p:txBody>
+          <a:bodyPr rtlCol="0" anchor="ctr"/>
+          <a:lstStyle/>
+          <a:p>
+            <a:pPr algn="ctr"/>
+          </a:p>
+        </p:txBody>
+      </p:sp>
+      <p:sp>
+        <p:nvSpPr>
+          <p:cNvPr id="22" name="TextBox 21"/>
+          <p:cNvSpPr txBox="1"/>
+          <p:nvPr/>
+        </p:nvSpPr>
+        <p:spPr>
+          <a:xfrm>
+            <a:off x="4754880" y="1566192"/>
+            <a:ext cx="380000" cy="300000"/>
+          </a:xfrm>
+          <a:prstGeom prst="rect">
+            <a:avLst/>
+          </a:prstGeom>
+          <a:noFill/>
+        </p:spPr>
+        <p:txBody>
+          <a:bodyPr wrap="none">
+            <a:spAutoFit/>
+          </a:bodyPr>
+          <a:lstStyle/>
+          <a:p>
+            <a:pPr algn="l"/>
+            <a:r>
+              <a:rPr sz="900" b="1">
+                <a:solidFill>
+                  <a:srgbClr val="BBBBBB"/>
+                </a:solidFill>
+                <a:latin typeface="メイリオ"/>
+              </a:rPr>
+              <a:t>型A</a:t>
+            </a:r>
+          </a:p>
+        </p:txBody>
+      </p:sp>
+      <p:sp>
+        <p:nvSpPr>
+          <p:cNvPr id="23" name="TextBox 22"/>
+          <p:cNvSpPr txBox="1"/>
+          <p:nvPr/>
+        </p:nvSpPr>
+        <p:spPr>
+          <a:xfrm>
+            <a:off x="5349240" y="1566192"/>
+            <a:ext cx="820000" cy="300000"/>
+          </a:xfrm>
+          <a:prstGeom prst="rect">
+            <a:avLst/>
+          </a:prstGeom>
+          <a:noFill/>
+        </p:spPr>
+        <p:txBody>
+          <a:bodyPr wrap="square">
+            <a:spAutoFit/>
+          </a:bodyPr>
+          <a:lstStyle/>
+          <a:p>
+            <a:pPr algn="ctr"/>
+            <a:r>
+              <a:rPr sz="1300" b="1">
+                <a:solidFill>
+                  <a:srgbClr val="BBBBBB"/>
+                </a:solidFill>
+                <a:latin typeface="メイリオ"/>
+              </a:rPr>
+              <a:t>50.0%</a:t>
+            </a:r>
+          </a:p>
+        </p:txBody>
+      </p:sp>
+      <p:sp>
+        <p:nvSpPr>
+          <p:cNvPr id="24" name="TextBox 23"/>
+          <p:cNvSpPr txBox="1"/>
+          <p:nvPr/>
+        </p:nvSpPr>
+        <p:spPr>
+          <a:xfrm>
+            <a:off x="6446520" y="1566192"/>
+            <a:ext cx="2240280" cy="300000"/>
+          </a:xfrm>
+          <a:prstGeom prst="rect">
+            <a:avLst/>
+          </a:prstGeom>
+          <a:noFill/>
+        </p:spPr>
+        <p:txBody>
+          <a:bodyPr wrap="square">
+            <a:spAutoFit/>
+          </a:bodyPr>
+          <a:lstStyle/>
+          <a:p>
+            <a:pPr algn="l"/>
+            <a:r>
+              <a:rPr sz="850" b="0">
+                <a:solidFill>
+                  <a:srgbClr val="E0E8F0"/>
+                </a:solidFill>
+                <a:latin typeface="メイリオ"/>
+              </a:rPr>
+              <a:t>継続率低め</a:t>
+            </a:r>
+          </a:p>
+        </p:txBody>
+      </p:sp>
+      <p:sp>
+        <p:nvSpPr>
+          <p:cNvPr id="25" name="Rectangle 24"/>
+          <p:cNvSpPr/>
+          <p:nvPr/>
+        </p:nvSpPr>
+        <p:spPr>
+          <a:xfrm>
+            <a:off x="4663440" y="1911192"/>
+            <a:ext cx="4160520" cy="360000"/>
+          </a:xfrm>
+          <a:prstGeom prst="rect">
+            <a:avLst/>
+          </a:prstGeom>
+          <a:solidFill>
+            <a:srgbClr val="0E182C"/>
+          </a:solidFill>
+          <a:ln>
+            <a:noFill/>
+          </a:ln>
+        </p:spPr>
+        <p:style>
+          <a:lnRef idx="1">
+            <a:schemeClr val="accent1"/>
+          </a:lnRef>
+          <a:fillRef idx="3">
+            <a:schemeClr val="accent1"/>
+          </a:fillRef>
+          <a:effectRef idx="2">
+            <a:schemeClr val="accent1"/>
+          </a:effectRef>
+          <a:fontRef idx="minor">
+            <a:schemeClr val="lt1"/>
+          </a:fontRef>
+        </p:style>
+        <p:txBody>
+          <a:bodyPr rtlCol="0" anchor="ctr"/>
+          <a:lstStyle/>
+          <a:p>
+            <a:pPr algn="ctr"/>
+          </a:p>
+        </p:txBody>
+      </p:sp>
+      <p:sp>
+        <p:nvSpPr>
+          <p:cNvPr id="26" name="TextBox 25"/>
+          <p:cNvSpPr txBox="1"/>
+          <p:nvPr/>
+        </p:nvSpPr>
+        <p:spPr>
+          <a:xfrm>
+            <a:off x="4754880" y="1941192"/>
+            <a:ext cx="380000" cy="300000"/>
+          </a:xfrm>
+          <a:prstGeom prst="rect">
+            <a:avLst/>
+          </a:prstGeom>
+          <a:noFill/>
+        </p:spPr>
+        <p:txBody>
+          <a:bodyPr wrap="none">
+            <a:spAutoFit/>
+          </a:bodyPr>
+          <a:lstStyle/>
+          <a:p>
+            <a:pPr algn="l"/>
+            <a:r>
+              <a:rPr sz="900" b="1">
+                <a:solidFill>
+                  <a:srgbClr val="FFA020"/>
+                </a:solidFill>
+                <a:latin typeface="メイリオ"/>
+              </a:rPr>
+              <a:t>型B</a:t>
+            </a:r>
+          </a:p>
+        </p:txBody>
+      </p:sp>
+      <p:sp>
+        <p:nvSpPr>
+          <p:cNvPr id="27" name="TextBox 26"/>
+          <p:cNvSpPr txBox="1"/>
+          <p:nvPr/>
+        </p:nvSpPr>
+        <p:spPr>
+          <a:xfrm>
+            <a:off x="5349240" y="1941192"/>
+            <a:ext cx="820000" cy="300000"/>
+          </a:xfrm>
+          <a:prstGeom prst="rect">
+            <a:avLst/>
+          </a:prstGeom>
+          <a:noFill/>
+        </p:spPr>
+        <p:txBody>
+          <a:bodyPr wrap="square">
+            <a:spAutoFit/>
+          </a:bodyPr>
+          <a:lstStyle/>
+          <a:p>
+            <a:pPr algn="ctr"/>
+            <a:r>
+              <a:rPr sz="1300" b="1">
+                <a:solidFill>
+                  <a:srgbClr val="FFA020"/>
+                </a:solidFill>
+                <a:latin typeface="メイリオ"/>
+              </a:rPr>
+              <a:t>66.4%</a:t>
+            </a:r>
+          </a:p>
+        </p:txBody>
+      </p:sp>
+      <p:sp>
+        <p:nvSpPr>
+          <p:cNvPr id="28" name="TextBox 27"/>
+          <p:cNvSpPr txBox="1"/>
+          <p:nvPr/>
+        </p:nvSpPr>
+        <p:spPr>
+          <a:xfrm>
+            <a:off x="6446520" y="1941192"/>
+            <a:ext cx="2240280" cy="300000"/>
+          </a:xfrm>
+          <a:prstGeom prst="rect">
+            <a:avLst/>
+          </a:prstGeom>
+          <a:noFill/>
+        </p:spPr>
+        <p:txBody>
+          <a:bodyPr wrap="square">
+            <a:spAutoFit/>
+          </a:bodyPr>
+          <a:lstStyle/>
+          <a:p>
+            <a:pPr algn="l"/>
+            <a:r>
+              <a:rPr sz="850" b="0">
+                <a:solidFill>
+                  <a:srgbClr val="E0E8F0"/>
+                </a:solidFill>
+                <a:latin typeface="メイリオ"/>
+              </a:rPr>
+              <a:t>継続率中</a:t>
+            </a:r>
+          </a:p>
+        </p:txBody>
+      </p:sp>
+      <p:sp>
+        <p:nvSpPr>
+          <p:cNvPr id="29" name="Rectangle 28"/>
+          <p:cNvSpPr/>
+          <p:nvPr/>
+        </p:nvSpPr>
+        <p:spPr>
+          <a:xfrm>
+            <a:off x="4663440" y="2286192"/>
+            <a:ext cx="4160520" cy="360000"/>
+          </a:xfrm>
+          <a:prstGeom prst="rect">
+            <a:avLst/>
+          </a:prstGeom>
+          <a:solidFill>
+            <a:srgbClr val="0A1424"/>
+          </a:solidFill>
+          <a:ln>
+            <a:noFill/>
+          </a:ln>
+        </p:spPr>
+        <p:style>
+          <a:lnRef idx="1">
+            <a:schemeClr val="accent1"/>
+          </a:lnRef>
+          <a:fillRef idx="3">
+            <a:schemeClr val="accent1"/>
+          </a:fillRef>
+          <a:effectRef idx="2">
+            <a:schemeClr val="accent1"/>
+          </a:effectRef>
+          <a:fontRef idx="minor">
+            <a:schemeClr val="lt1"/>
+          </a:fontRef>
+        </p:style>
+        <p:txBody>
+          <a:bodyPr rtlCol="0" anchor="ctr"/>
+          <a:lstStyle/>
+          <a:p>
+            <a:pPr algn="ctr"/>
+          </a:p>
+        </p:txBody>
+      </p:sp>
+      <p:sp>
+        <p:nvSpPr>
+          <p:cNvPr id="30" name="TextBox 29"/>
+          <p:cNvSpPr txBox="1"/>
+          <p:nvPr/>
+        </p:nvSpPr>
+        <p:spPr>
+          <a:xfrm>
+            <a:off x="4754880" y="2316192"/>
+            <a:ext cx="380000" cy="300000"/>
+          </a:xfrm>
+          <a:prstGeom prst="rect">
+            <a:avLst/>
+          </a:prstGeom>
+          <a:noFill/>
+        </p:spPr>
+        <p:txBody>
+          <a:bodyPr wrap="none">
+            <a:spAutoFit/>
+          </a:bodyPr>
+          <a:lstStyle/>
+          <a:p>
+            <a:pPr algn="l"/>
+            <a:r>
+              <a:rPr sz="900" b="1">
+                <a:solidFill>
+                  <a:srgbClr val="00C0C8"/>
+                </a:solidFill>
+                <a:latin typeface="メイリオ"/>
+              </a:rPr>
+              <a:t>型C</a:t>
+            </a:r>
+          </a:p>
+        </p:txBody>
+      </p:sp>
+      <p:sp>
+        <p:nvSpPr>
+          <p:cNvPr id="31" name="TextBox 30"/>
+          <p:cNvSpPr txBox="1"/>
+          <p:nvPr/>
+        </p:nvSpPr>
+        <p:spPr>
+          <a:xfrm>
+            <a:off x="5349240" y="2316192"/>
+            <a:ext cx="820000" cy="300000"/>
+          </a:xfrm>
+          <a:prstGeom prst="rect">
+            <a:avLst/>
+          </a:prstGeom>
+          <a:noFill/>
+        </p:spPr>
+        <p:txBody>
+          <a:bodyPr wrap="square">
+            <a:spAutoFit/>
+          </a:bodyPr>
+          <a:lstStyle/>
+          <a:p>
+            <a:pPr algn="ctr"/>
+            <a:r>
+              <a:rPr sz="1300" b="1">
+                <a:solidFill>
+                  <a:srgbClr val="00C0C8"/>
+                </a:solidFill>
+                <a:latin typeface="メイリオ"/>
+              </a:rPr>
+              <a:t>80.1%</a:t>
+            </a:r>
+          </a:p>
+        </p:txBody>
+      </p:sp>
+      <p:sp>
+        <p:nvSpPr>
+          <p:cNvPr id="32" name="TextBox 31"/>
+          <p:cNvSpPr txBox="1"/>
+          <p:nvPr/>
+        </p:nvSpPr>
+        <p:spPr>
+          <a:xfrm>
+            <a:off x="6446520" y="2316192"/>
+            <a:ext cx="2240280" cy="300000"/>
+          </a:xfrm>
+          <a:prstGeom prst="rect">
+            <a:avLst/>
+          </a:prstGeom>
+          <a:noFill/>
+        </p:spPr>
+        <p:txBody>
+          <a:bodyPr wrap="square">
+            <a:spAutoFit/>
+          </a:bodyPr>
+          <a:lstStyle/>
+          <a:p>
+            <a:pPr algn="l"/>
+            <a:r>
+              <a:rPr sz="850" b="0">
+                <a:solidFill>
+                  <a:srgbClr val="E0E8F0"/>
+                </a:solidFill>
+                <a:latin typeface="メイリオ"/>
+              </a:rPr>
+              <a:t>継続率高め</a:t>
+            </a:r>
+          </a:p>
+        </p:txBody>
+      </p:sp>
+      <p:sp>
+        <p:nvSpPr>
+          <p:cNvPr id="33" name="Rectangle 32"/>
+          <p:cNvSpPr/>
+          <p:nvPr/>
+        </p:nvSpPr>
+        <p:spPr>
+          <a:xfrm>
+            <a:off x="4663440" y="2661192"/>
+            <a:ext cx="4160520" cy="360000"/>
+          </a:xfrm>
+          <a:prstGeom prst="rect">
+            <a:avLst/>
+          </a:prstGeom>
+          <a:solidFill>
+            <a:srgbClr val="0E182C"/>
+          </a:solidFill>
+          <a:ln>
+            <a:noFill/>
+          </a:ln>
+        </p:spPr>
+        <p:style>
+          <a:lnRef idx="1">
+            <a:schemeClr val="accent1"/>
+          </a:lnRef>
+          <a:fillRef idx="3">
+            <a:schemeClr val="accent1"/>
+          </a:fillRef>
+          <a:effectRef idx="2">
+            <a:schemeClr val="accent1"/>
+          </a:effectRef>
+          <a:fontRef idx="minor">
+            <a:schemeClr val="lt1"/>
+          </a:fontRef>
+        </p:style>
+        <p:txBody>
+          <a:bodyPr rtlCol="0" anchor="ctr"/>
+          <a:lstStyle/>
+          <a:p>
+            <a:pPr algn="ctr"/>
+          </a:p>
+        </p:txBody>
+      </p:sp>
+      <p:sp>
+        <p:nvSpPr>
+          <p:cNvPr id="34" name="TextBox 33"/>
+          <p:cNvSpPr txBox="1"/>
+          <p:nvPr/>
+        </p:nvSpPr>
+        <p:spPr>
+          <a:xfrm>
+            <a:off x="4754880" y="2691192"/>
+            <a:ext cx="380000" cy="300000"/>
+          </a:xfrm>
+          <a:prstGeom prst="rect">
+            <a:avLst/>
+          </a:prstGeom>
+          <a:noFill/>
+        </p:spPr>
+        <p:txBody>
+          <a:bodyPr wrap="none">
+            <a:spAutoFit/>
+          </a:bodyPr>
+          <a:lstStyle/>
+          <a:p>
+            <a:pPr algn="l"/>
+            <a:r>
+              <a:rPr sz="900" b="1">
+                <a:solidFill>
+                  <a:srgbClr val="FFD700"/>
+                </a:solidFill>
+                <a:latin typeface="メイリオ"/>
+              </a:rPr>
+              <a:t>型D</a:t>
+            </a:r>
+          </a:p>
+        </p:txBody>
+      </p:sp>
+      <p:sp>
+        <p:nvSpPr>
+          <p:cNvPr id="35" name="TextBox 34"/>
+          <p:cNvSpPr txBox="1"/>
+          <p:nvPr/>
+        </p:nvSpPr>
+        <p:spPr>
+          <a:xfrm>
+            <a:off x="5349240" y="2691192"/>
+            <a:ext cx="820000" cy="300000"/>
+          </a:xfrm>
+          <a:prstGeom prst="rect">
+            <a:avLst/>
+          </a:prstGeom>
+          <a:noFill/>
+        </p:spPr>
+        <p:txBody>
+          <a:bodyPr wrap="square">
+            <a:spAutoFit/>
+          </a:bodyPr>
+          <a:lstStyle/>
+          <a:p>
+            <a:pPr algn="ctr"/>
+            <a:r>
+              <a:rPr sz="1300" b="1">
+                <a:solidFill>
+                  <a:srgbClr val="FFD700"/>
+                </a:solidFill>
+                <a:latin typeface="メイリオ"/>
+              </a:rPr>
+              <a:t>90.2%</a:t>
+            </a:r>
+          </a:p>
+        </p:txBody>
+      </p:sp>
+      <p:sp>
+        <p:nvSpPr>
+          <p:cNvPr id="36" name="TextBox 35"/>
+          <p:cNvSpPr txBox="1"/>
+          <p:nvPr/>
+        </p:nvSpPr>
+        <p:spPr>
+          <a:xfrm>
+            <a:off x="6446520" y="2691192"/>
+            <a:ext cx="2240280" cy="300000"/>
+          </a:xfrm>
+          <a:prstGeom prst="rect">
+            <a:avLst/>
+          </a:prstGeom>
+          <a:noFill/>
+        </p:spPr>
+        <p:txBody>
+          <a:bodyPr wrap="square">
+            <a:spAutoFit/>
+          </a:bodyPr>
+          <a:lstStyle/>
+          <a:p>
+            <a:pPr algn="l"/>
+            <a:r>
+              <a:rPr sz="850" b="0">
+                <a:solidFill>
+                  <a:srgbClr val="E0E8F0"/>
+                </a:solidFill>
+                <a:latin typeface="メイリオ"/>
+              </a:rPr>
+              <a:t>継続率最高</a:t>
+            </a:r>
+          </a:p>
+        </p:txBody>
+      </p:sp>
+      <p:sp>
+        <p:nvSpPr>
+          <p:cNvPr id="37" name="Rectangle 36"/>
+          <p:cNvSpPr/>
+          <p:nvPr/>
+        </p:nvSpPr>
+        <p:spPr>
+          <a:xfrm>
+            <a:off x="4663440" y="3127248"/>
+            <a:ext cx="4160520" cy="820000"/>
+          </a:xfrm>
+          <a:prstGeom prst="rect">
+            <a:avLst/>
+          </a:prstGeom>
+          <a:solidFill>
+            <a:srgbClr val="000A22"/>
+          </a:solidFill>
+          <a:ln w="19050">
+            <a:solidFill>
+              <a:srgbClr val="007AFF"/>
+            </a:solidFill>
+          </a:ln>
+        </p:spPr>
+        <p:style>
+          <a:lnRef idx="1">
+            <a:schemeClr val="accent1"/>
+          </a:lnRef>
+          <a:fillRef idx="3">
+            <a:schemeClr val="accent1"/>
+          </a:fillRef>
+          <a:effectRef idx="2">
+            <a:schemeClr val="accent1"/>
+          </a:effectRef>
+          <a:fontRef idx="minor">
+            <a:schemeClr val="lt1"/>
+          </a:fontRef>
+        </p:style>
+        <p:txBody>
+          <a:bodyPr rtlCol="0" anchor="ctr"/>
+          <a:lstStyle/>
+          <a:p>
+            <a:pPr algn="ctr"/>
+          </a:p>
+        </p:txBody>
+      </p:sp>
+      <p:sp>
+        <p:nvSpPr>
+          <p:cNvPr id="38" name="TextBox 37"/>
+          <p:cNvSpPr txBox="1"/>
+          <p:nvPr/>
+        </p:nvSpPr>
+        <p:spPr>
+          <a:xfrm>
+            <a:off x="4773168" y="3182112"/>
+            <a:ext cx="3840480" cy="280000"/>
           </a:xfrm>
           <a:prstGeom prst="rect">
             <a:avLst/>
@@ -18266,25 +19617,183 @@
             <a:r>
               <a:rPr sz="950" b="1">
                 <a:solidFill>
+                  <a:srgbClr val="007AFF"/>
+                </a:solidFill>
+                <a:latin typeface="游明朝"/>
+              </a:rPr>
+              <a:t>継続率に漏れた場合</a:t>
+            </a:r>
+          </a:p>
+        </p:txBody>
+      </p:sp>
+      <p:sp>
+        <p:nvSpPr>
+          <p:cNvPr id="39" name="TextBox 38"/>
+          <p:cNvSpPr txBox="1"/>
+          <p:nvPr/>
+        </p:nvSpPr>
+        <p:spPr>
+          <a:xfrm>
+            <a:off x="4773168" y="3493008"/>
+            <a:ext cx="3840480" cy="420000"/>
+          </a:xfrm>
+          <a:prstGeom prst="rect">
+            <a:avLst/>
+          </a:prstGeom>
+          <a:noFill/>
+        </p:spPr>
+        <p:txBody>
+          <a:bodyPr wrap="square">
+            <a:spAutoFit/>
+          </a:bodyPr>
+          <a:lstStyle/>
+          <a:p>
+            <a:pPr algn="l"/>
+            <a:r>
+              <a:rPr sz="850" b="0">
+                <a:solidFill>
+                  <a:srgbClr val="E0E8F0"/>
+                </a:solidFill>
+                <a:latin typeface="メイリオ"/>
+              </a:rPr>
+              <a:t>青島VS波多野へ移行
+→ 勝利で上位AT「青島SG」突入
+（エキシビション失敗が青島SG入口になる）</a:t>
+            </a:r>
+          </a:p>
+        </p:txBody>
+      </p:sp>
+      <p:sp>
+        <p:nvSpPr>
+          <p:cNvPr id="40" name="Rectangle 39"/>
+          <p:cNvSpPr/>
+          <p:nvPr/>
+        </p:nvSpPr>
+        <p:spPr>
+          <a:xfrm>
+            <a:off x="182880" y="4069080"/>
+            <a:ext cx="8778240" cy="560000"/>
+          </a:xfrm>
+          <a:prstGeom prst="rect">
+            <a:avLst/>
+          </a:prstGeom>
+          <a:solidFill>
+            <a:srgbClr val="101006"/>
+          </a:solidFill>
+          <a:ln>
+            <a:noFill/>
+          </a:ln>
+        </p:spPr>
+        <p:style>
+          <a:lnRef idx="1">
+            <a:schemeClr val="accent1"/>
+          </a:lnRef>
+          <a:fillRef idx="3">
+            <a:schemeClr val="accent1"/>
+          </a:fillRef>
+          <a:effectRef idx="2">
+            <a:schemeClr val="accent1"/>
+          </a:effectRef>
+          <a:fontRef idx="minor">
+            <a:schemeClr val="lt1"/>
+          </a:fontRef>
+        </p:style>
+        <p:txBody>
+          <a:bodyPr rtlCol="0" anchor="ctr"/>
+          <a:lstStyle/>
+          <a:p>
+            <a:pPr algn="ctr"/>
+          </a:p>
+        </p:txBody>
+      </p:sp>
+      <p:sp>
+        <p:nvSpPr>
+          <p:cNvPr id="41" name="Rectangle 40"/>
+          <p:cNvSpPr/>
+          <p:nvPr/>
+        </p:nvSpPr>
+        <p:spPr>
+          <a:xfrm>
+            <a:off x="182880" y="4069080"/>
+            <a:ext cx="55000" cy="560000"/>
+          </a:xfrm>
+          <a:prstGeom prst="rect">
+            <a:avLst/>
+          </a:prstGeom>
+          <a:solidFill>
+            <a:srgbClr val="C8A840"/>
+          </a:solidFill>
+          <a:ln>
+            <a:noFill/>
+          </a:ln>
+        </p:spPr>
+        <p:style>
+          <a:lnRef idx="1">
+            <a:schemeClr val="accent1"/>
+          </a:lnRef>
+          <a:fillRef idx="3">
+            <a:schemeClr val="accent1"/>
+          </a:fillRef>
+          <a:effectRef idx="2">
+            <a:schemeClr val="accent1"/>
+          </a:effectRef>
+          <a:fontRef idx="minor">
+            <a:schemeClr val="lt1"/>
+          </a:fontRef>
+        </p:style>
+        <p:txBody>
+          <a:bodyPr rtlCol="0" anchor="ctr"/>
+          <a:lstStyle/>
+          <a:p>
+            <a:pPr algn="ctr"/>
+          </a:p>
+        </p:txBody>
+      </p:sp>
+      <p:sp>
+        <p:nvSpPr>
+          <p:cNvPr id="42" name="TextBox 41"/>
+          <p:cNvSpPr txBox="1"/>
+          <p:nvPr/>
+        </p:nvSpPr>
+        <p:spPr>
+          <a:xfrm>
+            <a:off x="411480" y="4114800"/>
+            <a:ext cx="8321040" cy="250000"/>
+          </a:xfrm>
+          <a:prstGeom prst="rect">
+            <a:avLst/>
+          </a:prstGeom>
+          <a:noFill/>
+        </p:spPr>
+        <p:txBody>
+          <a:bodyPr wrap="square">
+            <a:spAutoFit/>
+          </a:bodyPr>
+          <a:lstStyle/>
+          <a:p>
+            <a:pPr algn="l"/>
+            <a:r>
+              <a:rPr sz="950" b="1">
+                <a:solidFill>
                   <a:srgbClr val="C8A840"/>
                 </a:solidFill>
                 <a:latin typeface="メイリオ"/>
               </a:rPr>
-              <a:t>総評：「遊びやすさ × パンチ × 深み」が高水準で共存している数少ない台</a:t>
-            </a:r>
-          </a:p>
-        </p:txBody>
-      </p:sp>
-      <p:sp>
-        <p:nvSpPr>
-          <p:cNvPr id="18" name="TextBox 17"/>
-          <p:cNvSpPr txBox="1"/>
-          <p:nvPr/>
-        </p:nvSpPr>
-        <p:spPr>
-          <a:xfrm>
-            <a:off x="320040" y="4434840"/>
-            <a:ext cx="8412480" cy="260000"/>
+              <a:t>エキシビションの巧みな設計：「継続に漏れる = 青島SGへの入口」という逆転構造</a:t>
+            </a:r>
+          </a:p>
+        </p:txBody>
+      </p:sp>
+      <p:sp>
+        <p:nvSpPr>
+          <p:cNvPr id="43" name="TextBox 42"/>
+          <p:cNvSpPr txBox="1"/>
+          <p:nvPr/>
+        </p:nvSpPr>
+        <p:spPr>
+          <a:xfrm>
+            <a:off x="411480" y="4416552"/>
+            <a:ext cx="8321040" cy="250000"/>
           </a:xfrm>
           <a:prstGeom prst="rect">
             <a:avLst/>
@@ -18305,7 +19814,42 @@
                 </a:solidFill>
                 <a:latin typeface="メイリオ"/>
               </a:rPr>
-              <a:t>機械割設定6で114.9%・シナリオ14種・上位AT純増4.0枚。スペック・ゲーム性・演出のどこを切っても水準以上。</a:t>
+              <a:t>エキシビションで多く続けば出玉増、漏れても青島SGチャンス。どちらに転んでも「良いことがある」設計。</a:t>
+            </a:r>
+          </a:p>
+        </p:txBody>
+      </p:sp>
+      <p:sp>
+        <p:nvSpPr>
+          <p:cNvPr id="44" name="TextBox 43"/>
+          <p:cNvSpPr txBox="1"/>
+          <p:nvPr/>
+        </p:nvSpPr>
+        <p:spPr>
+          <a:xfrm>
+            <a:off x="7498079" y="4919472"/>
+            <a:ext cx="1554480" cy="200000"/>
+          </a:xfrm>
+          <a:prstGeom prst="rect">
+            <a:avLst/>
+          </a:prstGeom>
+          <a:noFill/>
+        </p:spPr>
+        <p:txBody>
+          <a:bodyPr wrap="square">
+            <a:spAutoFit/>
+          </a:bodyPr>
+          <a:lstStyle/>
+          <a:p>
+            <a:pPr algn="r"/>
+            <a:r>
+              <a:rPr sz="700" b="0">
+                <a:solidFill>
+                  <a:srgbClr val="888888"/>
+                </a:solidFill>
+                <a:latin typeface="メイリオ"/>
+              </a:rPr>
+              <a:t>※ネット解析情報より</a:t>
             </a:r>
           </a:p>
         </p:txBody>
